--- a/outputs/presentation/ssd-survival-strategy.pptx
+++ b/outputs/presentation/ssd-survival-strategy.pptx
@@ -644,7 +644,7 @@
           <a:lstStyle/>
           <a:p>
             <a:r>
-              <a:t>3장 실행 전략입니다. 2장의 결론인 기술, 인재, 고객 협력 세 축을 세 단계로 쌓습니다. 기술은 계단입니다. 1단계는 출하 시 구성 SKU로 OP와 SLC 비율, 배치 핸들 16개 이상을 고객이 고르게 합니다. 2단계는 운영 중 조정으로 배치 정책과 GC 강도를 조절하고 WAF를 감시합니다. 3단계가 워크로드 구성형 플랫폼으로, 런타임 WAF 대응과 고객별 운영점을 제공합니다. 용량과 내구성까지 운영 중에 바꾸는 워크로드 적응형은 그 다음의 장기 과제입니다. 인재는 고객 시스템을 아는 시스템 소프트웨어 전문가를 미주 현지에서 뽑고, 펌웨어와 FTL 엔지니어를 호스트 소프트웨어로 전환시키며, 오픈소스 메인테이너와 고객이 이름으로 부르는 아키텍트를 만듭니다. 고객 협력은 워크로드를 여는 등대 고객 한두 곳을 골라 Co-Design Pod를 상주시키고, LMCache, vLLM, Dynamo에 FDP 경로를 업스트림으로 넣고, 공동 설계와 다년 공급, 워크로드 접근을 한 계약에 묶는 전략적 협약으로 갑니다. 시계가 중요합니다. 공급자 우위는 2027년 하반기 공급 완화 전까지이므로, 워크로드 접근권을 계약으로 고정할 창은 2026년 4분기부터 2027년 상반기입니다. 첫 90일은 KV-ready SSD 정의, 등대 고객 선정, Co-Design Pod 구성입니다. HBM에서 배운 것처럼, 이번에는 고객과 함께 수요를 만듭니다.</a:t>
+              <a:t>3장 실행 전략입니다. HBM의 교훈은 고객과 함께 수요를 만드는 기업이 이긴다는 것이었습니다. 그렇게 하려면 세 가지가 바뀌어야 합니다. 첫째, 계약입니다. 지금 고객과의 계약은 장기 물량 계약, 즉 수량과 가격의 약속입니다. Micron은 2026년 6월 Anthropic과 맺은 전략적 계약에서 다년 공급 위에 HBM·DRAM·데이터센터 SSD를 Claude의 학습·추론 워크로드에 맞춰 함께 설계하고 최적화하는 공동 작업, 그리고 Micron 엔지니어링·제조 운영에 Claude를 들이는 운영 통합을 한 계약으로 묶었습니다. Anthropic Series H 전략 투자도 함께였지만 이는 선택지로 둡니다. 우리도 물량 위에 기술 협력을 쌓아야 합니다. 둘째, 사람입니다. 지금은 스펙 문서와 간헐적 미팅으로 협력하기 때문에 고객이 명시한 요구만 우리에게 옵니다. Palantir가 창안한 FDE는 엔지니어가 고객 환경 안에 상주하며 실제 운영 제약 아래서 시스템을 함께 만들고, 명시된 요구와 실제 요구 사이의 간극을 현장에서 메웁니다. 현장에서 만든 해법이 제품의 표준 기능이 되는 순환이 생기고, 그 순환이 곧 수요를 함께 만드는 과정입니다. Anthropic과 OpenAI도 같은 방식으로 자기 고객에게 들어가고 있습니다. 우리의 Co-Design Pod가 그 역할입니다. 셋째, 역량입니다. 데이터의 수명 정보는 SSD가 아니라 고객의 KV 캐시 소프트웨어 안에 있습니다. 그런데 LMCache, Mooncake, FlexKV, Dynamo 같은 KV 캐시 관리자 네 곳의 공개 저장소에 삼성의 기여는 없습니다. 우리가 강한 곳은 NAND와 SSD 펌웨어이고, 커널과 I/O는 일부입니다. 필요한 것은 그 위, 즉 시스템 소프트웨어와 AI 데이터센터를 직접 운영하는 고객의 눈입니다. 고객은 토큰당 비용, 전력, GPU 가동률로 말합니다. 그 수준의 전문성을 갖춘 사람을 뽑고 길러야 합니다. 시작은 등대 고객 한두 곳과 기술 협력을 포함한 계약, Co-Design Pod 상주, 시스템 소프트웨어 전문가 채용입니다.</a:t>
             </a:r>
           </a:p>
         </p:txBody>
@@ -10151,7 +10151,7 @@
                 <a:latin typeface="Arial"/>
                 <a:ea typeface="Arial"/>
               </a:rPr>
-              <a:t>기술 · 인재 · 고객 협력을 3단계로 쌓아,</a:t>
+              <a:t>계약에 기술 협력을 묶고, 고객 안에 사람을 두고,</a:t>
             </a:r>
           </a:p>
           <a:p>
@@ -10168,7 +10168,7 @@
                 <a:latin typeface="Arial"/>
                 <a:ea typeface="Arial"/>
               </a:rPr>
-              <a:t>워크로드 구성형 SSD로 AI 스토리지를 선점합니다</a:t>
+              <a:t>AI 데이터센터 운영자 수준의 시스템 SW 역량을 갖춰야 합니다</a:t>
             </a:r>
           </a:p>
         </p:txBody>
@@ -10219,16 +10219,434 @@
       </p:sp>
       <p:sp>
         <p:nvSpPr>
-          <p:cNvPr id="6" name="Pentagon 5"/>
+          <p:cNvPr id="6" name="Oval 5"/>
           <p:cNvSpPr/>
           <p:nvPr/>
         </p:nvSpPr>
         <p:spPr>
           <a:xfrm>
-            <a:off x="3063240" y="2157984"/>
-            <a:ext cx="4846320" cy="841248"/>
-          </a:xfrm>
-          <a:prstGeom prst="homePlate">
+            <a:off x="722376" y="2139696"/>
+            <a:ext cx="438912" cy="438912"/>
+          </a:xfrm>
+          <a:prstGeom prst="ellipse">
+            <a:avLst/>
+          </a:prstGeom>
+          <a:solidFill>
+            <a:srgbClr val="1428A0"/>
+          </a:solidFill>
+          <a:ln>
+            <a:noFill/>
+          </a:ln>
+          <a:effectLst/>
+        </p:spPr>
+        <p:style>
+          <a:lnRef idx="1">
+            <a:schemeClr val="accent1"/>
+          </a:lnRef>
+          <a:fillRef idx="3">
+            <a:schemeClr val="accent1"/>
+          </a:fillRef>
+          <a:effectRef idx="2">
+            <a:schemeClr val="accent1"/>
+          </a:effectRef>
+          <a:fontRef idx="minor">
+            <a:schemeClr val="lt1"/>
+          </a:fontRef>
+        </p:style>
+        <p:txBody>
+          <a:bodyPr rtlCol="0" anchor="ctr"/>
+          <a:lstStyle/>
+          <a:p>
+            <a:pPr algn="ctr"/>
+          </a:p>
+        </p:txBody>
+      </p:sp>
+      <p:sp>
+        <p:nvSpPr>
+          <p:cNvPr id="7" name="TextBox 6"/>
+          <p:cNvSpPr txBox="1"/>
+          <p:nvPr/>
+        </p:nvSpPr>
+        <p:spPr>
+          <a:xfrm>
+            <a:off x="722376" y="2139696"/>
+            <a:ext cx="438912" cy="438912"/>
+          </a:xfrm>
+          <a:prstGeom prst="rect">
+            <a:avLst/>
+          </a:prstGeom>
+          <a:noFill/>
+        </p:spPr>
+        <p:txBody>
+          <a:bodyPr wrap="square" anchor="ctr" lIns="0" rIns="0" tIns="0" bIns="0">
+            <a:spAutoFit/>
+          </a:bodyPr>
+          <a:lstStyle/>
+          <a:p>
+            <a:pPr algn="ctr">
+              <a:lnSpc>
+                <a:spcPct val="110000"/>
+              </a:lnSpc>
+            </a:pPr>
+            <a:r>
+              <a:rPr sz="2000" b="1">
+                <a:solidFill>
+                  <a:srgbClr val="FFFFFF"/>
+                </a:solidFill>
+                <a:latin typeface="Arial"/>
+                <a:ea typeface="Arial"/>
+              </a:rPr>
+              <a:t>1</a:t>
+            </a:r>
+          </a:p>
+        </p:txBody>
+      </p:sp>
+      <p:sp>
+        <p:nvSpPr>
+          <p:cNvPr id="8" name="TextBox 7"/>
+          <p:cNvSpPr txBox="1"/>
+          <p:nvPr/>
+        </p:nvSpPr>
+        <p:spPr>
+          <a:xfrm>
+            <a:off x="1307592" y="2103120"/>
+            <a:ext cx="4489704" cy="512063"/>
+          </a:xfrm>
+          <a:prstGeom prst="rect">
+            <a:avLst/>
+          </a:prstGeom>
+          <a:noFill/>
+        </p:spPr>
+        <p:txBody>
+          <a:bodyPr wrap="square" anchor="ctr" lIns="0" rIns="0" tIns="0" bIns="0">
+            <a:spAutoFit/>
+          </a:bodyPr>
+          <a:lstStyle/>
+          <a:p>
+            <a:pPr algn="l">
+              <a:lnSpc>
+                <a:spcPct val="110000"/>
+              </a:lnSpc>
+            </a:pPr>
+            <a:r>
+              <a:rPr sz="2400" b="1">
+                <a:solidFill>
+                  <a:srgbClr val="1A1A1A"/>
+                </a:solidFill>
+                <a:latin typeface="Arial"/>
+                <a:ea typeface="Arial"/>
+              </a:rPr>
+              <a:t>계약: 물량에 기술 협력을</a:t>
+            </a:r>
+          </a:p>
+        </p:txBody>
+      </p:sp>
+      <p:pic>
+        <p:nvPicPr>
+          <p:cNvPr id="9" name="Picture 8" descr="micron.png"/>
+          <p:cNvPicPr>
+            <a:picLocks noChangeAspect="1"/>
+          </p:cNvPicPr>
+          <p:nvPr/>
+        </p:nvPicPr>
+        <p:blipFill>
+          <a:blip r:embed="rId2"/>
+          <a:stretch>
+            <a:fillRect/>
+          </a:stretch>
+        </p:blipFill>
+        <p:spPr>
+          <a:xfrm>
+            <a:off x="722376" y="2761488"/>
+            <a:ext cx="1151291" cy="246888"/>
+          </a:xfrm>
+          <a:prstGeom prst="rect">
+            <a:avLst/>
+          </a:prstGeom>
+        </p:spPr>
+      </p:pic>
+      <p:sp>
+        <p:nvSpPr>
+          <p:cNvPr id="10" name="TextBox 9"/>
+          <p:cNvSpPr txBox="1"/>
+          <p:nvPr/>
+        </p:nvSpPr>
+        <p:spPr>
+          <a:xfrm>
+            <a:off x="1946819" y="2706624"/>
+            <a:ext cx="365760" cy="347472"/>
+          </a:xfrm>
+          <a:prstGeom prst="rect">
+            <a:avLst/>
+          </a:prstGeom>
+          <a:noFill/>
+        </p:spPr>
+        <p:txBody>
+          <a:bodyPr wrap="square" anchor="ctr" lIns="0" rIns="0" tIns="0" bIns="0">
+            <a:spAutoFit/>
+          </a:bodyPr>
+          <a:lstStyle/>
+          <a:p>
+            <a:pPr algn="ctr">
+              <a:lnSpc>
+                <a:spcPct val="110000"/>
+              </a:lnSpc>
+            </a:pPr>
+            <a:r>
+              <a:rPr sz="2000" b="1">
+                <a:solidFill>
+                  <a:srgbClr val="555555"/>
+                </a:solidFill>
+                <a:latin typeface="Arial"/>
+                <a:ea typeface="Arial"/>
+              </a:rPr>
+              <a:t>↔</a:t>
+            </a:r>
+          </a:p>
+        </p:txBody>
+      </p:sp>
+      <p:pic>
+        <p:nvPicPr>
+          <p:cNvPr id="11" name="Picture 10" descr="anthropic.png"/>
+          <p:cNvPicPr>
+            <a:picLocks noChangeAspect="1"/>
+          </p:cNvPicPr>
+          <p:nvPr/>
+        </p:nvPicPr>
+        <p:blipFill>
+          <a:blip r:embed="rId3"/>
+          <a:stretch>
+            <a:fillRect/>
+          </a:stretch>
+        </p:blipFill>
+        <p:spPr>
+          <a:xfrm>
+            <a:off x="2385731" y="2798064"/>
+            <a:ext cx="1532964" cy="173736"/>
+          </a:xfrm>
+          <a:prstGeom prst="rect">
+            <a:avLst/>
+          </a:prstGeom>
+        </p:spPr>
+      </p:pic>
+      <p:sp>
+        <p:nvSpPr>
+          <p:cNvPr id="12" name="TextBox 11"/>
+          <p:cNvSpPr txBox="1"/>
+          <p:nvPr/>
+        </p:nvSpPr>
+        <p:spPr>
+          <a:xfrm>
+            <a:off x="4046711" y="2706624"/>
+            <a:ext cx="1097280" cy="347472"/>
+          </a:xfrm>
+          <a:prstGeom prst="rect">
+            <a:avLst/>
+          </a:prstGeom>
+          <a:noFill/>
+        </p:spPr>
+        <p:txBody>
+          <a:bodyPr wrap="square" anchor="ctr" lIns="0" rIns="0" tIns="0" bIns="0">
+            <a:spAutoFit/>
+          </a:bodyPr>
+          <a:lstStyle/>
+          <a:p>
+            <a:pPr algn="l">
+              <a:lnSpc>
+                <a:spcPct val="110000"/>
+              </a:lnSpc>
+            </a:pPr>
+            <a:r>
+              <a:rPr sz="1600" b="0">
+                <a:solidFill>
+                  <a:srgbClr val="555555"/>
+                </a:solidFill>
+                <a:latin typeface="Arial"/>
+                <a:ea typeface="Arial"/>
+              </a:rPr>
+              <a:t>2026-06</a:t>
+            </a:r>
+          </a:p>
+        </p:txBody>
+      </p:sp>
+      <p:sp>
+        <p:nvSpPr>
+          <p:cNvPr id="13" name="TextBox 12"/>
+          <p:cNvSpPr txBox="1"/>
+          <p:nvPr/>
+        </p:nvSpPr>
+        <p:spPr>
+          <a:xfrm>
+            <a:off x="722376" y="3273552"/>
+            <a:ext cx="3657600" cy="329184"/>
+          </a:xfrm>
+          <a:prstGeom prst="rect">
+            <a:avLst/>
+          </a:prstGeom>
+          <a:noFill/>
+        </p:spPr>
+        <p:txBody>
+          <a:bodyPr wrap="square" anchor="t" lIns="0" rIns="0" tIns="0" bIns="0">
+            <a:spAutoFit/>
+          </a:bodyPr>
+          <a:lstStyle/>
+          <a:p>
+            <a:pPr algn="l">
+              <a:lnSpc>
+                <a:spcPct val="110000"/>
+              </a:lnSpc>
+            </a:pPr>
+            <a:r>
+              <a:rPr sz="1800" b="1">
+                <a:solidFill>
+                  <a:srgbClr val="8A8A8A"/>
+                </a:solidFill>
+                <a:latin typeface="Arial"/>
+                <a:ea typeface="Arial"/>
+              </a:rPr>
+              <a:t>지금</a:t>
+            </a:r>
+          </a:p>
+        </p:txBody>
+      </p:sp>
+      <p:sp>
+        <p:nvSpPr>
+          <p:cNvPr id="14" name="Rounded Rectangle 13"/>
+          <p:cNvSpPr/>
+          <p:nvPr/>
+        </p:nvSpPr>
+        <p:spPr>
+          <a:xfrm>
+            <a:off x="722376" y="3694176"/>
+            <a:ext cx="5074920" cy="566928"/>
+          </a:xfrm>
+          <a:prstGeom prst="roundRect">
+            <a:avLst>
+              <a:gd name="adj" fmla="val 12903"/>
+            </a:avLst>
+          </a:prstGeom>
+          <a:solidFill>
+            <a:srgbClr val="8A8A8A"/>
+          </a:solidFill>
+          <a:ln>
+            <a:noFill/>
+          </a:ln>
+          <a:effectLst/>
+        </p:spPr>
+        <p:style>
+          <a:lnRef idx="1">
+            <a:schemeClr val="accent1"/>
+          </a:lnRef>
+          <a:fillRef idx="3">
+            <a:schemeClr val="accent1"/>
+          </a:fillRef>
+          <a:effectRef idx="2">
+            <a:schemeClr val="accent1"/>
+          </a:effectRef>
+          <a:fontRef idx="minor">
+            <a:schemeClr val="lt1"/>
+          </a:fontRef>
+        </p:style>
+        <p:txBody>
+          <a:bodyPr rtlCol="0" anchor="ctr"/>
+          <a:lstStyle/>
+          <a:p>
+            <a:pPr algn="ctr"/>
+          </a:p>
+        </p:txBody>
+      </p:sp>
+      <p:sp>
+        <p:nvSpPr>
+          <p:cNvPr id="15" name="TextBox 14"/>
+          <p:cNvSpPr txBox="1"/>
+          <p:nvPr/>
+        </p:nvSpPr>
+        <p:spPr>
+          <a:xfrm>
+            <a:off x="777240" y="3694176"/>
+            <a:ext cx="4965192" cy="566928"/>
+          </a:xfrm>
+          <a:prstGeom prst="rect">
+            <a:avLst/>
+          </a:prstGeom>
+          <a:noFill/>
+        </p:spPr>
+        <p:txBody>
+          <a:bodyPr wrap="square" anchor="ctr" lIns="0" rIns="0" tIns="0" bIns="0">
+            <a:spAutoFit/>
+          </a:bodyPr>
+          <a:lstStyle/>
+          <a:p>
+            <a:pPr algn="ctr">
+              <a:lnSpc>
+                <a:spcPct val="110000"/>
+              </a:lnSpc>
+            </a:pPr>
+            <a:r>
+              <a:rPr sz="2000" b="1">
+                <a:solidFill>
+                  <a:srgbClr val="FFFFFF"/>
+                </a:solidFill>
+                <a:latin typeface="Arial"/>
+                <a:ea typeface="Arial"/>
+              </a:rPr>
+              <a:t>장기 물량 계약 (LTA)</a:t>
+            </a:r>
+          </a:p>
+        </p:txBody>
+      </p:sp>
+      <p:sp>
+        <p:nvSpPr>
+          <p:cNvPr id="16" name="TextBox 15"/>
+          <p:cNvSpPr txBox="1"/>
+          <p:nvPr/>
+        </p:nvSpPr>
+        <p:spPr>
+          <a:xfrm>
+            <a:off x="722376" y="4334256"/>
+            <a:ext cx="5074920" cy="329184"/>
+          </a:xfrm>
+          <a:prstGeom prst="rect">
+            <a:avLst/>
+          </a:prstGeom>
+          <a:noFill/>
+        </p:spPr>
+        <p:txBody>
+          <a:bodyPr wrap="square" anchor="t" lIns="0" rIns="0" tIns="0" bIns="0">
+            <a:spAutoFit/>
+          </a:bodyPr>
+          <a:lstStyle/>
+          <a:p>
+            <a:pPr algn="ctr">
+              <a:lnSpc>
+                <a:spcPct val="110000"/>
+              </a:lnSpc>
+            </a:pPr>
+            <a:r>
+              <a:rPr sz="1800" b="0">
+                <a:solidFill>
+                  <a:srgbClr val="555555"/>
+                </a:solidFill>
+                <a:latin typeface="Arial"/>
+                <a:ea typeface="Arial"/>
+              </a:rPr>
+              <a:t>수량과 가격만 약속합니다</a:t>
+            </a:r>
+          </a:p>
+        </p:txBody>
+      </p:sp>
+      <p:sp>
+        <p:nvSpPr>
+          <p:cNvPr id="17" name="Isosceles Triangle 16"/>
+          <p:cNvSpPr/>
+          <p:nvPr/>
+        </p:nvSpPr>
+        <p:spPr>
+          <a:xfrm rot="10800000">
+            <a:off x="3058668" y="4828032"/>
+            <a:ext cx="402336" cy="237744"/>
+          </a:xfrm>
+          <a:prstGeom prst="triangle">
             <a:avLst/>
           </a:prstGeom>
           <a:solidFill>
@@ -10263,14 +10681,103 @@
       </p:sp>
       <p:sp>
         <p:nvSpPr>
-          <p:cNvPr id="7" name="TextBox 6"/>
+          <p:cNvPr id="18" name="TextBox 17"/>
           <p:cNvSpPr txBox="1"/>
           <p:nvPr/>
         </p:nvSpPr>
         <p:spPr>
           <a:xfrm>
-            <a:off x="3291840" y="2157984"/>
-            <a:ext cx="4297679" cy="841248"/>
+            <a:off x="722376" y="5138928"/>
+            <a:ext cx="3657600" cy="329184"/>
+          </a:xfrm>
+          <a:prstGeom prst="rect">
+            <a:avLst/>
+          </a:prstGeom>
+          <a:noFill/>
+        </p:spPr>
+        <p:txBody>
+          <a:bodyPr wrap="square" anchor="t" lIns="0" rIns="0" tIns="0" bIns="0">
+            <a:spAutoFit/>
+          </a:bodyPr>
+          <a:lstStyle/>
+          <a:p>
+            <a:pPr algn="l">
+              <a:lnSpc>
+                <a:spcPct val="110000"/>
+              </a:lnSpc>
+            </a:pPr>
+            <a:r>
+              <a:rPr sz="1800" b="1">
+                <a:solidFill>
+                  <a:srgbClr val="1428A0"/>
+                </a:solidFill>
+                <a:latin typeface="Arial"/>
+                <a:ea typeface="Arial"/>
+              </a:rPr>
+              <a:t>앞으로: 전략적 계약</a:t>
+            </a:r>
+          </a:p>
+        </p:txBody>
+      </p:sp>
+      <p:sp>
+        <p:nvSpPr>
+          <p:cNvPr id="19" name="Rounded Rectangle 18"/>
+          <p:cNvSpPr/>
+          <p:nvPr/>
+        </p:nvSpPr>
+        <p:spPr>
+          <a:xfrm>
+            <a:off x="722376" y="5559552"/>
+            <a:ext cx="4114800" cy="512064"/>
+          </a:xfrm>
+          <a:prstGeom prst="roundRect">
+            <a:avLst>
+              <a:gd name="adj" fmla="val 14285"/>
+            </a:avLst>
+          </a:prstGeom>
+          <a:solidFill>
+            <a:srgbClr val="FFFFFF"/>
+          </a:solidFill>
+          <a:ln w="12700">
+            <a:solidFill>
+              <a:srgbClr val="8A8A8A"/>
+            </a:solidFill>
+            <a:prstDash val="dash"/>
+          </a:ln>
+          <a:effectLst/>
+        </p:spPr>
+        <p:style>
+          <a:lnRef idx="1">
+            <a:schemeClr val="accent1"/>
+          </a:lnRef>
+          <a:fillRef idx="3">
+            <a:schemeClr val="accent1"/>
+          </a:fillRef>
+          <a:effectRef idx="2">
+            <a:schemeClr val="accent1"/>
+          </a:effectRef>
+          <a:fontRef idx="minor">
+            <a:schemeClr val="lt1"/>
+          </a:fontRef>
+        </p:style>
+        <p:txBody>
+          <a:bodyPr rtlCol="0" anchor="ctr"/>
+          <a:lstStyle/>
+          <a:p>
+            <a:pPr algn="ctr"/>
+          </a:p>
+        </p:txBody>
+      </p:sp>
+      <p:sp>
+        <p:nvSpPr>
+          <p:cNvPr id="20" name="TextBox 19"/>
+          <p:cNvSpPr txBox="1"/>
+          <p:nvPr/>
+        </p:nvSpPr>
+        <p:spPr>
+          <a:xfrm>
+            <a:off x="777240" y="5559552"/>
+            <a:ext cx="4005072" cy="512064"/>
           </a:xfrm>
           <a:prstGeom prst="rect">
             <a:avLst/>
@@ -10283,64 +10790,39 @@
           </a:bodyPr>
           <a:lstStyle/>
           <a:p>
-            <a:pPr algn="l">
+            <a:pPr algn="ctr">
               <a:lnSpc>
-                <a:spcPct val="100000"/>
+                <a:spcPct val="110000"/>
               </a:lnSpc>
             </a:pPr>
             <a:r>
-              <a:rPr sz="2000" b="1">
-                <a:solidFill>
-                  <a:srgbClr val="1A1A1A"/>
-                </a:solidFill>
-                <a:latin typeface="Arial"/>
-                <a:ea typeface="Arial"/>
-              </a:rPr>
-              <a:t>1단계  </a:t>
-            </a:r>
-            <a:r>
               <a:rPr sz="1800" b="0">
                 <a:solidFill>
-                  <a:srgbClr val="1A1A1A"/>
-                </a:solidFill>
-                <a:latin typeface="Arial"/>
-                <a:ea typeface="Arial"/>
-              </a:rPr>
-              <a:t>2026 하반기</a:t>
-            </a:r>
-          </a:p>
-          <a:p>
-            <a:pPr algn="l">
-              <a:lnSpc>
-                <a:spcPct val="100000"/>
-              </a:lnSpc>
-            </a:pPr>
-            <a:r>
-              <a:rPr sz="2000" b="1">
-                <a:solidFill>
-                  <a:srgbClr val="1A1A1A"/>
-                </a:solidFill>
-                <a:latin typeface="Arial"/>
-                <a:ea typeface="Arial"/>
-              </a:rPr>
-              <a:t>디바이스를 준비합니다</a:t>
-            </a:r>
-          </a:p>
-        </p:txBody>
-      </p:sp>
-      <p:sp>
-        <p:nvSpPr>
-          <p:cNvPr id="8" name="Pentagon 7"/>
+                  <a:srgbClr val="555555"/>
+                </a:solidFill>
+                <a:latin typeface="Arial"/>
+                <a:ea typeface="Arial"/>
+              </a:rPr>
+              <a:t>자본 연계 (선택)</a:t>
+            </a:r>
+          </a:p>
+        </p:txBody>
+      </p:sp>
+      <p:sp>
+        <p:nvSpPr>
+          <p:cNvPr id="21" name="Rounded Rectangle 20"/>
           <p:cNvSpPr/>
           <p:nvPr/>
         </p:nvSpPr>
         <p:spPr>
           <a:xfrm>
-            <a:off x="7982712" y="2157984"/>
-            <a:ext cx="4846320" cy="841248"/>
-          </a:xfrm>
-          <a:prstGeom prst="homePlate">
-            <a:avLst/>
+            <a:off x="722376" y="6163056"/>
+            <a:ext cx="4114800" cy="512064"/>
+          </a:xfrm>
+          <a:prstGeom prst="roundRect">
+            <a:avLst>
+              <a:gd name="adj" fmla="val 14285"/>
+            </a:avLst>
           </a:prstGeom>
           <a:solidFill>
             <a:srgbClr val="3C5AC8"/>
@@ -10374,14 +10856,14 @@
       </p:sp>
       <p:sp>
         <p:nvSpPr>
-          <p:cNvPr id="9" name="TextBox 8"/>
+          <p:cNvPr id="22" name="TextBox 21"/>
           <p:cNvSpPr txBox="1"/>
           <p:nvPr/>
         </p:nvSpPr>
         <p:spPr>
           <a:xfrm>
-            <a:off x="8211312" y="2157984"/>
-            <a:ext cx="4297679" cy="841248"/>
+            <a:off x="777240" y="6163056"/>
+            <a:ext cx="4005072" cy="512064"/>
           </a:xfrm>
           <a:prstGeom prst="rect">
             <a:avLst/>
@@ -10394,9 +10876,9 @@
           </a:bodyPr>
           <a:lstStyle/>
           <a:p>
-            <a:pPr algn="l">
+            <a:pPr algn="ctr">
               <a:lnSpc>
-                <a:spcPct val="100000"/>
+                <a:spcPct val="110000"/>
               </a:lnSpc>
             </a:pPr>
             <a:r>
@@ -10407,51 +10889,26 @@
                 <a:latin typeface="Arial"/>
                 <a:ea typeface="Arial"/>
               </a:rPr>
-              <a:t>2단계  </a:t>
-            </a:r>
-            <a:r>
-              <a:rPr sz="1800" b="0">
-                <a:solidFill>
-                  <a:srgbClr val="FFFFFF"/>
-                </a:solidFill>
-                <a:latin typeface="Arial"/>
-                <a:ea typeface="Arial"/>
-              </a:rPr>
-              <a:t>2027</a:t>
-            </a:r>
-          </a:p>
-          <a:p>
-            <a:pPr algn="l">
-              <a:lnSpc>
-                <a:spcPct val="100000"/>
-              </a:lnSpc>
-            </a:pPr>
-            <a:r>
-              <a:rPr sz="2000" b="1">
-                <a:solidFill>
-                  <a:srgbClr val="FFFFFF"/>
-                </a:solidFill>
-                <a:latin typeface="Arial"/>
-                <a:ea typeface="Arial"/>
-              </a:rPr>
-              <a:t>워크로드로 최적화합니다</a:t>
-            </a:r>
-          </a:p>
-        </p:txBody>
-      </p:sp>
-      <p:sp>
-        <p:nvSpPr>
-          <p:cNvPr id="10" name="Rectangle 9"/>
+              <a:t>운영 통합</a:t>
+            </a:r>
+          </a:p>
+        </p:txBody>
+      </p:sp>
+      <p:sp>
+        <p:nvSpPr>
+          <p:cNvPr id="23" name="Rounded Rectangle 22"/>
           <p:cNvSpPr/>
           <p:nvPr/>
         </p:nvSpPr>
         <p:spPr>
           <a:xfrm>
-            <a:off x="12902184" y="2157984"/>
-            <a:ext cx="4663440" cy="841248"/>
-          </a:xfrm>
-          <a:prstGeom prst="rect">
-            <a:avLst/>
+            <a:off x="722376" y="6766560"/>
+            <a:ext cx="4114800" cy="512064"/>
+          </a:xfrm>
+          <a:prstGeom prst="roundRect">
+            <a:avLst>
+              <a:gd name="adj" fmla="val 14285"/>
+            </a:avLst>
           </a:prstGeom>
           <a:solidFill>
             <a:srgbClr val="1428A0"/>
@@ -10485,14 +10942,14 @@
       </p:sp>
       <p:sp>
         <p:nvSpPr>
-          <p:cNvPr id="11" name="TextBox 10"/>
+          <p:cNvPr id="24" name="TextBox 23"/>
           <p:cNvSpPr txBox="1"/>
           <p:nvPr/>
         </p:nvSpPr>
         <p:spPr>
           <a:xfrm>
-            <a:off x="13130784" y="2157984"/>
-            <a:ext cx="4297679" cy="841248"/>
+            <a:off x="777240" y="6766560"/>
+            <a:ext cx="4005072" cy="512064"/>
           </a:xfrm>
           <a:prstGeom prst="rect">
             <a:avLst/>
@@ -10505,9 +10962,9 @@
           </a:bodyPr>
           <a:lstStyle/>
           <a:p>
-            <a:pPr algn="l">
+            <a:pPr algn="ctr">
               <a:lnSpc>
-                <a:spcPct val="100000"/>
+                <a:spcPct val="110000"/>
               </a:lnSpc>
             </a:pPr>
             <a:r>
@@ -10518,23 +10975,82 @@
                 <a:latin typeface="Arial"/>
                 <a:ea typeface="Arial"/>
               </a:rPr>
-              <a:t>3단계  </a:t>
-            </a:r>
-            <a:r>
-              <a:rPr sz="1800" b="0">
-                <a:solidFill>
-                  <a:srgbClr val="FFFFFF"/>
-                </a:solidFill>
-                <a:latin typeface="Arial"/>
-                <a:ea typeface="Arial"/>
-              </a:rPr>
-              <a:t>2028~</a:t>
-            </a:r>
-          </a:p>
-          <a:p>
-            <a:pPr algn="l">
+              <a:t>공동 설계 · 최적화</a:t>
+            </a:r>
+          </a:p>
+        </p:txBody>
+      </p:sp>
+      <p:sp>
+        <p:nvSpPr>
+          <p:cNvPr id="25" name="Rounded Rectangle 24"/>
+          <p:cNvSpPr/>
+          <p:nvPr/>
+        </p:nvSpPr>
+        <p:spPr>
+          <a:xfrm>
+            <a:off x="722376" y="7370064"/>
+            <a:ext cx="4114800" cy="512064"/>
+          </a:xfrm>
+          <a:prstGeom prst="roundRect">
+            <a:avLst>
+              <a:gd name="adj" fmla="val 14285"/>
+            </a:avLst>
+          </a:prstGeom>
+          <a:solidFill>
+            <a:srgbClr val="8A8A8A"/>
+          </a:solidFill>
+          <a:ln>
+            <a:noFill/>
+          </a:ln>
+          <a:effectLst/>
+        </p:spPr>
+        <p:style>
+          <a:lnRef idx="1">
+            <a:schemeClr val="accent1"/>
+          </a:lnRef>
+          <a:fillRef idx="3">
+            <a:schemeClr val="accent1"/>
+          </a:fillRef>
+          <a:effectRef idx="2">
+            <a:schemeClr val="accent1"/>
+          </a:effectRef>
+          <a:fontRef idx="minor">
+            <a:schemeClr val="lt1"/>
+          </a:fontRef>
+        </p:style>
+        <p:txBody>
+          <a:bodyPr rtlCol="0" anchor="ctr"/>
+          <a:lstStyle/>
+          <a:p>
+            <a:pPr algn="ctr"/>
+          </a:p>
+        </p:txBody>
+      </p:sp>
+      <p:sp>
+        <p:nvSpPr>
+          <p:cNvPr id="26" name="TextBox 25"/>
+          <p:cNvSpPr txBox="1"/>
+          <p:nvPr/>
+        </p:nvSpPr>
+        <p:spPr>
+          <a:xfrm>
+            <a:off x="777240" y="7370064"/>
+            <a:ext cx="4005072" cy="512064"/>
+          </a:xfrm>
+          <a:prstGeom prst="rect">
+            <a:avLst/>
+          </a:prstGeom>
+          <a:noFill/>
+        </p:spPr>
+        <p:txBody>
+          <a:bodyPr wrap="square" anchor="ctr" lIns="0" rIns="0" tIns="0" bIns="0">
+            <a:spAutoFit/>
+          </a:bodyPr>
+          <a:lstStyle/>
+          <a:p>
+            <a:pPr algn="ctr">
               <a:lnSpc>
-                <a:spcPct val="100000"/>
+                <a:spcPct val="110000"/>
               </a:lnSpc>
             </a:pPr>
             <a:r>
@@ -10545,21 +11061,21 @@
                 <a:latin typeface="Arial"/>
                 <a:ea typeface="Arial"/>
               </a:rPr>
-              <a:t>고객 시스템과 함께 설계합니다</a:t>
-            </a:r>
-          </a:p>
-        </p:txBody>
-      </p:sp>
-      <p:sp>
-        <p:nvSpPr>
-          <p:cNvPr id="12" name="Rectangle 11"/>
+              <a:t>다년 공급 (물량)</a:t>
+            </a:r>
+          </a:p>
+        </p:txBody>
+      </p:sp>
+      <p:sp>
+        <p:nvSpPr>
+          <p:cNvPr id="27" name="Rectangle 26"/>
           <p:cNvSpPr/>
           <p:nvPr/>
         </p:nvSpPr>
         <p:spPr>
           <a:xfrm>
-            <a:off x="5161788" y="3072384"/>
-            <a:ext cx="5385816" cy="45720"/>
+            <a:off x="4928616" y="6163056"/>
+            <a:ext cx="32004" cy="1115568"/>
           </a:xfrm>
           <a:prstGeom prst="rect">
             <a:avLst/>
@@ -10596,62 +11112,20 @@
       </p:sp>
       <p:sp>
         <p:nvSpPr>
-          <p:cNvPr id="13" name="TextBox 12"/>
-          <p:cNvSpPr txBox="1"/>
-          <p:nvPr/>
-        </p:nvSpPr>
-        <p:spPr>
-          <a:xfrm>
-            <a:off x="4704588" y="3145536"/>
-            <a:ext cx="6300216" cy="329184"/>
-          </a:xfrm>
-          <a:prstGeom prst="rect">
-            <a:avLst/>
-          </a:prstGeom>
-          <a:noFill/>
-        </p:spPr>
-        <p:txBody>
-          <a:bodyPr wrap="square" anchor="t" lIns="0" rIns="0" tIns="0" bIns="0">
-            <a:spAutoFit/>
-          </a:bodyPr>
-          <a:lstStyle/>
-          <a:p>
-            <a:pPr algn="ctr">
-              <a:lnSpc>
-                <a:spcPct val="110000"/>
-              </a:lnSpc>
-            </a:pPr>
-            <a:r>
-              <a:rPr sz="1800" b="1">
-                <a:solidFill>
-                  <a:srgbClr val="1428A0"/>
-                </a:solidFill>
-                <a:latin typeface="Arial"/>
-                <a:ea typeface="Arial"/>
-              </a:rPr>
-              <a:t>계약의 창: 2026 4분기 ~ 2027 상반기</a:t>
-            </a:r>
-          </a:p>
-        </p:txBody>
-      </p:sp>
-      <p:sp>
-        <p:nvSpPr>
-          <p:cNvPr id="14" name="Rounded Rectangle 13"/>
+          <p:cNvPr id="28" name="Rectangle 27"/>
           <p:cNvSpPr/>
           <p:nvPr/>
         </p:nvSpPr>
         <p:spPr>
           <a:xfrm>
-            <a:off x="722376" y="3584448"/>
-            <a:ext cx="2194560" cy="1426464"/>
-          </a:xfrm>
-          <a:prstGeom prst="roundRect">
-            <a:avLst>
-              <a:gd name="adj" fmla="val 5128"/>
-            </a:avLst>
+            <a:off x="4855464" y="6163056"/>
+            <a:ext cx="91440" cy="32004"/>
+          </a:xfrm>
+          <a:prstGeom prst="rect">
+            <a:avLst/>
           </a:prstGeom>
           <a:solidFill>
-            <a:srgbClr val="EEF1FA"/>
+            <a:srgbClr val="1428A0"/>
           </a:solidFill>
           <a:ln>
             <a:noFill/>
@@ -10682,14 +11156,58 @@
       </p:sp>
       <p:sp>
         <p:nvSpPr>
-          <p:cNvPr id="15" name="TextBox 14"/>
+          <p:cNvPr id="29" name="Rectangle 28"/>
+          <p:cNvSpPr/>
+          <p:nvPr/>
+        </p:nvSpPr>
+        <p:spPr>
+          <a:xfrm>
+            <a:off x="4855464" y="7246620"/>
+            <a:ext cx="91440" cy="32004"/>
+          </a:xfrm>
+          <a:prstGeom prst="rect">
+            <a:avLst/>
+          </a:prstGeom>
+          <a:solidFill>
+            <a:srgbClr val="1428A0"/>
+          </a:solidFill>
+          <a:ln>
+            <a:noFill/>
+          </a:ln>
+          <a:effectLst/>
+        </p:spPr>
+        <p:style>
+          <a:lnRef idx="1">
+            <a:schemeClr val="accent1"/>
+          </a:lnRef>
+          <a:fillRef idx="3">
+            <a:schemeClr val="accent1"/>
+          </a:fillRef>
+          <a:effectRef idx="2">
+            <a:schemeClr val="accent1"/>
+          </a:effectRef>
+          <a:fontRef idx="minor">
+            <a:schemeClr val="lt1"/>
+          </a:fontRef>
+        </p:style>
+        <p:txBody>
+          <a:bodyPr rtlCol="0" anchor="ctr"/>
+          <a:lstStyle/>
+          <a:p>
+            <a:pPr algn="ctr"/>
+          </a:p>
+        </p:txBody>
+      </p:sp>
+      <p:sp>
+        <p:nvSpPr>
+          <p:cNvPr id="30" name="TextBox 29"/>
           <p:cNvSpPr txBox="1"/>
           <p:nvPr/>
         </p:nvSpPr>
         <p:spPr>
           <a:xfrm>
-            <a:off x="886968" y="3712463"/>
-            <a:ext cx="1920240" cy="457200"/>
+            <a:off x="5020056" y="6163056"/>
+            <a:ext cx="777240" cy="1115568"/>
           </a:xfrm>
           <a:prstGeom prst="rect">
             <a:avLst/>
@@ -10697,7 +11215,64 @@
           <a:noFill/>
         </p:spPr>
         <p:txBody>
-          <a:bodyPr wrap="square" anchor="t" lIns="0" rIns="0" tIns="0" bIns="0">
+          <a:bodyPr wrap="square" anchor="ctr" lIns="0" rIns="0" tIns="0" bIns="0">
+            <a:spAutoFit/>
+          </a:bodyPr>
+          <a:lstStyle/>
+          <a:p>
+            <a:pPr algn="l">
+              <a:lnSpc>
+                <a:spcPct val="100000"/>
+              </a:lnSpc>
+            </a:pPr>
+            <a:r>
+              <a:rPr sz="1800" b="1">
+                <a:solidFill>
+                  <a:srgbClr val="1428A0"/>
+                </a:solidFill>
+                <a:latin typeface="Arial"/>
+                <a:ea typeface="Arial"/>
+              </a:rPr>
+              <a:t>기술</a:t>
+            </a:r>
+          </a:p>
+          <a:p>
+            <a:pPr algn="l">
+              <a:lnSpc>
+                <a:spcPct val="100000"/>
+              </a:lnSpc>
+            </a:pPr>
+            <a:r>
+              <a:rPr sz="1800" b="1">
+                <a:solidFill>
+                  <a:srgbClr val="1428A0"/>
+                </a:solidFill>
+                <a:latin typeface="Arial"/>
+                <a:ea typeface="Arial"/>
+              </a:rPr>
+              <a:t>협력</a:t>
+            </a:r>
+          </a:p>
+        </p:txBody>
+      </p:sp>
+      <p:sp>
+        <p:nvSpPr>
+          <p:cNvPr id="31" name="TextBox 30"/>
+          <p:cNvSpPr txBox="1"/>
+          <p:nvPr/>
+        </p:nvSpPr>
+        <p:spPr>
+          <a:xfrm>
+            <a:off x="722376" y="8101583"/>
+            <a:ext cx="5074920" cy="457200"/>
+          </a:xfrm>
+          <a:prstGeom prst="rect">
+            <a:avLst/>
+          </a:prstGeom>
+          <a:noFill/>
+        </p:spPr>
+        <p:txBody>
+          <a:bodyPr wrap="square" anchor="ctr" lIns="0" rIns="0" tIns="0" bIns="0">
             <a:spAutoFit/>
           </a:bodyPr>
           <a:lstStyle/>
@@ -10708,325 +11283,31 @@
               </a:lnSpc>
             </a:pPr>
             <a:r>
-              <a:rPr sz="2400" b="1">
+              <a:rPr sz="2000" b="1">
                 <a:solidFill>
                   <a:srgbClr val="1428A0"/>
                 </a:solidFill>
                 <a:latin typeface="Arial"/>
                 <a:ea typeface="Arial"/>
               </a:rPr>
-              <a:t>기술</a:t>
-            </a:r>
-          </a:p>
-        </p:txBody>
-      </p:sp>
-      <p:sp>
-        <p:nvSpPr>
-          <p:cNvPr id="16" name="TextBox 15"/>
-          <p:cNvSpPr txBox="1"/>
-          <p:nvPr/>
-        </p:nvSpPr>
-        <p:spPr>
-          <a:xfrm>
-            <a:off x="886968" y="4187952"/>
-            <a:ext cx="1920240" cy="768096"/>
-          </a:xfrm>
-          <a:prstGeom prst="rect">
-            <a:avLst/>
-          </a:prstGeom>
-          <a:noFill/>
-        </p:spPr>
-        <p:txBody>
-          <a:bodyPr wrap="square" anchor="t" lIns="0" rIns="0" tIns="0" bIns="0">
-            <a:spAutoFit/>
-          </a:bodyPr>
-          <a:lstStyle/>
-          <a:p>
-            <a:pPr algn="l">
-              <a:lnSpc>
-                <a:spcPct val="100000"/>
-              </a:lnSpc>
-            </a:pPr>
-            <a:r>
-              <a:rPr sz="1600" b="0">
-                <a:solidFill>
-                  <a:srgbClr val="555555"/>
-                </a:solidFill>
-                <a:latin typeface="Arial"/>
-                <a:ea typeface="Arial"/>
-              </a:rPr>
-              <a:t>지표: 고객 시스템의 FDP 활성 용량</a:t>
-            </a:r>
-          </a:p>
-        </p:txBody>
-      </p:sp>
-      <p:sp>
-        <p:nvSpPr>
-          <p:cNvPr id="17" name="Rounded Rectangle 16"/>
+              <a:t>물량 위에 기술 협력을 쌓습니다</a:t>
+            </a:r>
+          </a:p>
+        </p:txBody>
+      </p:sp>
+      <p:sp>
+        <p:nvSpPr>
+          <p:cNvPr id="32" name="Chevron 31"/>
           <p:cNvSpPr/>
           <p:nvPr/>
         </p:nvSpPr>
         <p:spPr>
           <a:xfrm>
-            <a:off x="722376" y="5120640"/>
-            <a:ext cx="2194560" cy="1426464"/>
-          </a:xfrm>
-          <a:prstGeom prst="roundRect">
-            <a:avLst>
-              <a:gd name="adj" fmla="val 5128"/>
-            </a:avLst>
-          </a:prstGeom>
-          <a:solidFill>
-            <a:srgbClr val="EEF1FA"/>
-          </a:solidFill>
-          <a:ln>
-            <a:noFill/>
-          </a:ln>
-          <a:effectLst/>
-        </p:spPr>
-        <p:style>
-          <a:lnRef idx="1">
-            <a:schemeClr val="accent1"/>
-          </a:lnRef>
-          <a:fillRef idx="3">
-            <a:schemeClr val="accent1"/>
-          </a:fillRef>
-          <a:effectRef idx="2">
-            <a:schemeClr val="accent1"/>
-          </a:effectRef>
-          <a:fontRef idx="minor">
-            <a:schemeClr val="lt1"/>
-          </a:fontRef>
-        </p:style>
-        <p:txBody>
-          <a:bodyPr rtlCol="0" anchor="ctr"/>
-          <a:lstStyle/>
-          <a:p>
-            <a:pPr algn="ctr"/>
-          </a:p>
-        </p:txBody>
-      </p:sp>
-      <p:sp>
-        <p:nvSpPr>
-          <p:cNvPr id="18" name="TextBox 17"/>
-          <p:cNvSpPr txBox="1"/>
-          <p:nvPr/>
-        </p:nvSpPr>
-        <p:spPr>
-          <a:xfrm>
-            <a:off x="886968" y="5248655"/>
-            <a:ext cx="1920240" cy="457200"/>
-          </a:xfrm>
-          <a:prstGeom prst="rect">
-            <a:avLst/>
-          </a:prstGeom>
-          <a:noFill/>
-        </p:spPr>
-        <p:txBody>
-          <a:bodyPr wrap="square" anchor="t" lIns="0" rIns="0" tIns="0" bIns="0">
-            <a:spAutoFit/>
-          </a:bodyPr>
-          <a:lstStyle/>
-          <a:p>
-            <a:pPr algn="l">
-              <a:lnSpc>
-                <a:spcPct val="110000"/>
-              </a:lnSpc>
-            </a:pPr>
-            <a:r>
-              <a:rPr sz="2400" b="1">
-                <a:solidFill>
-                  <a:srgbClr val="1428A0"/>
-                </a:solidFill>
-                <a:latin typeface="Arial"/>
-                <a:ea typeface="Arial"/>
-              </a:rPr>
-              <a:t>인재</a:t>
-            </a:r>
-          </a:p>
-        </p:txBody>
-      </p:sp>
-      <p:sp>
-        <p:nvSpPr>
-          <p:cNvPr id="19" name="TextBox 18"/>
-          <p:cNvSpPr txBox="1"/>
-          <p:nvPr/>
-        </p:nvSpPr>
-        <p:spPr>
-          <a:xfrm>
-            <a:off x="886968" y="5724144"/>
-            <a:ext cx="1920240" cy="768096"/>
-          </a:xfrm>
-          <a:prstGeom prst="rect">
-            <a:avLst/>
-          </a:prstGeom>
-          <a:noFill/>
-        </p:spPr>
-        <p:txBody>
-          <a:bodyPr wrap="square" anchor="t" lIns="0" rIns="0" tIns="0" bIns="0">
-            <a:spAutoFit/>
-          </a:bodyPr>
-          <a:lstStyle/>
-          <a:p>
-            <a:pPr algn="l">
-              <a:lnSpc>
-                <a:spcPct val="100000"/>
-              </a:lnSpc>
-            </a:pPr>
-            <a:r>
-              <a:rPr sz="1600" b="0">
-                <a:solidFill>
-                  <a:srgbClr val="555555"/>
-                </a:solidFill>
-                <a:latin typeface="Arial"/>
-                <a:ea typeface="Arial"/>
-              </a:rPr>
-              <a:t>지표: 업스트림 머지 건수</a:t>
-            </a:r>
-          </a:p>
-        </p:txBody>
-      </p:sp>
-      <p:sp>
-        <p:nvSpPr>
-          <p:cNvPr id="20" name="Rounded Rectangle 19"/>
-          <p:cNvSpPr/>
-          <p:nvPr/>
-        </p:nvSpPr>
-        <p:spPr>
-          <a:xfrm>
-            <a:off x="722376" y="6656832"/>
-            <a:ext cx="2194560" cy="1426464"/>
-          </a:xfrm>
-          <a:prstGeom prst="roundRect">
-            <a:avLst>
-              <a:gd name="adj" fmla="val 5128"/>
-            </a:avLst>
-          </a:prstGeom>
-          <a:solidFill>
-            <a:srgbClr val="EEF1FA"/>
-          </a:solidFill>
-          <a:ln>
-            <a:noFill/>
-          </a:ln>
-          <a:effectLst/>
-        </p:spPr>
-        <p:style>
-          <a:lnRef idx="1">
-            <a:schemeClr val="accent1"/>
-          </a:lnRef>
-          <a:fillRef idx="3">
-            <a:schemeClr val="accent1"/>
-          </a:fillRef>
-          <a:effectRef idx="2">
-            <a:schemeClr val="accent1"/>
-          </a:effectRef>
-          <a:fontRef idx="minor">
-            <a:schemeClr val="lt1"/>
-          </a:fontRef>
-        </p:style>
-        <p:txBody>
-          <a:bodyPr rtlCol="0" anchor="ctr"/>
-          <a:lstStyle/>
-          <a:p>
-            <a:pPr algn="ctr"/>
-          </a:p>
-        </p:txBody>
-      </p:sp>
-      <p:sp>
-        <p:nvSpPr>
-          <p:cNvPr id="21" name="TextBox 20"/>
-          <p:cNvSpPr txBox="1"/>
-          <p:nvPr/>
-        </p:nvSpPr>
-        <p:spPr>
-          <a:xfrm>
-            <a:off x="886968" y="6784848"/>
-            <a:ext cx="1920240" cy="457200"/>
-          </a:xfrm>
-          <a:prstGeom prst="rect">
-            <a:avLst/>
-          </a:prstGeom>
-          <a:noFill/>
-        </p:spPr>
-        <p:txBody>
-          <a:bodyPr wrap="square" anchor="t" lIns="0" rIns="0" tIns="0" bIns="0">
-            <a:spAutoFit/>
-          </a:bodyPr>
-          <a:lstStyle/>
-          <a:p>
-            <a:pPr algn="l">
-              <a:lnSpc>
-                <a:spcPct val="110000"/>
-              </a:lnSpc>
-            </a:pPr>
-            <a:r>
-              <a:rPr sz="2400" b="1">
-                <a:solidFill>
-                  <a:srgbClr val="1428A0"/>
-                </a:solidFill>
-                <a:latin typeface="Arial"/>
-                <a:ea typeface="Arial"/>
-              </a:rPr>
-              <a:t>고객 협력</a:t>
-            </a:r>
-          </a:p>
-        </p:txBody>
-      </p:sp>
-      <p:sp>
-        <p:nvSpPr>
-          <p:cNvPr id="22" name="TextBox 21"/>
-          <p:cNvSpPr txBox="1"/>
-          <p:nvPr/>
-        </p:nvSpPr>
-        <p:spPr>
-          <a:xfrm>
-            <a:off x="886968" y="7260336"/>
-            <a:ext cx="1920240" cy="768096"/>
-          </a:xfrm>
-          <a:prstGeom prst="rect">
-            <a:avLst/>
-          </a:prstGeom>
-          <a:noFill/>
-        </p:spPr>
-        <p:txBody>
-          <a:bodyPr wrap="square" anchor="t" lIns="0" rIns="0" tIns="0" bIns="0">
-            <a:spAutoFit/>
-          </a:bodyPr>
-          <a:lstStyle/>
-          <a:p>
-            <a:pPr algn="l">
-              <a:lnSpc>
-                <a:spcPct val="100000"/>
-              </a:lnSpc>
-            </a:pPr>
-            <a:r>
-              <a:rPr sz="1600" b="0">
-                <a:solidFill>
-                  <a:srgbClr val="555555"/>
-                </a:solidFill>
-                <a:latin typeface="Arial"/>
-                <a:ea typeface="Arial"/>
-              </a:rPr>
-              <a:t>지표: 워크로드를 공유한 고객 수</a:t>
-            </a:r>
-          </a:p>
-        </p:txBody>
-      </p:sp>
-      <p:sp>
-        <p:nvSpPr>
-          <p:cNvPr id="23" name="Rounded Rectangle 22"/>
-          <p:cNvSpPr/>
-          <p:nvPr/>
-        </p:nvSpPr>
-        <p:spPr>
-          <a:xfrm>
-            <a:off x="3063240" y="4142232"/>
-            <a:ext cx="4663440" cy="868680"/>
-          </a:xfrm>
-          <a:prstGeom prst="roundRect">
-            <a:avLst>
-              <a:gd name="adj" fmla="val 8421"/>
-            </a:avLst>
+            <a:off x="5815583" y="5852160"/>
+            <a:ext cx="146304" cy="457200"/>
+          </a:xfrm>
+          <a:prstGeom prst="chevron">
+            <a:avLst/>
           </a:prstGeom>
           <a:solidFill>
             <a:srgbClr val="AAB8E8"/>
@@ -11060,179 +11341,17 @@
       </p:sp>
       <p:sp>
         <p:nvSpPr>
-          <p:cNvPr id="24" name="TextBox 23"/>
-          <p:cNvSpPr txBox="1"/>
-          <p:nvPr/>
-        </p:nvSpPr>
-        <p:spPr>
-          <a:xfrm>
-            <a:off x="3264408" y="4142232"/>
-            <a:ext cx="4261103" cy="868680"/>
-          </a:xfrm>
-          <a:prstGeom prst="rect">
-            <a:avLst/>
-          </a:prstGeom>
-          <a:noFill/>
-        </p:spPr>
-        <p:txBody>
-          <a:bodyPr wrap="square" anchor="ctr" lIns="0" rIns="0" tIns="0" bIns="0">
-            <a:spAutoFit/>
-          </a:bodyPr>
-          <a:lstStyle/>
-          <a:p>
-            <a:pPr algn="l">
-              <a:lnSpc>
-                <a:spcPct val="105000"/>
-              </a:lnSpc>
-            </a:pPr>
-            <a:r>
-              <a:rPr sz="2000" b="1">
-                <a:solidFill>
-                  <a:srgbClr val="1A1A1A"/>
-                </a:solidFill>
-                <a:latin typeface="Arial"/>
-                <a:ea typeface="Arial"/>
-              </a:rPr>
-              <a:t>출하 시 구성 SKU</a:t>
-            </a:r>
-          </a:p>
-          <a:p>
-            <a:pPr algn="l">
-              <a:lnSpc>
-                <a:spcPct val="105000"/>
-              </a:lnSpc>
-            </a:pPr>
-            <a:r>
-              <a:rPr sz="1800" b="0">
-                <a:solidFill>
-                  <a:srgbClr val="1A1A1A"/>
-                </a:solidFill>
-                <a:latin typeface="Arial"/>
-                <a:ea typeface="Arial"/>
-              </a:rPr>
-              <a:t>OP · SLC 비율 · RUH 16+</a:t>
-            </a:r>
-          </a:p>
-        </p:txBody>
-      </p:sp>
-      <p:sp>
-        <p:nvSpPr>
-          <p:cNvPr id="25" name="Rounded Rectangle 24"/>
+          <p:cNvPr id="33" name="Oval 32"/>
           <p:cNvSpPr/>
           <p:nvPr/>
         </p:nvSpPr>
         <p:spPr>
           <a:xfrm>
-            <a:off x="7982712" y="3867912"/>
-            <a:ext cx="4663440" cy="1143000"/>
-          </a:xfrm>
-          <a:prstGeom prst="roundRect">
-            <a:avLst>
-              <a:gd name="adj" fmla="val 6400"/>
-            </a:avLst>
-          </a:prstGeom>
-          <a:solidFill>
-            <a:srgbClr val="3C5AC8"/>
-          </a:solidFill>
-          <a:ln>
-            <a:noFill/>
-          </a:ln>
-          <a:effectLst/>
-        </p:spPr>
-        <p:style>
-          <a:lnRef idx="1">
-            <a:schemeClr val="accent1"/>
-          </a:lnRef>
-          <a:fillRef idx="3">
-            <a:schemeClr val="accent1"/>
-          </a:fillRef>
-          <a:effectRef idx="2">
-            <a:schemeClr val="accent1"/>
-          </a:effectRef>
-          <a:fontRef idx="minor">
-            <a:schemeClr val="lt1"/>
-          </a:fontRef>
-        </p:style>
-        <p:txBody>
-          <a:bodyPr rtlCol="0" anchor="ctr"/>
-          <a:lstStyle/>
-          <a:p>
-            <a:pPr algn="ctr"/>
-          </a:p>
-        </p:txBody>
-      </p:sp>
-      <p:sp>
-        <p:nvSpPr>
-          <p:cNvPr id="26" name="TextBox 25"/>
-          <p:cNvSpPr txBox="1"/>
-          <p:nvPr/>
-        </p:nvSpPr>
-        <p:spPr>
-          <a:xfrm>
-            <a:off x="8183880" y="3867912"/>
-            <a:ext cx="4261103" cy="1143000"/>
-          </a:xfrm>
-          <a:prstGeom prst="rect">
-            <a:avLst/>
-          </a:prstGeom>
-          <a:noFill/>
-        </p:spPr>
-        <p:txBody>
-          <a:bodyPr wrap="square" anchor="ctr" lIns="0" rIns="0" tIns="0" bIns="0">
-            <a:spAutoFit/>
-          </a:bodyPr>
-          <a:lstStyle/>
-          <a:p>
-            <a:pPr algn="l">
-              <a:lnSpc>
-                <a:spcPct val="105000"/>
-              </a:lnSpc>
-            </a:pPr>
-            <a:r>
-              <a:rPr sz="2000" b="1">
-                <a:solidFill>
-                  <a:srgbClr val="FFFFFF"/>
-                </a:solidFill>
-                <a:latin typeface="Arial"/>
-                <a:ea typeface="Arial"/>
-              </a:rPr>
-              <a:t>운영 중 조정</a:t>
-            </a:r>
-          </a:p>
-          <a:p>
-            <a:pPr algn="l">
-              <a:lnSpc>
-                <a:spcPct val="105000"/>
-              </a:lnSpc>
-            </a:pPr>
-            <a:r>
-              <a:rPr sz="1800" b="0">
-                <a:solidFill>
-                  <a:srgbClr val="FFFFFF"/>
-                </a:solidFill>
-                <a:latin typeface="Arial"/>
-                <a:ea typeface="Arial"/>
-              </a:rPr>
-              <a:t>배치 정책 · GC 강도 · WAF 감시</a:t>
-            </a:r>
-          </a:p>
-        </p:txBody>
-      </p:sp>
-      <p:sp>
-        <p:nvSpPr>
-          <p:cNvPr id="27" name="Rounded Rectangle 26"/>
-          <p:cNvSpPr/>
-          <p:nvPr/>
-        </p:nvSpPr>
-        <p:spPr>
-          <a:xfrm>
-            <a:off x="12902184" y="3584448"/>
-            <a:ext cx="4663440" cy="1426464"/>
-          </a:xfrm>
-          <a:prstGeom prst="roundRect">
-            <a:avLst>
-              <a:gd name="adj" fmla="val 5128"/>
-            </a:avLst>
+            <a:off x="5989320" y="2139696"/>
+            <a:ext cx="438912" cy="438912"/>
+          </a:xfrm>
+          <a:prstGeom prst="ellipse">
+            <a:avLst/>
           </a:prstGeom>
           <a:solidFill>
             <a:srgbClr val="1428A0"/>
@@ -11266,14 +11385,14 @@
       </p:sp>
       <p:sp>
         <p:nvSpPr>
-          <p:cNvPr id="28" name="TextBox 27"/>
+          <p:cNvPr id="34" name="TextBox 33"/>
           <p:cNvSpPr txBox="1"/>
           <p:nvPr/>
         </p:nvSpPr>
         <p:spPr>
           <a:xfrm>
-            <a:off x="13103352" y="3584448"/>
-            <a:ext cx="4261103" cy="1426464"/>
+            <a:off x="5989320" y="2139696"/>
+            <a:ext cx="438912" cy="438912"/>
           </a:xfrm>
           <a:prstGeom prst="rect">
             <a:avLst/>
@@ -11286,55 +11405,192 @@
           </a:bodyPr>
           <a:lstStyle/>
           <a:p>
+            <a:pPr algn="ctr">
+              <a:lnSpc>
+                <a:spcPct val="110000"/>
+              </a:lnSpc>
+            </a:pPr>
+            <a:r>
+              <a:rPr sz="2000" b="1">
+                <a:solidFill>
+                  <a:srgbClr val="FFFFFF"/>
+                </a:solidFill>
+                <a:latin typeface="Arial"/>
+                <a:ea typeface="Arial"/>
+              </a:rPr>
+              <a:t>2</a:t>
+            </a:r>
+          </a:p>
+        </p:txBody>
+      </p:sp>
+      <p:sp>
+        <p:nvSpPr>
+          <p:cNvPr id="35" name="TextBox 34"/>
+          <p:cNvSpPr txBox="1"/>
+          <p:nvPr/>
+        </p:nvSpPr>
+        <p:spPr>
+          <a:xfrm>
+            <a:off x="6574536" y="2103120"/>
+            <a:ext cx="5724144" cy="512063"/>
+          </a:xfrm>
+          <a:prstGeom prst="rect">
+            <a:avLst/>
+          </a:prstGeom>
+          <a:noFill/>
+        </p:spPr>
+        <p:txBody>
+          <a:bodyPr wrap="square" anchor="ctr" lIns="0" rIns="0" tIns="0" bIns="0">
+            <a:spAutoFit/>
+          </a:bodyPr>
+          <a:lstStyle/>
+          <a:p>
             <a:pPr algn="l">
               <a:lnSpc>
-                <a:spcPct val="105000"/>
+                <a:spcPct val="110000"/>
               </a:lnSpc>
             </a:pPr>
             <a:r>
-              <a:rPr sz="2000" b="1">
-                <a:solidFill>
-                  <a:srgbClr val="FFFFFF"/>
-                </a:solidFill>
-                <a:latin typeface="Arial"/>
-                <a:ea typeface="Arial"/>
-              </a:rPr>
-              <a:t>워크로드 구성형 플랫폼</a:t>
-            </a:r>
-          </a:p>
+              <a:rPr sz="2400" b="1">
+                <a:solidFill>
+                  <a:srgbClr val="1A1A1A"/>
+                </a:solidFill>
+                <a:latin typeface="Arial"/>
+                <a:ea typeface="Arial"/>
+              </a:rPr>
+              <a:t>사람: 고객 안에 상주</a:t>
+            </a:r>
+          </a:p>
+        </p:txBody>
+      </p:sp>
+      <p:pic>
+        <p:nvPicPr>
+          <p:cNvPr id="36" name="Picture 35" descr="palantir.png"/>
+          <p:cNvPicPr>
+            <a:picLocks noChangeAspect="1"/>
+          </p:cNvPicPr>
+          <p:nvPr/>
+        </p:nvPicPr>
+        <p:blipFill>
+          <a:blip r:embed="rId4"/>
+          <a:stretch>
+            <a:fillRect/>
+          </a:stretch>
+        </p:blipFill>
+        <p:spPr>
+          <a:xfrm>
+            <a:off x="5989320" y="2734056"/>
+            <a:ext cx="310896" cy="310896"/>
+          </a:xfrm>
+          <a:prstGeom prst="rect">
+            <a:avLst/>
+          </a:prstGeom>
+        </p:spPr>
+      </p:pic>
+      <p:sp>
+        <p:nvSpPr>
+          <p:cNvPr id="37" name="TextBox 36"/>
+          <p:cNvSpPr txBox="1"/>
+          <p:nvPr/>
+        </p:nvSpPr>
+        <p:spPr>
+          <a:xfrm>
+            <a:off x="6391656" y="2706624"/>
+            <a:ext cx="5907024" cy="347472"/>
+          </a:xfrm>
+          <a:prstGeom prst="rect">
+            <a:avLst/>
+          </a:prstGeom>
+          <a:noFill/>
+        </p:spPr>
+        <p:txBody>
+          <a:bodyPr wrap="square" anchor="ctr" lIns="0" rIns="0" tIns="0" bIns="0">
+            <a:spAutoFit/>
+          </a:bodyPr>
+          <a:lstStyle/>
           <a:p>
             <a:pPr algn="l">
               <a:lnSpc>
-                <a:spcPct val="105000"/>
+                <a:spcPct val="110000"/>
               </a:lnSpc>
             </a:pPr>
             <a:r>
-              <a:rPr sz="1800" b="0">
-                <a:solidFill>
-                  <a:srgbClr val="FFFFFF"/>
-                </a:solidFill>
-                <a:latin typeface="Arial"/>
-                <a:ea typeface="Arial"/>
-              </a:rPr>
-              <a:t>런타임 WAF 대응 · 고객별 운영점</a:t>
-            </a:r>
-          </a:p>
-        </p:txBody>
-      </p:sp>
-      <p:sp>
-        <p:nvSpPr>
-          <p:cNvPr id="29" name="Rounded Rectangle 28"/>
+              <a:rPr sz="1800" b="1">
+                <a:solidFill>
+                  <a:srgbClr val="1A1A1A"/>
+                </a:solidFill>
+                <a:latin typeface="Arial"/>
+                <a:ea typeface="Arial"/>
+              </a:rPr>
+              <a:t>Palantir FDE</a:t>
+            </a:r>
+            <a:r>
+              <a:rPr sz="1600" b="0">
+                <a:solidFill>
+                  <a:srgbClr val="555555"/>
+                </a:solidFill>
+                <a:latin typeface="Arial"/>
+                <a:ea typeface="Arial"/>
+              </a:rPr>
+              <a:t>   Anthropic · OpenAI도 채택</a:t>
+            </a:r>
+          </a:p>
+        </p:txBody>
+      </p:sp>
+      <p:sp>
+        <p:nvSpPr>
+          <p:cNvPr id="38" name="TextBox 37"/>
+          <p:cNvSpPr txBox="1"/>
+          <p:nvPr/>
+        </p:nvSpPr>
+        <p:spPr>
+          <a:xfrm>
+            <a:off x="5989320" y="3273552"/>
+            <a:ext cx="3657600" cy="329184"/>
+          </a:xfrm>
+          <a:prstGeom prst="rect">
+            <a:avLst/>
+          </a:prstGeom>
+          <a:noFill/>
+        </p:spPr>
+        <p:txBody>
+          <a:bodyPr wrap="square" anchor="t" lIns="0" rIns="0" tIns="0" bIns="0">
+            <a:spAutoFit/>
+          </a:bodyPr>
+          <a:lstStyle/>
+          <a:p>
+            <a:pPr algn="l">
+              <a:lnSpc>
+                <a:spcPct val="110000"/>
+              </a:lnSpc>
+            </a:pPr>
+            <a:r>
+              <a:rPr sz="1800" b="1">
+                <a:solidFill>
+                  <a:srgbClr val="8A8A8A"/>
+                </a:solidFill>
+                <a:latin typeface="Arial"/>
+                <a:ea typeface="Arial"/>
+              </a:rPr>
+              <a:t>지금</a:t>
+            </a:r>
+          </a:p>
+        </p:txBody>
+      </p:sp>
+      <p:sp>
+        <p:nvSpPr>
+          <p:cNvPr id="39" name="Rounded Rectangle 38"/>
           <p:cNvSpPr/>
           <p:nvPr/>
         </p:nvSpPr>
         <p:spPr>
           <a:xfrm>
-            <a:off x="3063240" y="5120640"/>
-            <a:ext cx="4663440" cy="1426464"/>
+            <a:off x="5989320" y="3694176"/>
+            <a:ext cx="1554480" cy="566928"/>
           </a:xfrm>
           <a:prstGeom prst="roundRect">
             <a:avLst>
-              <a:gd name="adj" fmla="val 5128"/>
+              <a:gd name="adj" fmla="val 12903"/>
             </a:avLst>
           </a:prstGeom>
           <a:solidFill>
@@ -11369,77 +11625,44 @@
           </a:p>
         </p:txBody>
       </p:sp>
-      <p:sp>
-        <p:nvSpPr>
-          <p:cNvPr id="30" name="TextBox 29"/>
-          <p:cNvSpPr txBox="1"/>
-          <p:nvPr/>
-        </p:nvSpPr>
-        <p:spPr>
-          <a:xfrm>
-            <a:off x="3264408" y="5120640"/>
-            <a:ext cx="4261103" cy="1426464"/>
-          </a:xfrm>
-          <a:prstGeom prst="rect">
-            <a:avLst/>
-          </a:prstGeom>
-          <a:noFill/>
-        </p:spPr>
-        <p:txBody>
-          <a:bodyPr wrap="square" anchor="ctr" lIns="0" rIns="0" tIns="0" bIns="0">
-            <a:spAutoFit/>
-          </a:bodyPr>
-          <a:lstStyle/>
-          <a:p>
-            <a:pPr algn="l">
-              <a:lnSpc>
-                <a:spcPct val="105000"/>
-              </a:lnSpc>
-            </a:pPr>
-            <a:r>
-              <a:rPr sz="2000" b="1">
-                <a:solidFill>
-                  <a:srgbClr val="1A1A1A"/>
-                </a:solidFill>
-                <a:latin typeface="Arial"/>
-                <a:ea typeface="Arial"/>
-              </a:rPr>
-              <a:t>시스템 SW 전문가 채용</a:t>
-            </a:r>
-          </a:p>
-          <a:p>
-            <a:pPr algn="l">
-              <a:lnSpc>
-                <a:spcPct val="105000"/>
-              </a:lnSpc>
-            </a:pPr>
-            <a:r>
-              <a:rPr sz="1800" b="0">
-                <a:solidFill>
-                  <a:srgbClr val="555555"/>
-                </a:solidFill>
-                <a:latin typeface="Arial"/>
-                <a:ea typeface="Arial"/>
-              </a:rPr>
-              <a:t>고객 시스템을 아는 사람 · 미주 현지</a:t>
-            </a:r>
-          </a:p>
-        </p:txBody>
-      </p:sp>
-      <p:sp>
-        <p:nvSpPr>
-          <p:cNvPr id="31" name="Rounded Rectangle 30"/>
+      <p:pic>
+        <p:nvPicPr>
+          <p:cNvPr id="40" name="Picture 39" descr="samsung.png"/>
+          <p:cNvPicPr>
+            <a:picLocks noChangeAspect="1"/>
+          </p:cNvPicPr>
+          <p:nvPr/>
+        </p:nvPicPr>
+        <p:blipFill>
+          <a:blip r:embed="rId5"/>
+          <a:stretch>
+            <a:fillRect/>
+          </a:stretch>
+        </p:blipFill>
+        <p:spPr>
+          <a:xfrm>
+            <a:off x="6126480" y="3878870"/>
+            <a:ext cx="1280160" cy="197538"/>
+          </a:xfrm>
+          <a:prstGeom prst="rect">
+            <a:avLst/>
+          </a:prstGeom>
+        </p:spPr>
+      </p:pic>
+      <p:sp>
+        <p:nvSpPr>
+          <p:cNvPr id="41" name="Rounded Rectangle 40"/>
           <p:cNvSpPr/>
           <p:nvPr/>
         </p:nvSpPr>
         <p:spPr>
           <a:xfrm>
-            <a:off x="7982712" y="5120640"/>
-            <a:ext cx="4663440" cy="1426464"/>
+            <a:off x="10744200" y="3694176"/>
+            <a:ext cx="1554480" cy="566928"/>
           </a:xfrm>
           <a:prstGeom prst="roundRect">
             <a:avLst>
-              <a:gd name="adj" fmla="val 5128"/>
+              <a:gd name="adj" fmla="val 12903"/>
             </a:avLst>
           </a:prstGeom>
           <a:solidFill>
@@ -11476,14 +11699,14 @@
       </p:sp>
       <p:sp>
         <p:nvSpPr>
-          <p:cNvPr id="32" name="TextBox 31"/>
+          <p:cNvPr id="42" name="TextBox 41"/>
           <p:cNvSpPr txBox="1"/>
           <p:nvPr/>
         </p:nvSpPr>
         <p:spPr>
           <a:xfrm>
-            <a:off x="8183880" y="5120640"/>
-            <a:ext cx="4261103" cy="1426464"/>
+            <a:off x="10799064" y="3694176"/>
+            <a:ext cx="1444752" cy="566928"/>
           </a:xfrm>
           <a:prstGeom prst="rect">
             <a:avLst/>
@@ -11496,9 +11719,9 @@
           </a:bodyPr>
           <a:lstStyle/>
           <a:p>
-            <a:pPr algn="l">
+            <a:pPr algn="ctr">
               <a:lnSpc>
-                <a:spcPct val="105000"/>
+                <a:spcPct val="110000"/>
               </a:lnSpc>
             </a:pPr>
             <a:r>
@@ -11509,51 +11732,30 @@
                 <a:latin typeface="Arial"/>
                 <a:ea typeface="Arial"/>
               </a:rPr>
-              <a:t>FW·FTL → 호스트 SW 전환</a:t>
-            </a:r>
-          </a:p>
-          <a:p>
-            <a:pPr algn="l">
-              <a:lnSpc>
-                <a:spcPct val="105000"/>
-              </a:lnSpc>
-            </a:pPr>
-            <a:r>
-              <a:rPr sz="1800" b="0">
-                <a:solidFill>
-                  <a:srgbClr val="555555"/>
-                </a:solidFill>
-                <a:latin typeface="Arial"/>
-                <a:ea typeface="Arial"/>
-              </a:rPr>
-              <a:t>미국 로테이션 6~12개월 · 머지로 수료</a:t>
-            </a:r>
-          </a:p>
-        </p:txBody>
-      </p:sp>
-      <p:sp>
-        <p:nvSpPr>
-          <p:cNvPr id="33" name="Rounded Rectangle 32"/>
+              <a:t>고객</a:t>
+            </a:r>
+          </a:p>
+        </p:txBody>
+      </p:sp>
+      <p:sp>
+        <p:nvSpPr>
+          <p:cNvPr id="43" name="Rectangle 42"/>
           <p:cNvSpPr/>
           <p:nvPr/>
         </p:nvSpPr>
         <p:spPr>
           <a:xfrm>
-            <a:off x="12902184" y="5120640"/>
-            <a:ext cx="4663440" cy="1426464"/>
-          </a:xfrm>
-          <a:prstGeom prst="roundRect">
-            <a:avLst>
-              <a:gd name="adj" fmla="val 5128"/>
-            </a:avLst>
+            <a:off x="7616952" y="3968496"/>
+            <a:ext cx="3054096" cy="27432"/>
+          </a:xfrm>
+          <a:prstGeom prst="rect">
+            <a:avLst/>
           </a:prstGeom>
           <a:solidFill>
-            <a:srgbClr val="FFFFFF"/>
+            <a:srgbClr val="8A8A8A"/>
           </a:solidFill>
-          <a:ln w="22225">
-            <a:solidFill>
-              <a:srgbClr val="1428A0"/>
-            </a:solidFill>
+          <a:ln>
+            <a:noFill/>
           </a:ln>
           <a:effectLst/>
         </p:spPr>
@@ -11581,14 +11783,60 @@
       </p:sp>
       <p:sp>
         <p:nvSpPr>
-          <p:cNvPr id="34" name="TextBox 33"/>
+          <p:cNvPr id="44" name="Folded Corner 43"/>
+          <p:cNvSpPr/>
+          <p:nvPr/>
+        </p:nvSpPr>
+        <p:spPr>
+          <a:xfrm>
+            <a:off x="8942832" y="3712463"/>
+            <a:ext cx="402336" cy="512064"/>
+          </a:xfrm>
+          <a:prstGeom prst="foldedCorner">
+            <a:avLst/>
+          </a:prstGeom>
+          <a:solidFill>
+            <a:srgbClr val="FFFFFF"/>
+          </a:solidFill>
+          <a:ln w="15875">
+            <a:solidFill>
+              <a:srgbClr val="8A8A8A"/>
+            </a:solidFill>
+          </a:ln>
+          <a:effectLst/>
+        </p:spPr>
+        <p:style>
+          <a:lnRef idx="1">
+            <a:schemeClr val="accent1"/>
+          </a:lnRef>
+          <a:fillRef idx="3">
+            <a:schemeClr val="accent1"/>
+          </a:fillRef>
+          <a:effectRef idx="2">
+            <a:schemeClr val="accent1"/>
+          </a:effectRef>
+          <a:fontRef idx="minor">
+            <a:schemeClr val="lt1"/>
+          </a:fontRef>
+        </p:style>
+        <p:txBody>
+          <a:bodyPr rtlCol="0" anchor="ctr"/>
+          <a:lstStyle/>
+          <a:p>
+            <a:pPr algn="ctr"/>
+          </a:p>
+        </p:txBody>
+      </p:sp>
+      <p:sp>
+        <p:nvSpPr>
+          <p:cNvPr id="45" name="TextBox 44"/>
           <p:cNvSpPr txBox="1"/>
           <p:nvPr/>
         </p:nvSpPr>
         <p:spPr>
           <a:xfrm>
-            <a:off x="13103352" y="5120640"/>
-            <a:ext cx="4261103" cy="1426464"/>
+            <a:off x="5989320" y="4334256"/>
+            <a:ext cx="6309360" cy="329184"/>
           </a:xfrm>
           <a:prstGeom prst="rect">
             <a:avLst/>
@@ -11596,60 +11844,127 @@
           <a:noFill/>
         </p:spPr>
         <p:txBody>
-          <a:bodyPr wrap="square" anchor="ctr" lIns="0" rIns="0" tIns="0" bIns="0">
+          <a:bodyPr wrap="square" anchor="t" lIns="0" rIns="0" tIns="0" bIns="0">
             <a:spAutoFit/>
           </a:bodyPr>
           <a:lstStyle/>
           <a:p>
+            <a:pPr algn="ctr">
+              <a:lnSpc>
+                <a:spcPct val="110000"/>
+              </a:lnSpc>
+            </a:pPr>
+            <a:r>
+              <a:rPr sz="1800" b="0">
+                <a:solidFill>
+                  <a:srgbClr val="555555"/>
+                </a:solidFill>
+                <a:latin typeface="Arial"/>
+                <a:ea typeface="Arial"/>
+              </a:rPr>
+              <a:t>스펙 문서 · 간헐적 미팅: 명시된 요구만 오갑니다</a:t>
+            </a:r>
+          </a:p>
+        </p:txBody>
+      </p:sp>
+      <p:sp>
+        <p:nvSpPr>
+          <p:cNvPr id="46" name="Isosceles Triangle 45"/>
+          <p:cNvSpPr/>
+          <p:nvPr/>
+        </p:nvSpPr>
+        <p:spPr>
+          <a:xfrm rot="10800000">
+            <a:off x="8942832" y="4828032"/>
+            <a:ext cx="402336" cy="237744"/>
+          </a:xfrm>
+          <a:prstGeom prst="triangle">
+            <a:avLst/>
+          </a:prstGeom>
+          <a:solidFill>
+            <a:srgbClr val="AAB8E8"/>
+          </a:solidFill>
+          <a:ln>
+            <a:noFill/>
+          </a:ln>
+          <a:effectLst/>
+        </p:spPr>
+        <p:style>
+          <a:lnRef idx="1">
+            <a:schemeClr val="accent1"/>
+          </a:lnRef>
+          <a:fillRef idx="3">
+            <a:schemeClr val="accent1"/>
+          </a:fillRef>
+          <a:effectRef idx="2">
+            <a:schemeClr val="accent1"/>
+          </a:effectRef>
+          <a:fontRef idx="minor">
+            <a:schemeClr val="lt1"/>
+          </a:fontRef>
+        </p:style>
+        <p:txBody>
+          <a:bodyPr rtlCol="0" anchor="ctr"/>
+          <a:lstStyle/>
+          <a:p>
+            <a:pPr algn="ctr"/>
+          </a:p>
+        </p:txBody>
+      </p:sp>
+      <p:sp>
+        <p:nvSpPr>
+          <p:cNvPr id="47" name="TextBox 46"/>
+          <p:cNvSpPr txBox="1"/>
+          <p:nvPr/>
+        </p:nvSpPr>
+        <p:spPr>
+          <a:xfrm>
+            <a:off x="5989320" y="5138928"/>
+            <a:ext cx="3657600" cy="329184"/>
+          </a:xfrm>
+          <a:prstGeom prst="rect">
+            <a:avLst/>
+          </a:prstGeom>
+          <a:noFill/>
+        </p:spPr>
+        <p:txBody>
+          <a:bodyPr wrap="square" anchor="t" lIns="0" rIns="0" tIns="0" bIns="0">
+            <a:spAutoFit/>
+          </a:bodyPr>
+          <a:lstStyle/>
+          <a:p>
             <a:pPr algn="l">
               <a:lnSpc>
-                <a:spcPct val="105000"/>
+                <a:spcPct val="110000"/>
               </a:lnSpc>
             </a:pPr>
             <a:r>
-              <a:rPr sz="2000" b="1">
+              <a:rPr sz="1800" b="1">
                 <a:solidFill>
                   <a:srgbClr val="1428A0"/>
                 </a:solidFill>
                 <a:latin typeface="Arial"/>
                 <a:ea typeface="Arial"/>
               </a:rPr>
-              <a:t>오픈소스 메인테이너</a:t>
-            </a:r>
-          </a:p>
-          <a:p>
-            <a:pPr algn="l">
-              <a:lnSpc>
-                <a:spcPct val="105000"/>
-              </a:lnSpc>
-            </a:pPr>
-            <a:r>
-              <a:rPr sz="1800" b="0">
-                <a:solidFill>
-                  <a:srgbClr val="555555"/>
-                </a:solidFill>
-                <a:latin typeface="Arial"/>
-                <a:ea typeface="Arial"/>
-              </a:rPr>
-              <a:t>호명되는 아키텍트</a:t>
-            </a:r>
-          </a:p>
-        </p:txBody>
-      </p:sp>
-      <p:sp>
-        <p:nvSpPr>
-          <p:cNvPr id="35" name="Rounded Rectangle 34"/>
+              <a:t>앞으로: 고객 상주 협업 (FDE)</a:t>
+            </a:r>
+          </a:p>
+        </p:txBody>
+      </p:sp>
+      <p:sp>
+        <p:nvSpPr>
+          <p:cNvPr id="48" name="Rounded Rectangle 47"/>
           <p:cNvSpPr/>
           <p:nvPr/>
         </p:nvSpPr>
         <p:spPr>
           <a:xfrm>
-            <a:off x="3063240" y="6656832"/>
-            <a:ext cx="4663440" cy="1426464"/>
+            <a:off x="5989320" y="5559552"/>
+            <a:ext cx="6309360" cy="530352"/>
           </a:xfrm>
           <a:prstGeom prst="roundRect">
             <a:avLst>
-              <a:gd name="adj" fmla="val 5128"/>
+              <a:gd name="adj" fmla="val 13793"/>
             </a:avLst>
           </a:prstGeom>
           <a:solidFill>
@@ -11684,388 +11999,9 @@
           </a:p>
         </p:txBody>
       </p:sp>
-      <p:sp>
-        <p:nvSpPr>
-          <p:cNvPr id="36" name="TextBox 35"/>
-          <p:cNvSpPr txBox="1"/>
-          <p:nvPr/>
-        </p:nvSpPr>
-        <p:spPr>
-          <a:xfrm>
-            <a:off x="3264408" y="6656832"/>
-            <a:ext cx="4261103" cy="1426464"/>
-          </a:xfrm>
-          <a:prstGeom prst="rect">
-            <a:avLst/>
-          </a:prstGeom>
-          <a:noFill/>
-        </p:spPr>
-        <p:txBody>
-          <a:bodyPr wrap="square" anchor="ctr" lIns="0" rIns="0" tIns="0" bIns="0">
-            <a:spAutoFit/>
-          </a:bodyPr>
-          <a:lstStyle/>
-          <a:p>
-            <a:pPr algn="l">
-              <a:lnSpc>
-                <a:spcPct val="105000"/>
-              </a:lnSpc>
-            </a:pPr>
-            <a:r>
-              <a:rPr sz="2000" b="1">
-                <a:solidFill>
-                  <a:srgbClr val="1A1A1A"/>
-                </a:solidFill>
-                <a:latin typeface="Arial"/>
-                <a:ea typeface="Arial"/>
-              </a:rPr>
-              <a:t>등대 고객 1~2사 선정</a:t>
-            </a:r>
-          </a:p>
-          <a:p>
-            <a:pPr algn="l">
-              <a:lnSpc>
-                <a:spcPct val="105000"/>
-              </a:lnSpc>
-            </a:pPr>
-            <a:r>
-              <a:rPr sz="1800" b="0">
-                <a:solidFill>
-                  <a:srgbClr val="555555"/>
-                </a:solidFill>
-                <a:latin typeface="Arial"/>
-                <a:ea typeface="Arial"/>
-              </a:rPr>
-              <a:t>Co-Design Pod(FDE) 상주</a:t>
-            </a:r>
-          </a:p>
-        </p:txBody>
-      </p:sp>
-      <p:sp>
-        <p:nvSpPr>
-          <p:cNvPr id="37" name="Rounded Rectangle 36"/>
-          <p:cNvSpPr/>
-          <p:nvPr/>
-        </p:nvSpPr>
-        <p:spPr>
-          <a:xfrm>
-            <a:off x="7982712" y="6656832"/>
-            <a:ext cx="4663440" cy="1426464"/>
-          </a:xfrm>
-          <a:prstGeom prst="roundRect">
-            <a:avLst>
-              <a:gd name="adj" fmla="val 5128"/>
-            </a:avLst>
-          </a:prstGeom>
-          <a:solidFill>
-            <a:srgbClr val="FFFFFF"/>
-          </a:solidFill>
-          <a:ln w="12700">
-            <a:solidFill>
-              <a:srgbClr val="D9D9D9"/>
-            </a:solidFill>
-          </a:ln>
-          <a:effectLst/>
-        </p:spPr>
-        <p:style>
-          <a:lnRef idx="1">
-            <a:schemeClr val="accent1"/>
-          </a:lnRef>
-          <a:fillRef idx="3">
-            <a:schemeClr val="accent1"/>
-          </a:fillRef>
-          <a:effectRef idx="2">
-            <a:schemeClr val="accent1"/>
-          </a:effectRef>
-          <a:fontRef idx="minor">
-            <a:schemeClr val="lt1"/>
-          </a:fontRef>
-        </p:style>
-        <p:txBody>
-          <a:bodyPr rtlCol="0" anchor="ctr"/>
-          <a:lstStyle/>
-          <a:p>
-            <a:pPr algn="ctr"/>
-          </a:p>
-        </p:txBody>
-      </p:sp>
-      <p:sp>
-        <p:nvSpPr>
-          <p:cNvPr id="38" name="TextBox 37"/>
-          <p:cNvSpPr txBox="1"/>
-          <p:nvPr/>
-        </p:nvSpPr>
-        <p:spPr>
-          <a:xfrm>
-            <a:off x="8183880" y="6656832"/>
-            <a:ext cx="4261103" cy="1426464"/>
-          </a:xfrm>
-          <a:prstGeom prst="rect">
-            <a:avLst/>
-          </a:prstGeom>
-          <a:noFill/>
-        </p:spPr>
-        <p:txBody>
-          <a:bodyPr wrap="square" anchor="ctr" lIns="0" rIns="0" tIns="0" bIns="0">
-            <a:spAutoFit/>
-          </a:bodyPr>
-          <a:lstStyle/>
-          <a:p>
-            <a:pPr algn="l">
-              <a:lnSpc>
-                <a:spcPct val="105000"/>
-              </a:lnSpc>
-            </a:pPr>
-            <a:r>
-              <a:rPr sz="2000" b="1">
-                <a:solidFill>
-                  <a:srgbClr val="1A1A1A"/>
-                </a:solidFill>
-                <a:latin typeface="Arial"/>
-                <a:ea typeface="Arial"/>
-              </a:rPr>
-              <a:t>LMCache · vLLM · Dynamo</a:t>
-            </a:r>
-          </a:p>
-          <a:p>
-            <a:pPr algn="l">
-              <a:lnSpc>
-                <a:spcPct val="105000"/>
-              </a:lnSpc>
-            </a:pPr>
-            <a:r>
-              <a:rPr sz="1800" b="0">
-                <a:solidFill>
-                  <a:srgbClr val="555555"/>
-                </a:solidFill>
-                <a:latin typeface="Arial"/>
-                <a:ea typeface="Arial"/>
-              </a:rPr>
-              <a:t>FDP 경로 업스트림 기여</a:t>
-            </a:r>
-          </a:p>
-        </p:txBody>
-      </p:sp>
-      <p:sp>
-        <p:nvSpPr>
-          <p:cNvPr id="39" name="Rounded Rectangle 38"/>
-          <p:cNvSpPr/>
-          <p:nvPr/>
-        </p:nvSpPr>
-        <p:spPr>
-          <a:xfrm>
-            <a:off x="12902184" y="6656832"/>
-            <a:ext cx="4663440" cy="1426464"/>
-          </a:xfrm>
-          <a:prstGeom prst="roundRect">
-            <a:avLst>
-              <a:gd name="adj" fmla="val 5128"/>
-            </a:avLst>
-          </a:prstGeom>
-          <a:solidFill>
-            <a:srgbClr val="FFFFFF"/>
-          </a:solidFill>
-          <a:ln w="22225">
-            <a:solidFill>
-              <a:srgbClr val="1428A0"/>
-            </a:solidFill>
-          </a:ln>
-          <a:effectLst/>
-        </p:spPr>
-        <p:style>
-          <a:lnRef idx="1">
-            <a:schemeClr val="accent1"/>
-          </a:lnRef>
-          <a:fillRef idx="3">
-            <a:schemeClr val="accent1"/>
-          </a:fillRef>
-          <a:effectRef idx="2">
-            <a:schemeClr val="accent1"/>
-          </a:effectRef>
-          <a:fontRef idx="minor">
-            <a:schemeClr val="lt1"/>
-          </a:fontRef>
-        </p:style>
-        <p:txBody>
-          <a:bodyPr rtlCol="0" anchor="ctr"/>
-          <a:lstStyle/>
-          <a:p>
-            <a:pPr algn="ctr"/>
-          </a:p>
-        </p:txBody>
-      </p:sp>
-      <p:sp>
-        <p:nvSpPr>
-          <p:cNvPr id="40" name="TextBox 39"/>
-          <p:cNvSpPr txBox="1"/>
-          <p:nvPr/>
-        </p:nvSpPr>
-        <p:spPr>
-          <a:xfrm>
-            <a:off x="13103352" y="6656832"/>
-            <a:ext cx="4261103" cy="1426464"/>
-          </a:xfrm>
-          <a:prstGeom prst="rect">
-            <a:avLst/>
-          </a:prstGeom>
-          <a:noFill/>
-        </p:spPr>
-        <p:txBody>
-          <a:bodyPr wrap="square" anchor="ctr" lIns="0" rIns="0" tIns="0" bIns="0">
-            <a:spAutoFit/>
-          </a:bodyPr>
-          <a:lstStyle/>
-          <a:p>
-            <a:pPr algn="l">
-              <a:lnSpc>
-                <a:spcPct val="105000"/>
-              </a:lnSpc>
-            </a:pPr>
-            <a:r>
-              <a:rPr sz="2000" b="1">
-                <a:solidFill>
-                  <a:srgbClr val="1428A0"/>
-                </a:solidFill>
-                <a:latin typeface="Arial"/>
-                <a:ea typeface="Arial"/>
-              </a:rPr>
-              <a:t>전략적 협약 (SCA)</a:t>
-            </a:r>
-          </a:p>
-          <a:p>
-            <a:pPr algn="l">
-              <a:lnSpc>
-                <a:spcPct val="105000"/>
-              </a:lnSpc>
-            </a:pPr>
-            <a:r>
-              <a:rPr sz="1800" b="0">
-                <a:solidFill>
-                  <a:srgbClr val="555555"/>
-                </a:solidFill>
-                <a:latin typeface="Arial"/>
-                <a:ea typeface="Arial"/>
-              </a:rPr>
-              <a:t>공동 설계 · 다년 공급 · 워크로드 접근</a:t>
-            </a:r>
-          </a:p>
-        </p:txBody>
-      </p:sp>
-      <p:sp>
-        <p:nvSpPr>
-          <p:cNvPr id="41" name="TextBox 40"/>
-          <p:cNvSpPr txBox="1"/>
-          <p:nvPr/>
-        </p:nvSpPr>
-        <p:spPr>
-          <a:xfrm>
-            <a:off x="722376" y="8183879"/>
-            <a:ext cx="2194560" cy="457200"/>
-          </a:xfrm>
-          <a:prstGeom prst="rect">
-            <a:avLst/>
-          </a:prstGeom>
-          <a:noFill/>
-        </p:spPr>
-        <p:txBody>
-          <a:bodyPr wrap="square" anchor="ctr" lIns="0" rIns="0" tIns="0" bIns="0">
-            <a:spAutoFit/>
-          </a:bodyPr>
-          <a:lstStyle/>
-          <a:p>
-            <a:pPr algn="l">
-              <a:lnSpc>
-                <a:spcPct val="110000"/>
-              </a:lnSpc>
-            </a:pPr>
-            <a:r>
-              <a:rPr sz="1800" b="1">
-                <a:solidFill>
-                  <a:srgbClr val="555555"/>
-                </a:solidFill>
-                <a:latin typeface="Arial"/>
-                <a:ea typeface="Arial"/>
-              </a:rPr>
-              <a:t>대상 고객</a:t>
-            </a:r>
-          </a:p>
-        </p:txBody>
-      </p:sp>
       <p:pic>
         <p:nvPicPr>
-          <p:cNvPr id="42" name="Picture 41" descr="nvidia.png"/>
-          <p:cNvPicPr>
-            <a:picLocks noChangeAspect="1"/>
-          </p:cNvPicPr>
-          <p:nvPr/>
-        </p:nvPicPr>
-        <p:blipFill>
-          <a:blip r:embed="rId2"/>
-          <a:stretch>
-            <a:fillRect/>
-          </a:stretch>
-        </p:blipFill>
-        <p:spPr>
-          <a:xfrm>
-            <a:off x="3063240" y="8247888"/>
-            <a:ext cx="1722474" cy="329184"/>
-          </a:xfrm>
-          <a:prstGeom prst="rect">
-            <a:avLst/>
-          </a:prstGeom>
-        </p:spPr>
-      </p:pic>
-      <p:pic>
-        <p:nvPicPr>
-          <p:cNvPr id="43" name="Picture 42" descr="meta.png"/>
-          <p:cNvPicPr>
-            <a:picLocks noChangeAspect="1"/>
-          </p:cNvPicPr>
-          <p:nvPr/>
-        </p:nvPicPr>
-        <p:blipFill>
-          <a:blip r:embed="rId3"/>
-          <a:stretch>
-            <a:fillRect/>
-          </a:stretch>
-        </p:blipFill>
-        <p:spPr>
-          <a:xfrm>
-            <a:off x="5288634" y="8257031"/>
-            <a:ext cx="1528996" cy="310896"/>
-          </a:xfrm>
-          <a:prstGeom prst="rect">
-            <a:avLst/>
-          </a:prstGeom>
-        </p:spPr>
-      </p:pic>
-      <p:pic>
-        <p:nvPicPr>
-          <p:cNvPr id="44" name="Picture 43" descr="google.png"/>
-          <p:cNvPicPr>
-            <a:picLocks noChangeAspect="1"/>
-          </p:cNvPicPr>
-          <p:nvPr/>
-        </p:nvPicPr>
-        <p:blipFill>
-          <a:blip r:embed="rId4"/>
-          <a:stretch>
-            <a:fillRect/>
-          </a:stretch>
-        </p:blipFill>
-        <p:spPr>
-          <a:xfrm>
-            <a:off x="7320551" y="8229600"/>
-            <a:ext cx="1115877" cy="365760"/>
-          </a:xfrm>
-          <a:prstGeom prst="rect">
-            <a:avLst/>
-          </a:prstGeom>
-        </p:spPr>
-      </p:pic>
-      <p:pic>
-        <p:nvPicPr>
-          <p:cNvPr id="45" name="Picture 44" descr="microsoft.png"/>
+          <p:cNvPr id="49" name="Picture 48" descr="samsung.png"/>
           <p:cNvPicPr>
             <a:picLocks noChangeAspect="1"/>
           </p:cNvPicPr>
@@ -12079,17 +12015,932 @@
         </p:blipFill>
         <p:spPr>
           <a:xfrm>
-            <a:off x="8939349" y="8247888"/>
-            <a:ext cx="1535054" cy="329184"/>
+            <a:off x="6190488" y="5722431"/>
+            <a:ext cx="1325880" cy="204593"/>
           </a:xfrm>
           <a:prstGeom prst="rect">
             <a:avLst/>
           </a:prstGeom>
         </p:spPr>
       </p:pic>
+      <p:sp>
+        <p:nvSpPr>
+          <p:cNvPr id="50" name="TextBox 49"/>
+          <p:cNvSpPr txBox="1"/>
+          <p:nvPr/>
+        </p:nvSpPr>
+        <p:spPr>
+          <a:xfrm>
+            <a:off x="7772400" y="5559552"/>
+            <a:ext cx="4297680" cy="530352"/>
+          </a:xfrm>
+          <a:prstGeom prst="rect">
+            <a:avLst/>
+          </a:prstGeom>
+          <a:noFill/>
+        </p:spPr>
+        <p:txBody>
+          <a:bodyPr wrap="square" anchor="ctr" lIns="0" rIns="0" tIns="0" bIns="0">
+            <a:spAutoFit/>
+          </a:bodyPr>
+          <a:lstStyle/>
+          <a:p>
+            <a:pPr algn="l">
+              <a:lnSpc>
+                <a:spcPct val="110000"/>
+              </a:lnSpc>
+            </a:pPr>
+            <a:r>
+              <a:rPr sz="1800" b="1">
+                <a:solidFill>
+                  <a:srgbClr val="1A1A1A"/>
+                </a:solidFill>
+                <a:latin typeface="Arial"/>
+                <a:ea typeface="Arial"/>
+              </a:rPr>
+              <a:t>제품 · 로드맵</a:t>
+            </a:r>
+          </a:p>
+        </p:txBody>
+      </p:sp>
+      <p:sp>
+        <p:nvSpPr>
+          <p:cNvPr id="51" name="Rounded Rectangle 50"/>
+          <p:cNvSpPr/>
+          <p:nvPr/>
+        </p:nvSpPr>
+        <p:spPr>
+          <a:xfrm>
+            <a:off x="5989320" y="6565392"/>
+            <a:ext cx="6309360" cy="1426464"/>
+          </a:xfrm>
+          <a:prstGeom prst="roundRect">
+            <a:avLst>
+              <a:gd name="adj" fmla="val 5128"/>
+            </a:avLst>
+          </a:prstGeom>
+          <a:solidFill>
+            <a:srgbClr val="EEF1FA"/>
+          </a:solidFill>
+          <a:ln w="19050">
+            <a:solidFill>
+              <a:srgbClr val="1428A0"/>
+            </a:solidFill>
+          </a:ln>
+          <a:effectLst/>
+        </p:spPr>
+        <p:style>
+          <a:lnRef idx="1">
+            <a:schemeClr val="accent1"/>
+          </a:lnRef>
+          <a:fillRef idx="3">
+            <a:schemeClr val="accent1"/>
+          </a:fillRef>
+          <a:effectRef idx="2">
+            <a:schemeClr val="accent1"/>
+          </a:effectRef>
+          <a:fontRef idx="minor">
+            <a:schemeClr val="lt1"/>
+          </a:fontRef>
+        </p:style>
+        <p:txBody>
+          <a:bodyPr rtlCol="0" anchor="ctr"/>
+          <a:lstStyle/>
+          <a:p>
+            <a:pPr algn="ctr"/>
+          </a:p>
+        </p:txBody>
+      </p:sp>
+      <p:sp>
+        <p:nvSpPr>
+          <p:cNvPr id="52" name="Down Arrow 51"/>
+          <p:cNvSpPr/>
+          <p:nvPr/>
+        </p:nvSpPr>
+        <p:spPr>
+          <a:xfrm>
+            <a:off x="6524426" y="6126480"/>
+            <a:ext cx="310896" cy="804671"/>
+          </a:xfrm>
+          <a:prstGeom prst="downArrow">
+            <a:avLst/>
+          </a:prstGeom>
+          <a:solidFill>
+            <a:srgbClr val="1428A0"/>
+          </a:solidFill>
+          <a:ln>
+            <a:noFill/>
+          </a:ln>
+          <a:effectLst/>
+        </p:spPr>
+        <p:style>
+          <a:lnRef idx="1">
+            <a:schemeClr val="accent1"/>
+          </a:lnRef>
+          <a:fillRef idx="3">
+            <a:schemeClr val="accent1"/>
+          </a:fillRef>
+          <a:effectRef idx="2">
+            <a:schemeClr val="accent1"/>
+          </a:effectRef>
+          <a:fontRef idx="minor">
+            <a:schemeClr val="lt1"/>
+          </a:fontRef>
+        </p:style>
+        <p:txBody>
+          <a:bodyPr rtlCol="0" anchor="ctr"/>
+          <a:lstStyle/>
+          <a:p>
+            <a:pPr algn="ctr"/>
+          </a:p>
+        </p:txBody>
+      </p:sp>
+      <p:sp>
+        <p:nvSpPr>
+          <p:cNvPr id="53" name="Up Arrow 52"/>
+          <p:cNvSpPr/>
+          <p:nvPr/>
+        </p:nvSpPr>
+        <p:spPr>
+          <a:xfrm>
+            <a:off x="7054778" y="6126480"/>
+            <a:ext cx="310896" cy="804671"/>
+          </a:xfrm>
+          <a:prstGeom prst="upArrow">
+            <a:avLst/>
+          </a:prstGeom>
+          <a:solidFill>
+            <a:srgbClr val="3C5AC8"/>
+          </a:solidFill>
+          <a:ln>
+            <a:noFill/>
+          </a:ln>
+          <a:effectLst/>
+        </p:spPr>
+        <p:style>
+          <a:lnRef idx="1">
+            <a:schemeClr val="accent1"/>
+          </a:lnRef>
+          <a:fillRef idx="3">
+            <a:schemeClr val="accent1"/>
+          </a:fillRef>
+          <a:effectRef idx="2">
+            <a:schemeClr val="accent1"/>
+          </a:effectRef>
+          <a:fontRef idx="minor">
+            <a:schemeClr val="lt1"/>
+          </a:fontRef>
+        </p:style>
+        <p:txBody>
+          <a:bodyPr rtlCol="0" anchor="ctr"/>
+          <a:lstStyle/>
+          <a:p>
+            <a:pPr algn="ctr"/>
+          </a:p>
+        </p:txBody>
+      </p:sp>
+      <p:sp>
+        <p:nvSpPr>
+          <p:cNvPr id="54" name="TextBox 53"/>
+          <p:cNvSpPr txBox="1"/>
+          <p:nvPr/>
+        </p:nvSpPr>
+        <p:spPr>
+          <a:xfrm>
+            <a:off x="5989320" y="6144768"/>
+            <a:ext cx="443666" cy="365760"/>
+          </a:xfrm>
+          <a:prstGeom prst="rect">
+            <a:avLst/>
+          </a:prstGeom>
+          <a:noFill/>
+        </p:spPr>
+        <p:txBody>
+          <a:bodyPr wrap="square" anchor="ctr" lIns="0" rIns="0" tIns="0" bIns="0">
+            <a:spAutoFit/>
+          </a:bodyPr>
+          <a:lstStyle/>
+          <a:p>
+            <a:pPr algn="r">
+              <a:lnSpc>
+                <a:spcPct val="110000"/>
+              </a:lnSpc>
+            </a:pPr>
+            <a:r>
+              <a:rPr sz="1800" b="1">
+                <a:solidFill>
+                  <a:srgbClr val="1428A0"/>
+                </a:solidFill>
+                <a:latin typeface="Arial"/>
+                <a:ea typeface="Arial"/>
+              </a:rPr>
+              <a:t>사람</a:t>
+            </a:r>
+          </a:p>
+        </p:txBody>
+      </p:sp>
+      <p:sp>
+        <p:nvSpPr>
+          <p:cNvPr id="55" name="TextBox 54"/>
+          <p:cNvSpPr txBox="1"/>
+          <p:nvPr/>
+        </p:nvSpPr>
+        <p:spPr>
+          <a:xfrm>
+            <a:off x="7475402" y="6144768"/>
+            <a:ext cx="3108960" cy="365760"/>
+          </a:xfrm>
+          <a:prstGeom prst="rect">
+            <a:avLst/>
+          </a:prstGeom>
+          <a:noFill/>
+        </p:spPr>
+        <p:txBody>
+          <a:bodyPr wrap="square" anchor="ctr" lIns="0" rIns="0" tIns="0" bIns="0">
+            <a:spAutoFit/>
+          </a:bodyPr>
+          <a:lstStyle/>
+          <a:p>
+            <a:pPr algn="l">
+              <a:lnSpc>
+                <a:spcPct val="110000"/>
+              </a:lnSpc>
+            </a:pPr>
+            <a:r>
+              <a:rPr sz="1800" b="1">
+                <a:solidFill>
+                  <a:srgbClr val="3C5AC8"/>
+                </a:solidFill>
+                <a:latin typeface="Arial"/>
+                <a:ea typeface="Arial"/>
+              </a:rPr>
+              <a:t>실제 요구 → 제품</a:t>
+            </a:r>
+          </a:p>
+        </p:txBody>
+      </p:sp>
+      <p:sp>
+        <p:nvSpPr>
+          <p:cNvPr id="56" name="TextBox 55"/>
+          <p:cNvSpPr txBox="1"/>
+          <p:nvPr/>
+        </p:nvSpPr>
+        <p:spPr>
+          <a:xfrm>
+            <a:off x="9372600" y="6656831"/>
+            <a:ext cx="2743200" cy="329184"/>
+          </a:xfrm>
+          <a:prstGeom prst="rect">
+            <a:avLst/>
+          </a:prstGeom>
+          <a:noFill/>
+        </p:spPr>
+        <p:txBody>
+          <a:bodyPr wrap="square" anchor="t" lIns="0" rIns="0" tIns="0" bIns="0">
+            <a:spAutoFit/>
+          </a:bodyPr>
+          <a:lstStyle/>
+          <a:p>
+            <a:pPr algn="r">
+              <a:lnSpc>
+                <a:spcPct val="110000"/>
+              </a:lnSpc>
+            </a:pPr>
+            <a:r>
+              <a:rPr sz="1800" b="1">
+                <a:solidFill>
+                  <a:srgbClr val="1428A0"/>
+                </a:solidFill>
+                <a:latin typeface="Arial"/>
+                <a:ea typeface="Arial"/>
+              </a:rPr>
+              <a:t>고객 AI 데이터센터</a:t>
+            </a:r>
+          </a:p>
+        </p:txBody>
+      </p:sp>
+      <p:sp>
+        <p:nvSpPr>
+          <p:cNvPr id="57" name="Oval 56"/>
+          <p:cNvSpPr/>
+          <p:nvPr/>
+        </p:nvSpPr>
+        <p:spPr>
+          <a:xfrm>
+            <a:off x="6385438" y="7022592"/>
+            <a:ext cx="210677" cy="210677"/>
+          </a:xfrm>
+          <a:prstGeom prst="ellipse">
+            <a:avLst/>
+          </a:prstGeom>
+          <a:solidFill>
+            <a:srgbClr val="1428A0"/>
+          </a:solidFill>
+          <a:ln>
+            <a:noFill/>
+          </a:ln>
+          <a:effectLst/>
+        </p:spPr>
+        <p:style>
+          <a:lnRef idx="1">
+            <a:schemeClr val="accent1"/>
+          </a:lnRef>
+          <a:fillRef idx="3">
+            <a:schemeClr val="accent1"/>
+          </a:fillRef>
+          <a:effectRef idx="2">
+            <a:schemeClr val="accent1"/>
+          </a:effectRef>
+          <a:fontRef idx="minor">
+            <a:schemeClr val="lt1"/>
+          </a:fontRef>
+        </p:style>
+        <p:txBody>
+          <a:bodyPr rtlCol="0" anchor="ctr"/>
+          <a:lstStyle/>
+          <a:p>
+            <a:pPr algn="ctr"/>
+          </a:p>
+        </p:txBody>
+      </p:sp>
+      <p:sp>
+        <p:nvSpPr>
+          <p:cNvPr id="58" name="Round Same Side Corner Rectangle 57"/>
+          <p:cNvSpPr/>
+          <p:nvPr/>
+        </p:nvSpPr>
+        <p:spPr>
+          <a:xfrm>
+            <a:off x="6309359" y="7268382"/>
+            <a:ext cx="362833" cy="339425"/>
+          </a:xfrm>
+          <a:prstGeom prst="round2SameRect">
+            <a:avLst>
+              <a:gd name="adj1" fmla="val 45000"/>
+              <a:gd name="adj2" fmla="val 0"/>
+            </a:avLst>
+          </a:prstGeom>
+          <a:solidFill>
+            <a:srgbClr val="1428A0"/>
+          </a:solidFill>
+          <a:ln>
+            <a:noFill/>
+          </a:ln>
+          <a:effectLst/>
+        </p:spPr>
+        <p:style>
+          <a:lnRef idx="1">
+            <a:schemeClr val="accent1"/>
+          </a:lnRef>
+          <a:fillRef idx="3">
+            <a:schemeClr val="accent1"/>
+          </a:fillRef>
+          <a:effectRef idx="2">
+            <a:schemeClr val="accent1"/>
+          </a:effectRef>
+          <a:fontRef idx="minor">
+            <a:schemeClr val="lt1"/>
+          </a:fontRef>
+        </p:style>
+        <p:txBody>
+          <a:bodyPr rtlCol="0" anchor="ctr"/>
+          <a:lstStyle/>
+          <a:p>
+            <a:pPr algn="ctr"/>
+          </a:p>
+        </p:txBody>
+      </p:sp>
+      <p:sp>
+        <p:nvSpPr>
+          <p:cNvPr id="59" name="Oval 58"/>
+          <p:cNvSpPr/>
+          <p:nvPr/>
+        </p:nvSpPr>
+        <p:spPr>
+          <a:xfrm>
+            <a:off x="6839712" y="7022592"/>
+            <a:ext cx="210677" cy="210677"/>
+          </a:xfrm>
+          <a:prstGeom prst="ellipse">
+            <a:avLst/>
+          </a:prstGeom>
+          <a:solidFill>
+            <a:srgbClr val="1428A0"/>
+          </a:solidFill>
+          <a:ln>
+            <a:noFill/>
+          </a:ln>
+          <a:effectLst/>
+        </p:spPr>
+        <p:style>
+          <a:lnRef idx="1">
+            <a:schemeClr val="accent1"/>
+          </a:lnRef>
+          <a:fillRef idx="3">
+            <a:schemeClr val="accent1"/>
+          </a:fillRef>
+          <a:effectRef idx="2">
+            <a:schemeClr val="accent1"/>
+          </a:effectRef>
+          <a:fontRef idx="minor">
+            <a:schemeClr val="lt1"/>
+          </a:fontRef>
+        </p:style>
+        <p:txBody>
+          <a:bodyPr rtlCol="0" anchor="ctr"/>
+          <a:lstStyle/>
+          <a:p>
+            <a:pPr algn="ctr"/>
+          </a:p>
+        </p:txBody>
+      </p:sp>
+      <p:sp>
+        <p:nvSpPr>
+          <p:cNvPr id="60" name="Round Same Side Corner Rectangle 59"/>
+          <p:cNvSpPr/>
+          <p:nvPr/>
+        </p:nvSpPr>
+        <p:spPr>
+          <a:xfrm>
+            <a:off x="6763633" y="7268382"/>
+            <a:ext cx="362833" cy="339425"/>
+          </a:xfrm>
+          <a:prstGeom prst="round2SameRect">
+            <a:avLst>
+              <a:gd name="adj1" fmla="val 45000"/>
+              <a:gd name="adj2" fmla="val 0"/>
+            </a:avLst>
+          </a:prstGeom>
+          <a:solidFill>
+            <a:srgbClr val="1428A0"/>
+          </a:solidFill>
+          <a:ln>
+            <a:noFill/>
+          </a:ln>
+          <a:effectLst/>
+        </p:spPr>
+        <p:style>
+          <a:lnRef idx="1">
+            <a:schemeClr val="accent1"/>
+          </a:lnRef>
+          <a:fillRef idx="3">
+            <a:schemeClr val="accent1"/>
+          </a:fillRef>
+          <a:effectRef idx="2">
+            <a:schemeClr val="accent1"/>
+          </a:effectRef>
+          <a:fontRef idx="minor">
+            <a:schemeClr val="lt1"/>
+          </a:fontRef>
+        </p:style>
+        <p:txBody>
+          <a:bodyPr rtlCol="0" anchor="ctr"/>
+          <a:lstStyle/>
+          <a:p>
+            <a:pPr algn="ctr"/>
+          </a:p>
+        </p:txBody>
+      </p:sp>
+      <p:sp>
+        <p:nvSpPr>
+          <p:cNvPr id="61" name="Oval 60"/>
+          <p:cNvSpPr/>
+          <p:nvPr/>
+        </p:nvSpPr>
+        <p:spPr>
+          <a:xfrm>
+            <a:off x="7293985" y="7022592"/>
+            <a:ext cx="210677" cy="210677"/>
+          </a:xfrm>
+          <a:prstGeom prst="ellipse">
+            <a:avLst/>
+          </a:prstGeom>
+          <a:solidFill>
+            <a:srgbClr val="1428A0"/>
+          </a:solidFill>
+          <a:ln>
+            <a:noFill/>
+          </a:ln>
+          <a:effectLst/>
+        </p:spPr>
+        <p:style>
+          <a:lnRef idx="1">
+            <a:schemeClr val="accent1"/>
+          </a:lnRef>
+          <a:fillRef idx="3">
+            <a:schemeClr val="accent1"/>
+          </a:fillRef>
+          <a:effectRef idx="2">
+            <a:schemeClr val="accent1"/>
+          </a:effectRef>
+          <a:fontRef idx="minor">
+            <a:schemeClr val="lt1"/>
+          </a:fontRef>
+        </p:style>
+        <p:txBody>
+          <a:bodyPr rtlCol="0" anchor="ctr"/>
+          <a:lstStyle/>
+          <a:p>
+            <a:pPr algn="ctr"/>
+          </a:p>
+        </p:txBody>
+      </p:sp>
+      <p:sp>
+        <p:nvSpPr>
+          <p:cNvPr id="62" name="Round Same Side Corner Rectangle 61"/>
+          <p:cNvSpPr/>
+          <p:nvPr/>
+        </p:nvSpPr>
+        <p:spPr>
+          <a:xfrm>
+            <a:off x="7217907" y="7268382"/>
+            <a:ext cx="362833" cy="339425"/>
+          </a:xfrm>
+          <a:prstGeom prst="round2SameRect">
+            <a:avLst>
+              <a:gd name="adj1" fmla="val 45000"/>
+              <a:gd name="adj2" fmla="val 0"/>
+            </a:avLst>
+          </a:prstGeom>
+          <a:solidFill>
+            <a:srgbClr val="1428A0"/>
+          </a:solidFill>
+          <a:ln>
+            <a:noFill/>
+          </a:ln>
+          <a:effectLst/>
+        </p:spPr>
+        <p:style>
+          <a:lnRef idx="1">
+            <a:schemeClr val="accent1"/>
+          </a:lnRef>
+          <a:fillRef idx="3">
+            <a:schemeClr val="accent1"/>
+          </a:fillRef>
+          <a:effectRef idx="2">
+            <a:schemeClr val="accent1"/>
+          </a:effectRef>
+          <a:fontRef idx="minor">
+            <a:schemeClr val="lt1"/>
+          </a:fontRef>
+        </p:style>
+        <p:txBody>
+          <a:bodyPr rtlCol="0" anchor="ctr"/>
+          <a:lstStyle/>
+          <a:p>
+            <a:pPr algn="ctr"/>
+          </a:p>
+        </p:txBody>
+      </p:sp>
+      <p:sp>
+        <p:nvSpPr>
+          <p:cNvPr id="63" name="TextBox 62"/>
+          <p:cNvSpPr txBox="1"/>
+          <p:nvPr/>
+        </p:nvSpPr>
+        <p:spPr>
+          <a:xfrm>
+            <a:off x="6035040" y="7662672"/>
+            <a:ext cx="1820021" cy="329184"/>
+          </a:xfrm>
+          <a:prstGeom prst="rect">
+            <a:avLst/>
+          </a:prstGeom>
+          <a:noFill/>
+        </p:spPr>
+        <p:txBody>
+          <a:bodyPr wrap="square" anchor="t" lIns="0" rIns="0" tIns="0" bIns="0">
+            <a:spAutoFit/>
+          </a:bodyPr>
+          <a:lstStyle/>
+          <a:p>
+            <a:pPr algn="ctr">
+              <a:lnSpc>
+                <a:spcPct val="110000"/>
+              </a:lnSpc>
+            </a:pPr>
+            <a:r>
+              <a:rPr sz="1800" b="1">
+                <a:solidFill>
+                  <a:srgbClr val="1428A0"/>
+                </a:solidFill>
+                <a:latin typeface="Arial"/>
+                <a:ea typeface="Arial"/>
+              </a:rPr>
+              <a:t>삼성 Pod</a:t>
+            </a:r>
+          </a:p>
+        </p:txBody>
+      </p:sp>
+      <p:sp>
+        <p:nvSpPr>
+          <p:cNvPr id="64" name="Oval 63"/>
+          <p:cNvSpPr/>
+          <p:nvPr/>
+        </p:nvSpPr>
+        <p:spPr>
+          <a:xfrm>
+            <a:off x="10140330" y="7022592"/>
+            <a:ext cx="210677" cy="210677"/>
+          </a:xfrm>
+          <a:prstGeom prst="ellipse">
+            <a:avLst/>
+          </a:prstGeom>
+          <a:solidFill>
+            <a:srgbClr val="8A8A8A"/>
+          </a:solidFill>
+          <a:ln>
+            <a:noFill/>
+          </a:ln>
+          <a:effectLst/>
+        </p:spPr>
+        <p:style>
+          <a:lnRef idx="1">
+            <a:schemeClr val="accent1"/>
+          </a:lnRef>
+          <a:fillRef idx="3">
+            <a:schemeClr val="accent1"/>
+          </a:fillRef>
+          <a:effectRef idx="2">
+            <a:schemeClr val="accent1"/>
+          </a:effectRef>
+          <a:fontRef idx="minor">
+            <a:schemeClr val="lt1"/>
+          </a:fontRef>
+        </p:style>
+        <p:txBody>
+          <a:bodyPr rtlCol="0" anchor="ctr"/>
+          <a:lstStyle/>
+          <a:p>
+            <a:pPr algn="ctr"/>
+          </a:p>
+        </p:txBody>
+      </p:sp>
+      <p:sp>
+        <p:nvSpPr>
+          <p:cNvPr id="65" name="Round Same Side Corner Rectangle 64"/>
+          <p:cNvSpPr/>
+          <p:nvPr/>
+        </p:nvSpPr>
+        <p:spPr>
+          <a:xfrm>
+            <a:off x="10064252" y="7268382"/>
+            <a:ext cx="362833" cy="339425"/>
+          </a:xfrm>
+          <a:prstGeom prst="round2SameRect">
+            <a:avLst>
+              <a:gd name="adj1" fmla="val 45000"/>
+              <a:gd name="adj2" fmla="val 0"/>
+            </a:avLst>
+          </a:prstGeom>
+          <a:solidFill>
+            <a:srgbClr val="8A8A8A"/>
+          </a:solidFill>
+          <a:ln>
+            <a:noFill/>
+          </a:ln>
+          <a:effectLst/>
+        </p:spPr>
+        <p:style>
+          <a:lnRef idx="1">
+            <a:schemeClr val="accent1"/>
+          </a:lnRef>
+          <a:fillRef idx="3">
+            <a:schemeClr val="accent1"/>
+          </a:fillRef>
+          <a:effectRef idx="2">
+            <a:schemeClr val="accent1"/>
+          </a:effectRef>
+          <a:fontRef idx="minor">
+            <a:schemeClr val="lt1"/>
+          </a:fontRef>
+        </p:style>
+        <p:txBody>
+          <a:bodyPr rtlCol="0" anchor="ctr"/>
+          <a:lstStyle/>
+          <a:p>
+            <a:pPr algn="ctr"/>
+          </a:p>
+        </p:txBody>
+      </p:sp>
+      <p:sp>
+        <p:nvSpPr>
+          <p:cNvPr id="66" name="Oval 65"/>
+          <p:cNvSpPr/>
+          <p:nvPr/>
+        </p:nvSpPr>
+        <p:spPr>
+          <a:xfrm>
+            <a:off x="10594604" y="7022592"/>
+            <a:ext cx="210677" cy="210677"/>
+          </a:xfrm>
+          <a:prstGeom prst="ellipse">
+            <a:avLst/>
+          </a:prstGeom>
+          <a:solidFill>
+            <a:srgbClr val="8A8A8A"/>
+          </a:solidFill>
+          <a:ln>
+            <a:noFill/>
+          </a:ln>
+          <a:effectLst/>
+        </p:spPr>
+        <p:style>
+          <a:lnRef idx="1">
+            <a:schemeClr val="accent1"/>
+          </a:lnRef>
+          <a:fillRef idx="3">
+            <a:schemeClr val="accent1"/>
+          </a:fillRef>
+          <a:effectRef idx="2">
+            <a:schemeClr val="accent1"/>
+          </a:effectRef>
+          <a:fontRef idx="minor">
+            <a:schemeClr val="lt1"/>
+          </a:fontRef>
+        </p:style>
+        <p:txBody>
+          <a:bodyPr rtlCol="0" anchor="ctr"/>
+          <a:lstStyle/>
+          <a:p>
+            <a:pPr algn="ctr"/>
+          </a:p>
+        </p:txBody>
+      </p:sp>
+      <p:sp>
+        <p:nvSpPr>
+          <p:cNvPr id="67" name="Round Same Side Corner Rectangle 66"/>
+          <p:cNvSpPr/>
+          <p:nvPr/>
+        </p:nvSpPr>
+        <p:spPr>
+          <a:xfrm>
+            <a:off x="10518526" y="7268382"/>
+            <a:ext cx="362833" cy="339425"/>
+          </a:xfrm>
+          <a:prstGeom prst="round2SameRect">
+            <a:avLst>
+              <a:gd name="adj1" fmla="val 45000"/>
+              <a:gd name="adj2" fmla="val 0"/>
+            </a:avLst>
+          </a:prstGeom>
+          <a:solidFill>
+            <a:srgbClr val="8A8A8A"/>
+          </a:solidFill>
+          <a:ln>
+            <a:noFill/>
+          </a:ln>
+          <a:effectLst/>
+        </p:spPr>
+        <p:style>
+          <a:lnRef idx="1">
+            <a:schemeClr val="accent1"/>
+          </a:lnRef>
+          <a:fillRef idx="3">
+            <a:schemeClr val="accent1"/>
+          </a:fillRef>
+          <a:effectRef idx="2">
+            <a:schemeClr val="accent1"/>
+          </a:effectRef>
+          <a:fontRef idx="minor">
+            <a:schemeClr val="lt1"/>
+          </a:fontRef>
+        </p:style>
+        <p:txBody>
+          <a:bodyPr rtlCol="0" anchor="ctr"/>
+          <a:lstStyle/>
+          <a:p>
+            <a:pPr algn="ctr"/>
+          </a:p>
+        </p:txBody>
+      </p:sp>
+      <p:sp>
+        <p:nvSpPr>
+          <p:cNvPr id="68" name="TextBox 67"/>
+          <p:cNvSpPr txBox="1"/>
+          <p:nvPr/>
+        </p:nvSpPr>
+        <p:spPr>
+          <a:xfrm>
+            <a:off x="9561332" y="7662672"/>
+            <a:ext cx="1822947" cy="329184"/>
+          </a:xfrm>
+          <a:prstGeom prst="rect">
+            <a:avLst/>
+          </a:prstGeom>
+          <a:noFill/>
+        </p:spPr>
+        <p:txBody>
+          <a:bodyPr wrap="square" anchor="t" lIns="0" rIns="0" tIns="0" bIns="0">
+            <a:spAutoFit/>
+          </a:bodyPr>
+          <a:lstStyle/>
+          <a:p>
+            <a:pPr algn="ctr">
+              <a:lnSpc>
+                <a:spcPct val="110000"/>
+              </a:lnSpc>
+            </a:pPr>
+            <a:r>
+              <a:rPr sz="1800" b="1">
+                <a:solidFill>
+                  <a:srgbClr val="555555"/>
+                </a:solidFill>
+                <a:latin typeface="Arial"/>
+                <a:ea typeface="Arial"/>
+              </a:rPr>
+              <a:t>고객 엔지니어</a:t>
+            </a:r>
+          </a:p>
+        </p:txBody>
+      </p:sp>
+      <p:sp>
+        <p:nvSpPr>
+          <p:cNvPr id="69" name="Left-Right Arrow 68"/>
+          <p:cNvSpPr/>
+          <p:nvPr/>
+        </p:nvSpPr>
+        <p:spPr>
+          <a:xfrm>
+            <a:off x="7717901" y="7223759"/>
+            <a:ext cx="2209190" cy="274320"/>
+          </a:xfrm>
+          <a:prstGeom prst="leftRightArrow">
+            <a:avLst/>
+          </a:prstGeom>
+          <a:solidFill>
+            <a:srgbClr val="AAB8E8"/>
+          </a:solidFill>
+          <a:ln>
+            <a:noFill/>
+          </a:ln>
+          <a:effectLst/>
+        </p:spPr>
+        <p:style>
+          <a:lnRef idx="1">
+            <a:schemeClr val="accent1"/>
+          </a:lnRef>
+          <a:fillRef idx="3">
+            <a:schemeClr val="accent1"/>
+          </a:fillRef>
+          <a:effectRef idx="2">
+            <a:schemeClr val="accent1"/>
+          </a:effectRef>
+          <a:fontRef idx="minor">
+            <a:schemeClr val="lt1"/>
+          </a:fontRef>
+        </p:style>
+        <p:txBody>
+          <a:bodyPr rtlCol="0" anchor="ctr"/>
+          <a:lstStyle/>
+          <a:p>
+            <a:pPr algn="ctr"/>
+          </a:p>
+        </p:txBody>
+      </p:sp>
+      <p:sp>
+        <p:nvSpPr>
+          <p:cNvPr id="70" name="TextBox 69"/>
+          <p:cNvSpPr txBox="1"/>
+          <p:nvPr/>
+        </p:nvSpPr>
+        <p:spPr>
+          <a:xfrm>
+            <a:off x="7717901" y="7552944"/>
+            <a:ext cx="2209190" cy="310896"/>
+          </a:xfrm>
+          <a:prstGeom prst="rect">
+            <a:avLst/>
+          </a:prstGeom>
+          <a:noFill/>
+        </p:spPr>
+        <p:txBody>
+          <a:bodyPr wrap="square" anchor="t" lIns="0" rIns="0" tIns="0" bIns="0">
+            <a:spAutoFit/>
+          </a:bodyPr>
+          <a:lstStyle/>
+          <a:p>
+            <a:pPr algn="ctr">
+              <a:lnSpc>
+                <a:spcPct val="110000"/>
+              </a:lnSpc>
+            </a:pPr>
+            <a:r>
+              <a:rPr sz="1600" b="1">
+                <a:solidFill>
+                  <a:srgbClr val="1428A0"/>
+                </a:solidFill>
+                <a:latin typeface="Arial"/>
+                <a:ea typeface="Arial"/>
+              </a:rPr>
+              <a:t>매일 함께</a:t>
+            </a:r>
+          </a:p>
+        </p:txBody>
+      </p:sp>
       <p:pic>
         <p:nvPicPr>
-          <p:cNvPr id="46" name="Picture 45" descr="aws.png"/>
+          <p:cNvPr id="71" name="Picture 70" descr="render_server.png"/>
           <p:cNvPicPr>
             <a:picLocks noChangeAspect="1"/>
           </p:cNvPicPr>
@@ -12103,8 +12954,8 @@
         </p:blipFill>
         <p:spPr>
           <a:xfrm>
-            <a:off x="10977324" y="8220455"/>
-            <a:ext cx="642459" cy="384048"/>
+            <a:off x="10972800" y="7024587"/>
+            <a:ext cx="1143000" cy="672664"/>
           </a:xfrm>
           <a:prstGeom prst="rect">
             <a:avLst/>
@@ -12113,16 +12964,100 @@
       </p:pic>
       <p:sp>
         <p:nvSpPr>
-          <p:cNvPr id="47" name="Rectangle 46"/>
+          <p:cNvPr id="72" name="TextBox 71"/>
+          <p:cNvSpPr txBox="1"/>
+          <p:nvPr/>
+        </p:nvSpPr>
+        <p:spPr>
+          <a:xfrm>
+            <a:off x="5989320" y="8101583"/>
+            <a:ext cx="6309360" cy="457200"/>
+          </a:xfrm>
+          <a:prstGeom prst="rect">
+            <a:avLst/>
+          </a:prstGeom>
+          <a:noFill/>
+        </p:spPr>
+        <p:txBody>
+          <a:bodyPr wrap="square" anchor="ctr" lIns="0" rIns="0" tIns="0" bIns="0">
+            <a:spAutoFit/>
+          </a:bodyPr>
+          <a:lstStyle/>
+          <a:p>
+            <a:pPr algn="l">
+              <a:lnSpc>
+                <a:spcPct val="110000"/>
+              </a:lnSpc>
+            </a:pPr>
+            <a:r>
+              <a:rPr sz="2000" b="1">
+                <a:solidFill>
+                  <a:srgbClr val="1428A0"/>
+                </a:solidFill>
+                <a:latin typeface="Arial"/>
+                <a:ea typeface="Arial"/>
+              </a:rPr>
+              <a:t>고객 안에서 실제 요구를 찾고, 수요를 함께 만듭니다</a:t>
+            </a:r>
+          </a:p>
+        </p:txBody>
+      </p:sp>
+      <p:sp>
+        <p:nvSpPr>
+          <p:cNvPr id="73" name="Chevron 72"/>
           <p:cNvSpPr/>
           <p:nvPr/>
         </p:nvSpPr>
         <p:spPr>
           <a:xfrm>
-            <a:off x="722376" y="8778240"/>
-            <a:ext cx="16843248" cy="731520"/>
-          </a:xfrm>
-          <a:prstGeom prst="rect">
+            <a:off x="12316968" y="5852160"/>
+            <a:ext cx="146304" cy="457200"/>
+          </a:xfrm>
+          <a:prstGeom prst="chevron">
+            <a:avLst/>
+          </a:prstGeom>
+          <a:solidFill>
+            <a:srgbClr val="AAB8E8"/>
+          </a:solidFill>
+          <a:ln>
+            <a:noFill/>
+          </a:ln>
+          <a:effectLst/>
+        </p:spPr>
+        <p:style>
+          <a:lnRef idx="1">
+            <a:schemeClr val="accent1"/>
+          </a:lnRef>
+          <a:fillRef idx="3">
+            <a:schemeClr val="accent1"/>
+          </a:fillRef>
+          <a:effectRef idx="2">
+            <a:schemeClr val="accent1"/>
+          </a:effectRef>
+          <a:fontRef idx="minor">
+            <a:schemeClr val="lt1"/>
+          </a:fontRef>
+        </p:style>
+        <p:txBody>
+          <a:bodyPr rtlCol="0" anchor="ctr"/>
+          <a:lstStyle/>
+          <a:p>
+            <a:pPr algn="ctr"/>
+          </a:p>
+        </p:txBody>
+      </p:sp>
+      <p:sp>
+        <p:nvSpPr>
+          <p:cNvPr id="74" name="Oval 73"/>
+          <p:cNvSpPr/>
+          <p:nvPr/>
+        </p:nvSpPr>
+        <p:spPr>
+          <a:xfrm>
+            <a:off x="12490704" y="2139696"/>
+            <a:ext cx="438912" cy="438912"/>
+          </a:xfrm>
+          <a:prstGeom prst="ellipse">
             <a:avLst/>
           </a:prstGeom>
           <a:solidFill>
@@ -12157,14 +13092,54 @@
       </p:sp>
       <p:sp>
         <p:nvSpPr>
-          <p:cNvPr id="48" name="TextBox 47"/>
+          <p:cNvPr id="75" name="TextBox 74"/>
           <p:cNvSpPr txBox="1"/>
           <p:nvPr/>
         </p:nvSpPr>
         <p:spPr>
           <a:xfrm>
-            <a:off x="1088136" y="8778240"/>
-            <a:ext cx="1234440" cy="731520"/>
+            <a:off x="12490704" y="2139696"/>
+            <a:ext cx="438912" cy="438912"/>
+          </a:xfrm>
+          <a:prstGeom prst="rect">
+            <a:avLst/>
+          </a:prstGeom>
+          <a:noFill/>
+        </p:spPr>
+        <p:txBody>
+          <a:bodyPr wrap="square" anchor="ctr" lIns="0" rIns="0" tIns="0" bIns="0">
+            <a:spAutoFit/>
+          </a:bodyPr>
+          <a:lstStyle/>
+          <a:p>
+            <a:pPr algn="ctr">
+              <a:lnSpc>
+                <a:spcPct val="110000"/>
+              </a:lnSpc>
+            </a:pPr>
+            <a:r>
+              <a:rPr sz="2000" b="1">
+                <a:solidFill>
+                  <a:srgbClr val="FFFFFF"/>
+                </a:solidFill>
+                <a:latin typeface="Arial"/>
+                <a:ea typeface="Arial"/>
+              </a:rPr>
+              <a:t>3</a:t>
+            </a:r>
+          </a:p>
+        </p:txBody>
+      </p:sp>
+      <p:sp>
+        <p:nvSpPr>
+          <p:cNvPr id="76" name="TextBox 75"/>
+          <p:cNvSpPr txBox="1"/>
+          <p:nvPr/>
+        </p:nvSpPr>
+        <p:spPr>
+          <a:xfrm>
+            <a:off x="13075920" y="2103120"/>
+            <a:ext cx="4489704" cy="512063"/>
           </a:xfrm>
           <a:prstGeom prst="rect">
             <a:avLst/>
@@ -12183,28 +13158,28 @@
               </a:lnSpc>
             </a:pPr>
             <a:r>
-              <a:rPr sz="2000" b="0">
-                <a:solidFill>
-                  <a:srgbClr val="AAB8E8"/>
-                </a:solidFill>
-                <a:latin typeface="Arial"/>
-                <a:ea typeface="Arial"/>
-              </a:rPr>
-              <a:t>90일</a:t>
-            </a:r>
-          </a:p>
-        </p:txBody>
-      </p:sp>
-      <p:sp>
-        <p:nvSpPr>
-          <p:cNvPr id="49" name="TextBox 48"/>
+              <a:rPr sz="2400" b="1">
+                <a:solidFill>
+                  <a:srgbClr val="1A1A1A"/>
+                </a:solidFill>
+                <a:latin typeface="Arial"/>
+                <a:ea typeface="Arial"/>
+              </a:rPr>
+              <a:t>역량: 고객처럼 운영하는 눈</a:t>
+            </a:r>
+          </a:p>
+        </p:txBody>
+      </p:sp>
+      <p:sp>
+        <p:nvSpPr>
+          <p:cNvPr id="77" name="TextBox 76"/>
           <p:cNvSpPr txBox="1"/>
           <p:nvPr/>
         </p:nvSpPr>
         <p:spPr>
           <a:xfrm>
-            <a:off x="2322576" y="8778240"/>
-            <a:ext cx="15060168" cy="731520"/>
+            <a:off x="12490704" y="2706624"/>
+            <a:ext cx="5074920" cy="347472"/>
           </a:xfrm>
           <a:prstGeom prst="rect">
             <a:avLst/>
@@ -12223,28 +13198,984 @@
               </a:lnSpc>
             </a:pPr>
             <a:r>
-              <a:rPr sz="2400" b="1">
+              <a:rPr sz="1600" b="0">
+                <a:solidFill>
+                  <a:srgbClr val="555555"/>
+                </a:solidFill>
+                <a:latin typeface="Arial"/>
+                <a:ea typeface="Arial"/>
+              </a:rPr>
+              <a:t>고객의 지표  </a:t>
+            </a:r>
+            <a:r>
+              <a:rPr sz="1800" b="1">
+                <a:solidFill>
+                  <a:srgbClr val="1A1A1A"/>
+                </a:solidFill>
+                <a:latin typeface="Arial"/>
+                <a:ea typeface="Arial"/>
+              </a:rPr>
+              <a:t>토큰당 비용 · 전력 · GPU 가동률</a:t>
+            </a:r>
+          </a:p>
+        </p:txBody>
+      </p:sp>
+      <p:sp>
+        <p:nvSpPr>
+          <p:cNvPr id="78" name="TextBox 77"/>
+          <p:cNvSpPr txBox="1"/>
+          <p:nvPr/>
+        </p:nvSpPr>
+        <p:spPr>
+          <a:xfrm>
+            <a:off x="14365224" y="3273552"/>
+            <a:ext cx="1463040" cy="329184"/>
+          </a:xfrm>
+          <a:prstGeom prst="rect">
+            <a:avLst/>
+          </a:prstGeom>
+          <a:noFill/>
+        </p:spPr>
+        <p:txBody>
+          <a:bodyPr wrap="square" anchor="t" lIns="0" rIns="0" tIns="0" bIns="0">
+            <a:spAutoFit/>
+          </a:bodyPr>
+          <a:lstStyle/>
+          <a:p>
+            <a:pPr algn="ctr">
+              <a:lnSpc>
+                <a:spcPct val="110000"/>
+              </a:lnSpc>
+            </a:pPr>
+            <a:r>
+              <a:rPr sz="1800" b="1">
+                <a:solidFill>
+                  <a:srgbClr val="8A8A8A"/>
+                </a:solidFill>
+                <a:latin typeface="Arial"/>
+                <a:ea typeface="Arial"/>
+              </a:rPr>
+              <a:t>지금</a:t>
+            </a:r>
+          </a:p>
+        </p:txBody>
+      </p:sp>
+      <p:sp>
+        <p:nvSpPr>
+          <p:cNvPr id="79" name="TextBox 78"/>
+          <p:cNvSpPr txBox="1"/>
+          <p:nvPr/>
+        </p:nvSpPr>
+        <p:spPr>
+          <a:xfrm>
+            <a:off x="15919704" y="3273552"/>
+            <a:ext cx="1463040" cy="329184"/>
+          </a:xfrm>
+          <a:prstGeom prst="rect">
+            <a:avLst/>
+          </a:prstGeom>
+          <a:noFill/>
+        </p:spPr>
+        <p:txBody>
+          <a:bodyPr wrap="square" anchor="t" lIns="0" rIns="0" tIns="0" bIns="0">
+            <a:spAutoFit/>
+          </a:bodyPr>
+          <a:lstStyle/>
+          <a:p>
+            <a:pPr algn="ctr">
+              <a:lnSpc>
+                <a:spcPct val="110000"/>
+              </a:lnSpc>
+            </a:pPr>
+            <a:r>
+              <a:rPr sz="1800" b="1">
+                <a:solidFill>
+                  <a:srgbClr val="1428A0"/>
+                </a:solidFill>
+                <a:latin typeface="Arial"/>
+                <a:ea typeface="Arial"/>
+              </a:rPr>
+              <a:t>필요</a:t>
+            </a:r>
+          </a:p>
+        </p:txBody>
+      </p:sp>
+      <p:sp>
+        <p:nvSpPr>
+          <p:cNvPr id="80" name="TextBox 79"/>
+          <p:cNvSpPr txBox="1"/>
+          <p:nvPr/>
+        </p:nvSpPr>
+        <p:spPr>
+          <a:xfrm>
+            <a:off x="12490704" y="3694176"/>
+            <a:ext cx="1783079" cy="548640"/>
+          </a:xfrm>
+          <a:prstGeom prst="rect">
+            <a:avLst/>
+          </a:prstGeom>
+          <a:noFill/>
+        </p:spPr>
+        <p:txBody>
+          <a:bodyPr wrap="square" anchor="ctr" lIns="0" rIns="0" tIns="0" bIns="0">
+            <a:spAutoFit/>
+          </a:bodyPr>
+          <a:lstStyle/>
+          <a:p>
+            <a:pPr algn="l">
+              <a:lnSpc>
+                <a:spcPct val="110000"/>
+              </a:lnSpc>
+            </a:pPr>
+            <a:r>
+              <a:rPr sz="1800" b="1">
+                <a:solidFill>
+                  <a:srgbClr val="1428A0"/>
+                </a:solidFill>
+                <a:latin typeface="Arial"/>
+                <a:ea typeface="Arial"/>
+              </a:rPr>
+              <a:t>AI DC 운영</a:t>
+            </a:r>
+          </a:p>
+        </p:txBody>
+      </p:sp>
+      <p:sp>
+        <p:nvSpPr>
+          <p:cNvPr id="81" name="Rounded Rectangle 80"/>
+          <p:cNvSpPr/>
+          <p:nvPr/>
+        </p:nvSpPr>
+        <p:spPr>
+          <a:xfrm>
+            <a:off x="14365224" y="3694176"/>
+            <a:ext cx="1463040" cy="548640"/>
+          </a:xfrm>
+          <a:prstGeom prst="roundRect">
+            <a:avLst>
+              <a:gd name="adj" fmla="val 13333"/>
+            </a:avLst>
+          </a:prstGeom>
+          <a:solidFill>
+            <a:srgbClr val="FFFFFF"/>
+          </a:solidFill>
+          <a:ln w="12700">
+            <a:solidFill>
+              <a:srgbClr val="8A8A8A"/>
+            </a:solidFill>
+            <a:prstDash val="dash"/>
+          </a:ln>
+          <a:effectLst/>
+        </p:spPr>
+        <p:style>
+          <a:lnRef idx="1">
+            <a:schemeClr val="accent1"/>
+          </a:lnRef>
+          <a:fillRef idx="3">
+            <a:schemeClr val="accent1"/>
+          </a:fillRef>
+          <a:effectRef idx="2">
+            <a:schemeClr val="accent1"/>
+          </a:effectRef>
+          <a:fontRef idx="minor">
+            <a:schemeClr val="lt1"/>
+          </a:fontRef>
+        </p:style>
+        <p:txBody>
+          <a:bodyPr rtlCol="0" anchor="ctr"/>
+          <a:lstStyle/>
+          <a:p>
+            <a:pPr algn="ctr"/>
+          </a:p>
+        </p:txBody>
+      </p:sp>
+      <p:sp>
+        <p:nvSpPr>
+          <p:cNvPr id="82" name="TextBox 81"/>
+          <p:cNvSpPr txBox="1"/>
+          <p:nvPr/>
+        </p:nvSpPr>
+        <p:spPr>
+          <a:xfrm>
+            <a:off x="14420088" y="3694176"/>
+            <a:ext cx="1353312" cy="548640"/>
+          </a:xfrm>
+          <a:prstGeom prst="rect">
+            <a:avLst/>
+          </a:prstGeom>
+          <a:noFill/>
+        </p:spPr>
+        <p:txBody>
+          <a:bodyPr wrap="square" anchor="ctr" lIns="0" rIns="0" tIns="0" bIns="0">
+            <a:spAutoFit/>
+          </a:bodyPr>
+          <a:lstStyle/>
+          <a:p>
+            <a:pPr algn="ctr">
+              <a:lnSpc>
+                <a:spcPct val="110000"/>
+              </a:lnSpc>
+            </a:pPr>
+            <a:r>
+              <a:rPr sz="1800" b="0">
+                <a:solidFill>
+                  <a:srgbClr val="555555"/>
+                </a:solidFill>
+                <a:latin typeface="Arial"/>
+                <a:ea typeface="Arial"/>
+              </a:rPr>
+              <a:t/>
+            </a:r>
+          </a:p>
+        </p:txBody>
+      </p:sp>
+      <p:sp>
+        <p:nvSpPr>
+          <p:cNvPr id="83" name="Rounded Rectangle 82"/>
+          <p:cNvSpPr/>
+          <p:nvPr/>
+        </p:nvSpPr>
+        <p:spPr>
+          <a:xfrm>
+            <a:off x="15919704" y="3694176"/>
+            <a:ext cx="1463040" cy="548640"/>
+          </a:xfrm>
+          <a:prstGeom prst="roundRect">
+            <a:avLst>
+              <a:gd name="adj" fmla="val 13333"/>
+            </a:avLst>
+          </a:prstGeom>
+          <a:solidFill>
+            <a:srgbClr val="1428A0"/>
+          </a:solidFill>
+          <a:ln>
+            <a:noFill/>
+          </a:ln>
+          <a:effectLst/>
+        </p:spPr>
+        <p:style>
+          <a:lnRef idx="1">
+            <a:schemeClr val="accent1"/>
+          </a:lnRef>
+          <a:fillRef idx="3">
+            <a:schemeClr val="accent1"/>
+          </a:fillRef>
+          <a:effectRef idx="2">
+            <a:schemeClr val="accent1"/>
+          </a:effectRef>
+          <a:fontRef idx="minor">
+            <a:schemeClr val="lt1"/>
+          </a:fontRef>
+        </p:style>
+        <p:txBody>
+          <a:bodyPr rtlCol="0" anchor="ctr"/>
+          <a:lstStyle/>
+          <a:p>
+            <a:pPr algn="ctr"/>
+          </a:p>
+        </p:txBody>
+      </p:sp>
+      <p:sp>
+        <p:nvSpPr>
+          <p:cNvPr id="84" name="TextBox 83"/>
+          <p:cNvSpPr txBox="1"/>
+          <p:nvPr/>
+        </p:nvSpPr>
+        <p:spPr>
+          <a:xfrm>
+            <a:off x="12490704" y="4334256"/>
+            <a:ext cx="1783079" cy="548640"/>
+          </a:xfrm>
+          <a:prstGeom prst="rect">
+            <a:avLst/>
+          </a:prstGeom>
+          <a:noFill/>
+        </p:spPr>
+        <p:txBody>
+          <a:bodyPr wrap="square" anchor="ctr" lIns="0" rIns="0" tIns="0" bIns="0">
+            <a:spAutoFit/>
+          </a:bodyPr>
+          <a:lstStyle/>
+          <a:p>
+            <a:pPr algn="l">
+              <a:lnSpc>
+                <a:spcPct val="110000"/>
+              </a:lnSpc>
+            </a:pPr>
+            <a:r>
+              <a:rPr sz="1800" b="1">
+                <a:solidFill>
+                  <a:srgbClr val="1428A0"/>
+                </a:solidFill>
+                <a:latin typeface="Arial"/>
+                <a:ea typeface="Arial"/>
+              </a:rPr>
+              <a:t>KV 캐시 SW</a:t>
+            </a:r>
+          </a:p>
+        </p:txBody>
+      </p:sp>
+      <p:sp>
+        <p:nvSpPr>
+          <p:cNvPr id="85" name="Rounded Rectangle 84"/>
+          <p:cNvSpPr/>
+          <p:nvPr/>
+        </p:nvSpPr>
+        <p:spPr>
+          <a:xfrm>
+            <a:off x="14365224" y="4334256"/>
+            <a:ext cx="1463040" cy="548640"/>
+          </a:xfrm>
+          <a:prstGeom prst="roundRect">
+            <a:avLst>
+              <a:gd name="adj" fmla="val 13333"/>
+            </a:avLst>
+          </a:prstGeom>
+          <a:solidFill>
+            <a:srgbClr val="FFFFFF"/>
+          </a:solidFill>
+          <a:ln w="12700">
+            <a:solidFill>
+              <a:srgbClr val="8A8A8A"/>
+            </a:solidFill>
+            <a:prstDash val="dash"/>
+          </a:ln>
+          <a:effectLst/>
+        </p:spPr>
+        <p:style>
+          <a:lnRef idx="1">
+            <a:schemeClr val="accent1"/>
+          </a:lnRef>
+          <a:fillRef idx="3">
+            <a:schemeClr val="accent1"/>
+          </a:fillRef>
+          <a:effectRef idx="2">
+            <a:schemeClr val="accent1"/>
+          </a:effectRef>
+          <a:fontRef idx="minor">
+            <a:schemeClr val="lt1"/>
+          </a:fontRef>
+        </p:style>
+        <p:txBody>
+          <a:bodyPr rtlCol="0" anchor="ctr"/>
+          <a:lstStyle/>
+          <a:p>
+            <a:pPr algn="ctr"/>
+          </a:p>
+        </p:txBody>
+      </p:sp>
+      <p:sp>
+        <p:nvSpPr>
+          <p:cNvPr id="86" name="TextBox 85"/>
+          <p:cNvSpPr txBox="1"/>
+          <p:nvPr/>
+        </p:nvSpPr>
+        <p:spPr>
+          <a:xfrm>
+            <a:off x="14420088" y="4334256"/>
+            <a:ext cx="1353312" cy="548640"/>
+          </a:xfrm>
+          <a:prstGeom prst="rect">
+            <a:avLst/>
+          </a:prstGeom>
+          <a:noFill/>
+        </p:spPr>
+        <p:txBody>
+          <a:bodyPr wrap="square" anchor="ctr" lIns="0" rIns="0" tIns="0" bIns="0">
+            <a:spAutoFit/>
+          </a:bodyPr>
+          <a:lstStyle/>
+          <a:p>
+            <a:pPr algn="ctr">
+              <a:lnSpc>
+                <a:spcPct val="110000"/>
+              </a:lnSpc>
+            </a:pPr>
+            <a:r>
+              <a:rPr sz="1800" b="1">
+                <a:solidFill>
+                  <a:srgbClr val="555555"/>
+                </a:solidFill>
+                <a:latin typeface="Arial"/>
+                <a:ea typeface="Arial"/>
+              </a:rPr>
+              <a:t>기여 0</a:t>
+            </a:r>
+          </a:p>
+        </p:txBody>
+      </p:sp>
+      <p:sp>
+        <p:nvSpPr>
+          <p:cNvPr id="87" name="Rounded Rectangle 86"/>
+          <p:cNvSpPr/>
+          <p:nvPr/>
+        </p:nvSpPr>
+        <p:spPr>
+          <a:xfrm>
+            <a:off x="15919704" y="4334256"/>
+            <a:ext cx="1463040" cy="548640"/>
+          </a:xfrm>
+          <a:prstGeom prst="roundRect">
+            <a:avLst>
+              <a:gd name="adj" fmla="val 13333"/>
+            </a:avLst>
+          </a:prstGeom>
+          <a:solidFill>
+            <a:srgbClr val="1428A0"/>
+          </a:solidFill>
+          <a:ln>
+            <a:noFill/>
+          </a:ln>
+          <a:effectLst/>
+        </p:spPr>
+        <p:style>
+          <a:lnRef idx="1">
+            <a:schemeClr val="accent1"/>
+          </a:lnRef>
+          <a:fillRef idx="3">
+            <a:schemeClr val="accent1"/>
+          </a:fillRef>
+          <a:effectRef idx="2">
+            <a:schemeClr val="accent1"/>
+          </a:effectRef>
+          <a:fontRef idx="minor">
+            <a:schemeClr val="lt1"/>
+          </a:fontRef>
+        </p:style>
+        <p:txBody>
+          <a:bodyPr rtlCol="0" anchor="ctr"/>
+          <a:lstStyle/>
+          <a:p>
+            <a:pPr algn="ctr"/>
+          </a:p>
+        </p:txBody>
+      </p:sp>
+      <p:sp>
+        <p:nvSpPr>
+          <p:cNvPr id="88" name="TextBox 87"/>
+          <p:cNvSpPr txBox="1"/>
+          <p:nvPr/>
+        </p:nvSpPr>
+        <p:spPr>
+          <a:xfrm>
+            <a:off x="12490704" y="4974336"/>
+            <a:ext cx="1783079" cy="548640"/>
+          </a:xfrm>
+          <a:prstGeom prst="rect">
+            <a:avLst/>
+          </a:prstGeom>
+          <a:noFill/>
+        </p:spPr>
+        <p:txBody>
+          <a:bodyPr wrap="square" anchor="ctr" lIns="0" rIns="0" tIns="0" bIns="0">
+            <a:spAutoFit/>
+          </a:bodyPr>
+          <a:lstStyle/>
+          <a:p>
+            <a:pPr algn="l">
+              <a:lnSpc>
+                <a:spcPct val="110000"/>
+              </a:lnSpc>
+            </a:pPr>
+            <a:r>
+              <a:rPr sz="1800" b="1">
+                <a:solidFill>
+                  <a:srgbClr val="555555"/>
+                </a:solidFill>
+                <a:latin typeface="Arial"/>
+                <a:ea typeface="Arial"/>
+              </a:rPr>
+              <a:t>커널 · I/O</a:t>
+            </a:r>
+          </a:p>
+        </p:txBody>
+      </p:sp>
+      <p:sp>
+        <p:nvSpPr>
+          <p:cNvPr id="89" name="Rounded Rectangle 88"/>
+          <p:cNvSpPr/>
+          <p:nvPr/>
+        </p:nvSpPr>
+        <p:spPr>
+          <a:xfrm>
+            <a:off x="14365224" y="4974336"/>
+            <a:ext cx="1463040" cy="548640"/>
+          </a:xfrm>
+          <a:prstGeom prst="roundRect">
+            <a:avLst>
+              <a:gd name="adj" fmla="val 13333"/>
+            </a:avLst>
+          </a:prstGeom>
+          <a:solidFill>
+            <a:srgbClr val="F5F5F5"/>
+          </a:solidFill>
+          <a:ln>
+            <a:noFill/>
+          </a:ln>
+          <a:effectLst/>
+        </p:spPr>
+        <p:style>
+          <a:lnRef idx="1">
+            <a:schemeClr val="accent1"/>
+          </a:lnRef>
+          <a:fillRef idx="3">
+            <a:schemeClr val="accent1"/>
+          </a:fillRef>
+          <a:effectRef idx="2">
+            <a:schemeClr val="accent1"/>
+          </a:effectRef>
+          <a:fontRef idx="minor">
+            <a:schemeClr val="lt1"/>
+          </a:fontRef>
+        </p:style>
+        <p:txBody>
+          <a:bodyPr rtlCol="0" anchor="ctr"/>
+          <a:lstStyle/>
+          <a:p>
+            <a:pPr algn="ctr"/>
+          </a:p>
+        </p:txBody>
+      </p:sp>
+      <p:sp>
+        <p:nvSpPr>
+          <p:cNvPr id="90" name="TextBox 89"/>
+          <p:cNvSpPr txBox="1"/>
+          <p:nvPr/>
+        </p:nvSpPr>
+        <p:spPr>
+          <a:xfrm>
+            <a:off x="14420088" y="4974336"/>
+            <a:ext cx="1353312" cy="548640"/>
+          </a:xfrm>
+          <a:prstGeom prst="rect">
+            <a:avLst/>
+          </a:prstGeom>
+          <a:noFill/>
+        </p:spPr>
+        <p:txBody>
+          <a:bodyPr wrap="square" anchor="ctr" lIns="0" rIns="0" tIns="0" bIns="0">
+            <a:spAutoFit/>
+          </a:bodyPr>
+          <a:lstStyle/>
+          <a:p>
+            <a:pPr algn="ctr">
+              <a:lnSpc>
+                <a:spcPct val="110000"/>
+              </a:lnSpc>
+            </a:pPr>
+            <a:r>
+              <a:rPr sz="1800" b="1">
+                <a:solidFill>
+                  <a:srgbClr val="555555"/>
+                </a:solidFill>
+                <a:latin typeface="Arial"/>
+                <a:ea typeface="Arial"/>
+              </a:rPr>
+              <a:t>일부</a:t>
+            </a:r>
+          </a:p>
+        </p:txBody>
+      </p:sp>
+      <p:sp>
+        <p:nvSpPr>
+          <p:cNvPr id="91" name="Rounded Rectangle 90"/>
+          <p:cNvSpPr/>
+          <p:nvPr/>
+        </p:nvSpPr>
+        <p:spPr>
+          <a:xfrm>
+            <a:off x="15919704" y="4974336"/>
+            <a:ext cx="1463040" cy="548640"/>
+          </a:xfrm>
+          <a:prstGeom prst="roundRect">
+            <a:avLst>
+              <a:gd name="adj" fmla="val 13333"/>
+            </a:avLst>
+          </a:prstGeom>
+          <a:solidFill>
+            <a:srgbClr val="3C5AC8"/>
+          </a:solidFill>
+          <a:ln>
+            <a:noFill/>
+          </a:ln>
+          <a:effectLst/>
+        </p:spPr>
+        <p:style>
+          <a:lnRef idx="1">
+            <a:schemeClr val="accent1"/>
+          </a:lnRef>
+          <a:fillRef idx="3">
+            <a:schemeClr val="accent1"/>
+          </a:fillRef>
+          <a:effectRef idx="2">
+            <a:schemeClr val="accent1"/>
+          </a:effectRef>
+          <a:fontRef idx="minor">
+            <a:schemeClr val="lt1"/>
+          </a:fontRef>
+        </p:style>
+        <p:txBody>
+          <a:bodyPr rtlCol="0" anchor="ctr"/>
+          <a:lstStyle/>
+          <a:p>
+            <a:pPr algn="ctr"/>
+          </a:p>
+        </p:txBody>
+      </p:sp>
+      <p:sp>
+        <p:nvSpPr>
+          <p:cNvPr id="92" name="TextBox 91"/>
+          <p:cNvSpPr txBox="1"/>
+          <p:nvPr/>
+        </p:nvSpPr>
+        <p:spPr>
+          <a:xfrm>
+            <a:off x="12490704" y="5614416"/>
+            <a:ext cx="1783079" cy="548640"/>
+          </a:xfrm>
+          <a:prstGeom prst="rect">
+            <a:avLst/>
+          </a:prstGeom>
+          <a:noFill/>
+        </p:spPr>
+        <p:txBody>
+          <a:bodyPr wrap="square" anchor="ctr" lIns="0" rIns="0" tIns="0" bIns="0">
+            <a:spAutoFit/>
+          </a:bodyPr>
+          <a:lstStyle/>
+          <a:p>
+            <a:pPr algn="l">
+              <a:lnSpc>
+                <a:spcPct val="110000"/>
+              </a:lnSpc>
+            </a:pPr>
+            <a:r>
+              <a:rPr sz="1800" b="1">
+                <a:solidFill>
+                  <a:srgbClr val="555555"/>
+                </a:solidFill>
+                <a:latin typeface="Arial"/>
+                <a:ea typeface="Arial"/>
+              </a:rPr>
+              <a:t>SSD FW</a:t>
+            </a:r>
+          </a:p>
+        </p:txBody>
+      </p:sp>
+      <p:sp>
+        <p:nvSpPr>
+          <p:cNvPr id="93" name="Rounded Rectangle 92"/>
+          <p:cNvSpPr/>
+          <p:nvPr/>
+        </p:nvSpPr>
+        <p:spPr>
+          <a:xfrm>
+            <a:off x="14365224" y="5614416"/>
+            <a:ext cx="1463040" cy="548640"/>
+          </a:xfrm>
+          <a:prstGeom prst="roundRect">
+            <a:avLst>
+              <a:gd name="adj" fmla="val 13333"/>
+            </a:avLst>
+          </a:prstGeom>
+          <a:solidFill>
+            <a:srgbClr val="8A8A8A"/>
+          </a:solidFill>
+          <a:ln>
+            <a:noFill/>
+          </a:ln>
+          <a:effectLst/>
+        </p:spPr>
+        <p:style>
+          <a:lnRef idx="1">
+            <a:schemeClr val="accent1"/>
+          </a:lnRef>
+          <a:fillRef idx="3">
+            <a:schemeClr val="accent1"/>
+          </a:fillRef>
+          <a:effectRef idx="2">
+            <a:schemeClr val="accent1"/>
+          </a:effectRef>
+          <a:fontRef idx="minor">
+            <a:schemeClr val="lt1"/>
+          </a:fontRef>
+        </p:style>
+        <p:txBody>
+          <a:bodyPr rtlCol="0" anchor="ctr"/>
+          <a:lstStyle/>
+          <a:p>
+            <a:pPr algn="ctr"/>
+          </a:p>
+        </p:txBody>
+      </p:sp>
+      <p:sp>
+        <p:nvSpPr>
+          <p:cNvPr id="94" name="TextBox 93"/>
+          <p:cNvSpPr txBox="1"/>
+          <p:nvPr/>
+        </p:nvSpPr>
+        <p:spPr>
+          <a:xfrm>
+            <a:off x="14420088" y="5614416"/>
+            <a:ext cx="1353312" cy="548640"/>
+          </a:xfrm>
+          <a:prstGeom prst="rect">
+            <a:avLst/>
+          </a:prstGeom>
+          <a:noFill/>
+        </p:spPr>
+        <p:txBody>
+          <a:bodyPr wrap="square" anchor="ctr" lIns="0" rIns="0" tIns="0" bIns="0">
+            <a:spAutoFit/>
+          </a:bodyPr>
+          <a:lstStyle/>
+          <a:p>
+            <a:pPr algn="ctr">
+              <a:lnSpc>
+                <a:spcPct val="110000"/>
+              </a:lnSpc>
+            </a:pPr>
+            <a:r>
+              <a:rPr sz="1800" b="1">
                 <a:solidFill>
                   <a:srgbClr val="FFFFFF"/>
                 </a:solidFill>
                 <a:latin typeface="Arial"/>
                 <a:ea typeface="Arial"/>
               </a:rPr>
-              <a:t>KV-ready SSD 정의 · 등대 고객 1~2사 선정 · Co-Design Pod 구성으로 시작합니다</a:t>
-            </a:r>
-          </a:p>
-        </p:txBody>
-      </p:sp>
-      <p:sp>
-        <p:nvSpPr>
-          <p:cNvPr id="50" name="TextBox 49"/>
+              <a:t>강점</a:t>
+            </a:r>
+          </a:p>
+        </p:txBody>
+      </p:sp>
+      <p:sp>
+        <p:nvSpPr>
+          <p:cNvPr id="95" name="Rounded Rectangle 94"/>
+          <p:cNvSpPr/>
+          <p:nvPr/>
+        </p:nvSpPr>
+        <p:spPr>
+          <a:xfrm>
+            <a:off x="15919704" y="5614416"/>
+            <a:ext cx="1463040" cy="548640"/>
+          </a:xfrm>
+          <a:prstGeom prst="roundRect">
+            <a:avLst>
+              <a:gd name="adj" fmla="val 13333"/>
+            </a:avLst>
+          </a:prstGeom>
+          <a:solidFill>
+            <a:srgbClr val="3C5AC8"/>
+          </a:solidFill>
+          <a:ln>
+            <a:noFill/>
+          </a:ln>
+          <a:effectLst/>
+        </p:spPr>
+        <p:style>
+          <a:lnRef idx="1">
+            <a:schemeClr val="accent1"/>
+          </a:lnRef>
+          <a:fillRef idx="3">
+            <a:schemeClr val="accent1"/>
+          </a:fillRef>
+          <a:effectRef idx="2">
+            <a:schemeClr val="accent1"/>
+          </a:effectRef>
+          <a:fontRef idx="minor">
+            <a:schemeClr val="lt1"/>
+          </a:fontRef>
+        </p:style>
+        <p:txBody>
+          <a:bodyPr rtlCol="0" anchor="ctr"/>
+          <a:lstStyle/>
+          <a:p>
+            <a:pPr algn="ctr"/>
+          </a:p>
+        </p:txBody>
+      </p:sp>
+      <p:sp>
+        <p:nvSpPr>
+          <p:cNvPr id="96" name="TextBox 95"/>
           <p:cNvSpPr txBox="1"/>
           <p:nvPr/>
         </p:nvSpPr>
         <p:spPr>
           <a:xfrm>
-            <a:off x="722376" y="9601200"/>
-            <a:ext cx="15453359" cy="566928"/>
+            <a:off x="12490704" y="6254496"/>
+            <a:ext cx="1783079" cy="548640"/>
+          </a:xfrm>
+          <a:prstGeom prst="rect">
+            <a:avLst/>
+          </a:prstGeom>
+          <a:noFill/>
+        </p:spPr>
+        <p:txBody>
+          <a:bodyPr wrap="square" anchor="ctr" lIns="0" rIns="0" tIns="0" bIns="0">
+            <a:spAutoFit/>
+          </a:bodyPr>
+          <a:lstStyle/>
+          <a:p>
+            <a:pPr algn="l">
+              <a:lnSpc>
+                <a:spcPct val="110000"/>
+              </a:lnSpc>
+            </a:pPr>
+            <a:r>
+              <a:rPr sz="1800" b="1">
+                <a:solidFill>
+                  <a:srgbClr val="555555"/>
+                </a:solidFill>
+                <a:latin typeface="Arial"/>
+                <a:ea typeface="Arial"/>
+              </a:rPr>
+              <a:t>NAND</a:t>
+            </a:r>
+          </a:p>
+        </p:txBody>
+      </p:sp>
+      <p:sp>
+        <p:nvSpPr>
+          <p:cNvPr id="97" name="Rounded Rectangle 96"/>
+          <p:cNvSpPr/>
+          <p:nvPr/>
+        </p:nvSpPr>
+        <p:spPr>
+          <a:xfrm>
+            <a:off x="14365224" y="6254496"/>
+            <a:ext cx="1463040" cy="548640"/>
+          </a:xfrm>
+          <a:prstGeom prst="roundRect">
+            <a:avLst>
+              <a:gd name="adj" fmla="val 13333"/>
+            </a:avLst>
+          </a:prstGeom>
+          <a:solidFill>
+            <a:srgbClr val="8A8A8A"/>
+          </a:solidFill>
+          <a:ln>
+            <a:noFill/>
+          </a:ln>
+          <a:effectLst/>
+        </p:spPr>
+        <p:style>
+          <a:lnRef idx="1">
+            <a:schemeClr val="accent1"/>
+          </a:lnRef>
+          <a:fillRef idx="3">
+            <a:schemeClr val="accent1"/>
+          </a:fillRef>
+          <a:effectRef idx="2">
+            <a:schemeClr val="accent1"/>
+          </a:effectRef>
+          <a:fontRef idx="minor">
+            <a:schemeClr val="lt1"/>
+          </a:fontRef>
+        </p:style>
+        <p:txBody>
+          <a:bodyPr rtlCol="0" anchor="ctr"/>
+          <a:lstStyle/>
+          <a:p>
+            <a:pPr algn="ctr"/>
+          </a:p>
+        </p:txBody>
+      </p:sp>
+      <p:sp>
+        <p:nvSpPr>
+          <p:cNvPr id="98" name="TextBox 97"/>
+          <p:cNvSpPr txBox="1"/>
+          <p:nvPr/>
+        </p:nvSpPr>
+        <p:spPr>
+          <a:xfrm>
+            <a:off x="14420088" y="6254496"/>
+            <a:ext cx="1353312" cy="548640"/>
+          </a:xfrm>
+          <a:prstGeom prst="rect">
+            <a:avLst/>
+          </a:prstGeom>
+          <a:noFill/>
+        </p:spPr>
+        <p:txBody>
+          <a:bodyPr wrap="square" anchor="ctr" lIns="0" rIns="0" tIns="0" bIns="0">
+            <a:spAutoFit/>
+          </a:bodyPr>
+          <a:lstStyle/>
+          <a:p>
+            <a:pPr algn="ctr">
+              <a:lnSpc>
+                <a:spcPct val="110000"/>
+              </a:lnSpc>
+            </a:pPr>
+            <a:r>
+              <a:rPr sz="1800" b="1">
+                <a:solidFill>
+                  <a:srgbClr val="FFFFFF"/>
+                </a:solidFill>
+                <a:latin typeface="Arial"/>
+                <a:ea typeface="Arial"/>
+              </a:rPr>
+              <a:t>강점</a:t>
+            </a:r>
+          </a:p>
+        </p:txBody>
+      </p:sp>
+      <p:sp>
+        <p:nvSpPr>
+          <p:cNvPr id="99" name="Rounded Rectangle 98"/>
+          <p:cNvSpPr/>
+          <p:nvPr/>
+        </p:nvSpPr>
+        <p:spPr>
+          <a:xfrm>
+            <a:off x="15919704" y="6254496"/>
+            <a:ext cx="1463040" cy="548640"/>
+          </a:xfrm>
+          <a:prstGeom prst="roundRect">
+            <a:avLst>
+              <a:gd name="adj" fmla="val 13333"/>
+            </a:avLst>
+          </a:prstGeom>
+          <a:solidFill>
+            <a:srgbClr val="3C5AC8"/>
+          </a:solidFill>
+          <a:ln>
+            <a:noFill/>
+          </a:ln>
+          <a:effectLst/>
+        </p:spPr>
+        <p:style>
+          <a:lnRef idx="1">
+            <a:schemeClr val="accent1"/>
+          </a:lnRef>
+          <a:fillRef idx="3">
+            <a:schemeClr val="accent1"/>
+          </a:fillRef>
+          <a:effectRef idx="2">
+            <a:schemeClr val="accent1"/>
+          </a:effectRef>
+          <a:fontRef idx="minor">
+            <a:schemeClr val="lt1"/>
+          </a:fontRef>
+        </p:style>
+        <p:txBody>
+          <a:bodyPr rtlCol="0" anchor="ctr"/>
+          <a:lstStyle/>
+          <a:p>
+            <a:pPr algn="ctr"/>
+          </a:p>
+        </p:txBody>
+      </p:sp>
+      <p:sp>
+        <p:nvSpPr>
+          <p:cNvPr id="100" name="TextBox 99"/>
+          <p:cNvSpPr txBox="1"/>
+          <p:nvPr/>
+        </p:nvSpPr>
+        <p:spPr>
+          <a:xfrm>
+            <a:off x="12490704" y="6986016"/>
+            <a:ext cx="5074920" cy="1005840"/>
           </a:xfrm>
           <a:prstGeom prst="rect">
             <a:avLst/>
@@ -12263,6 +14194,237 @@
               </a:lnSpc>
             </a:pPr>
             <a:r>
+              <a:rPr sz="1800" b="0">
+                <a:solidFill>
+                  <a:srgbClr val="555555"/>
+                </a:solidFill>
+                <a:latin typeface="Arial"/>
+                <a:ea typeface="Arial"/>
+              </a:rPr>
+              <a:t>KV 캐시 관리자 4종에 </a:t>
+            </a:r>
+            <a:r>
+              <a:rPr sz="1800" b="1">
+                <a:solidFill>
+                  <a:srgbClr val="1A1A1A"/>
+                </a:solidFill>
+                <a:latin typeface="Arial"/>
+                <a:ea typeface="Arial"/>
+              </a:rPr>
+              <a:t>삼성 기여 0</a:t>
+            </a:r>
+          </a:p>
+          <a:p>
+            <a:pPr algn="l">
+              <a:lnSpc>
+                <a:spcPct val="105000"/>
+              </a:lnSpc>
+            </a:pPr>
+            <a:r>
+              <a:rPr sz="1800" b="0">
+                <a:solidFill>
+                  <a:srgbClr val="555555"/>
+                </a:solidFill>
+                <a:latin typeface="Arial"/>
+                <a:ea typeface="Arial"/>
+              </a:rPr>
+              <a:t>LMCache · Mooncake · FlexKV · Dynamo</a:t>
+            </a:r>
+          </a:p>
+        </p:txBody>
+      </p:sp>
+      <p:sp>
+        <p:nvSpPr>
+          <p:cNvPr id="101" name="TextBox 100"/>
+          <p:cNvSpPr txBox="1"/>
+          <p:nvPr/>
+        </p:nvSpPr>
+        <p:spPr>
+          <a:xfrm>
+            <a:off x="12490704" y="8101583"/>
+            <a:ext cx="5074920" cy="457200"/>
+          </a:xfrm>
+          <a:prstGeom prst="rect">
+            <a:avLst/>
+          </a:prstGeom>
+          <a:noFill/>
+        </p:spPr>
+        <p:txBody>
+          <a:bodyPr wrap="square" anchor="ctr" lIns="0" rIns="0" tIns="0" bIns="0">
+            <a:spAutoFit/>
+          </a:bodyPr>
+          <a:lstStyle/>
+          <a:p>
+            <a:pPr algn="l">
+              <a:lnSpc>
+                <a:spcPct val="110000"/>
+              </a:lnSpc>
+            </a:pPr>
+            <a:r>
+              <a:rPr sz="2000" b="1">
+                <a:solidFill>
+                  <a:srgbClr val="1428A0"/>
+                </a:solidFill>
+                <a:latin typeface="Arial"/>
+                <a:ea typeface="Arial"/>
+              </a:rPr>
+              <a:t>시스템 SW와 AI 데이터센터 운영 역량</a:t>
+            </a:r>
+          </a:p>
+        </p:txBody>
+      </p:sp>
+      <p:sp>
+        <p:nvSpPr>
+          <p:cNvPr id="102" name="Rectangle 101"/>
+          <p:cNvSpPr/>
+          <p:nvPr/>
+        </p:nvSpPr>
+        <p:spPr>
+          <a:xfrm>
+            <a:off x="722376" y="8778240"/>
+            <a:ext cx="16843248" cy="731520"/>
+          </a:xfrm>
+          <a:prstGeom prst="rect">
+            <a:avLst/>
+          </a:prstGeom>
+          <a:solidFill>
+            <a:srgbClr val="1428A0"/>
+          </a:solidFill>
+          <a:ln>
+            <a:noFill/>
+          </a:ln>
+          <a:effectLst/>
+        </p:spPr>
+        <p:style>
+          <a:lnRef idx="1">
+            <a:schemeClr val="accent1"/>
+          </a:lnRef>
+          <a:fillRef idx="3">
+            <a:schemeClr val="accent1"/>
+          </a:fillRef>
+          <a:effectRef idx="2">
+            <a:schemeClr val="accent1"/>
+          </a:effectRef>
+          <a:fontRef idx="minor">
+            <a:schemeClr val="lt1"/>
+          </a:fontRef>
+        </p:style>
+        <p:txBody>
+          <a:bodyPr rtlCol="0" anchor="ctr"/>
+          <a:lstStyle/>
+          <a:p>
+            <a:pPr algn="ctr"/>
+          </a:p>
+        </p:txBody>
+      </p:sp>
+      <p:sp>
+        <p:nvSpPr>
+          <p:cNvPr id="103" name="TextBox 102"/>
+          <p:cNvSpPr txBox="1"/>
+          <p:nvPr/>
+        </p:nvSpPr>
+        <p:spPr>
+          <a:xfrm>
+            <a:off x="1088136" y="8778240"/>
+            <a:ext cx="1234440" cy="731520"/>
+          </a:xfrm>
+          <a:prstGeom prst="rect">
+            <a:avLst/>
+          </a:prstGeom>
+          <a:noFill/>
+        </p:spPr>
+        <p:txBody>
+          <a:bodyPr wrap="square" anchor="ctr" lIns="0" rIns="0" tIns="0" bIns="0">
+            <a:spAutoFit/>
+          </a:bodyPr>
+          <a:lstStyle/>
+          <a:p>
+            <a:pPr algn="l">
+              <a:lnSpc>
+                <a:spcPct val="110000"/>
+              </a:lnSpc>
+            </a:pPr>
+            <a:r>
+              <a:rPr sz="2000" b="0">
+                <a:solidFill>
+                  <a:srgbClr val="AAB8E8"/>
+                </a:solidFill>
+                <a:latin typeface="Arial"/>
+                <a:ea typeface="Arial"/>
+              </a:rPr>
+              <a:t>시작</a:t>
+            </a:r>
+          </a:p>
+        </p:txBody>
+      </p:sp>
+      <p:sp>
+        <p:nvSpPr>
+          <p:cNvPr id="104" name="TextBox 103"/>
+          <p:cNvSpPr txBox="1"/>
+          <p:nvPr/>
+        </p:nvSpPr>
+        <p:spPr>
+          <a:xfrm>
+            <a:off x="2322576" y="8778240"/>
+            <a:ext cx="15060168" cy="731520"/>
+          </a:xfrm>
+          <a:prstGeom prst="rect">
+            <a:avLst/>
+          </a:prstGeom>
+          <a:noFill/>
+        </p:spPr>
+        <p:txBody>
+          <a:bodyPr wrap="square" anchor="ctr" lIns="0" rIns="0" tIns="0" bIns="0">
+            <a:spAutoFit/>
+          </a:bodyPr>
+          <a:lstStyle/>
+          <a:p>
+            <a:pPr algn="l">
+              <a:lnSpc>
+                <a:spcPct val="110000"/>
+              </a:lnSpc>
+            </a:pPr>
+            <a:r>
+              <a:rPr sz="2400" b="1">
+                <a:solidFill>
+                  <a:srgbClr val="FFFFFF"/>
+                </a:solidFill>
+                <a:latin typeface="Arial"/>
+                <a:ea typeface="Arial"/>
+              </a:rPr>
+              <a:t>등대 고객 1~2사와 기술 협력 계약 · Co-Design Pod 상주 · 시스템 SW 전문가 채용</a:t>
+            </a:r>
+          </a:p>
+        </p:txBody>
+      </p:sp>
+      <p:sp>
+        <p:nvSpPr>
+          <p:cNvPr id="105" name="TextBox 104"/>
+          <p:cNvSpPr txBox="1"/>
+          <p:nvPr/>
+        </p:nvSpPr>
+        <p:spPr>
+          <a:xfrm>
+            <a:off x="722376" y="9601200"/>
+            <a:ext cx="15453359" cy="566928"/>
+          </a:xfrm>
+          <a:prstGeom prst="rect">
+            <a:avLst/>
+          </a:prstGeom>
+          <a:noFill/>
+        </p:spPr>
+        <p:txBody>
+          <a:bodyPr wrap="square" anchor="t" lIns="0" rIns="0" tIns="0" bIns="0">
+            <a:spAutoFit/>
+          </a:bodyPr>
+          <a:lstStyle/>
+          <a:p>
+            <a:pPr algn="l">
+              <a:lnSpc>
+                <a:spcPct val="105000"/>
+              </a:lnSpc>
+            </a:pPr>
+            <a:r>
               <a:rPr sz="1500" b="0">
                 <a:solidFill>
                   <a:srgbClr val="555555"/>
@@ -12270,14 +14432,14 @@
                 <a:latin typeface="Arial"/>
                 <a:ea typeface="Arial"/>
               </a:rPr>
-              <a:t>근거: 과제팀 실행 전략(Phase 1 디바이스 → 2 워크로드 최적화 → 3 공동 설계), 워크로드 구성형 SSD 보고서 v0.2(출하 시 구성 → 운영 중 조정), 계약의 창은 2027 하반기 공급 완화 전망(TrendForce 2026-07) 기준 · 인터뷰: 신문섭(Bain), 송용호 · 로고는 식별 표시</a:t>
-            </a:r>
-          </a:p>
-        </p:txBody>
-      </p:sp>
-      <p:sp>
-        <p:nvSpPr>
-          <p:cNvPr id="51" name="TextBox 50"/>
+              <a:t>벤치마크: Micron ↔ Anthropic 전략적 계약(2026-06-22: 공동 최적화 · 다년 공급 · 운영 통합 · 전략 투자, 재무 조건 비공개) · Palantir FDE(고객 상주, 한 고객에 많은 능력, 성과로 평가) · KV 캐시 관리자 기여는 공개 저장소 기준(2026-09) · 인터뷰: 신문섭(Bain), 송용호 · 로고는 식별 표시</a:t>
+            </a:r>
+          </a:p>
+        </p:txBody>
+      </p:sp>
+      <p:sp>
+        <p:nvSpPr>
+          <p:cNvPr id="106" name="TextBox 105"/>
           <p:cNvSpPr txBox="1"/>
           <p:nvPr/>
         </p:nvSpPr>

--- a/outputs/presentation/ssd-survival-strategy.pptx
+++ b/outputs/presentation/ssd-survival-strategy.pptx
@@ -644,7 +644,7 @@
           <a:lstStyle/>
           <a:p>
             <a:r>
-              <a:t>3장 실행 전략입니다. HBM의 교훈은 고객과 함께 수요를 만드는 기업이 이긴다는 것이었습니다. 그렇게 하려면 세 가지가 바뀌어야 합니다. 첫째, 계약입니다. 지금 고객과의 계약은 장기 물량 계약, 즉 수량과 가격의 약속입니다. Micron은 2026년 6월 Anthropic과 맺은 전략적 계약에서 다년 공급 위에 HBM·DRAM·데이터센터 SSD를 Claude의 학습·추론 워크로드에 맞춰 함께 설계하고 최적화하는 공동 작업, 그리고 Micron 엔지니어링·제조 운영에 Claude를 들이는 운영 통합을 한 계약으로 묶었습니다. Anthropic Series H 전략 투자도 함께였지만 이는 선택지로 둡니다. 우리도 물량 위에 기술 협력을 쌓아야 합니다. 둘째, 사람입니다. 지금은 스펙 문서와 간헐적 미팅으로 협력하기 때문에 고객이 명시한 요구만 우리에게 옵니다. Palantir가 창안한 FDE는 엔지니어가 고객 환경 안에 상주하며 실제 운영 제약 아래서 시스템을 함께 만들고, 명시된 요구와 실제 요구 사이의 간극을 현장에서 메웁니다. 현장에서 만든 해법이 제품의 표준 기능이 되는 순환이 생기고, 그 순환이 곧 수요를 함께 만드는 과정입니다. Anthropic과 OpenAI도 같은 방식으로 자기 고객에게 들어가고 있습니다. 우리의 Co-Design Pod가 그 역할입니다. 셋째, 역량입니다. 데이터의 수명 정보는 SSD가 아니라 고객의 KV 캐시 소프트웨어 안에 있습니다. 그런데 LMCache, Mooncake, FlexKV, Dynamo 같은 KV 캐시 관리자 네 곳의 공개 저장소에 삼성의 기여는 없습니다. 우리가 강한 곳은 NAND와 SSD 펌웨어이고, 커널과 I/O는 일부입니다. 필요한 것은 그 위, 즉 시스템 소프트웨어와 AI 데이터센터를 직접 운영하는 고객의 눈입니다. 고객은 토큰당 비용, 전력, GPU 가동률로 말합니다. 그 수준의 전문성을 갖춘 사람을 뽑고 길러야 합니다. 시작은 등대 고객 한두 곳과 기술 협력을 포함한 계약, Co-Design Pod 상주, 시스템 소프트웨어 전문가 채용입니다.</a:t>
+              <a:t>3장 실행 전략입니다. HBM의 교훈은 고객과 함께 수요를 만드는 기업이 이긴다는 것이었습니다. 그렇게 하려면 세 가지가 바뀌어야 합니다. 첫째, 계약입니다. 지금 고객과의 계약은 장기 물량 계약, 즉 수량과 가격의 약속입니다. Micron은 2026년 6월 Anthropic과 맺은 전략적 계약에서 다년 공급 위에 HBM·DRAM·데이터센터 SSD를 Claude의 학습·추론 워크로드에 맞춰 함께 설계하고 최적화하는 공동 작업, 그리고 Micron 엔지니어링·제조 운영에 Claude를 들이는 운영 통합을 한 계약으로 묶었습니다. Anthropic Series H 전략 투자도 함께였지만 이는 선택지로 둡니다. 우리도 물량 위에 기술 협력을 쌓아야 합니다. 둘째, 사람입니다. 지금은 스펙 문서와 간헐적 미팅으로 협력하기 때문에 고객이 명시한 요구만 우리에게 옵니다. Palantir가 창안한 FDE는 엔지니어가 고객 환경 안에 상주하며 실제 운영 제약 아래서 시스템을 함께 만들고, 명시된 요구와 실제 요구 사이의 간극을 현장에서 메웁니다. 현장에서 만든 해법이 제품의 표준 기능이 되는 순환이 생기고, 그 순환이 곧 수요를 함께 만드는 과정입니다. Anthropic과 OpenAI도 같은 방식으로 자기 고객에게 들어가고 있습니다. 우리의 Co-Design Pod가 그 역할입니다. 셋째, 역량입니다. 데이터의 수명 정보는 SSD가 아니라 고객의 KV 캐시 소프트웨어 안에 있습니다. 그런데 LMCache, Mooncake, FlexKV, Dynamo 같은 KV 캐시 관리자 네 곳의 공개 저장소에 삼성의 기여는 없습니다. 우리가 강한 곳은 NAND와 SSD 펌웨어이고, 커널과 I/O는 일부입니다. 필요한 것은 그 위, 즉 시스템 소프트웨어와 AI 데이터센터를 직접 운영하는 고객의 눈입니다. 고객은 토큰당 비용, 전력, GPU 가동률로 말합니다. 그 수준의 전문성을 갖춘 사람을 뽑고 길러야 합니다. 시작은 선도 고객 한두 곳과 기술 협력을 포함한 계약, Co-Design Pod 상주, 시스템 소프트웨어 전문가 채용입니다.</a:t>
             </a:r>
           </a:p>
         </p:txBody>
@@ -13228,8 +13228,8 @@
         </p:nvSpPr>
         <p:spPr>
           <a:xfrm>
-            <a:off x="14365224" y="3273552"/>
-            <a:ext cx="1463040" cy="329184"/>
+            <a:off x="14045184" y="3273552"/>
+            <a:ext cx="1097280" cy="329184"/>
           </a:xfrm>
           <a:prstGeom prst="rect">
             <a:avLst/>
@@ -13268,8 +13268,8 @@
         </p:nvSpPr>
         <p:spPr>
           <a:xfrm>
-            <a:off x="15919704" y="3273552"/>
-            <a:ext cx="1463040" cy="329184"/>
+            <a:off x="15233904" y="3273552"/>
+            <a:ext cx="2331720" cy="329184"/>
           </a:xfrm>
           <a:prstGeom prst="rect">
             <a:avLst/>
@@ -13295,7 +13295,7 @@
                 <a:latin typeface="Arial"/>
                 <a:ea typeface="Arial"/>
               </a:rPr>
-              <a:t>필요</a:t>
+              <a:t>필요한 기술</a:t>
             </a:r>
           </a:p>
         </p:txBody>
@@ -13309,7 +13309,7 @@
         <p:spPr>
           <a:xfrm>
             <a:off x="12490704" y="3694176"/>
-            <a:ext cx="1783079" cy="548640"/>
+            <a:ext cx="1481328" cy="548640"/>
           </a:xfrm>
           <a:prstGeom prst="rect">
             <a:avLst/>
@@ -13348,8 +13348,8 @@
         </p:nvSpPr>
         <p:spPr>
           <a:xfrm>
-            <a:off x="14365224" y="3694176"/>
-            <a:ext cx="1463040" cy="548640"/>
+            <a:off x="14045184" y="3694176"/>
+            <a:ext cx="1097280" cy="548640"/>
           </a:xfrm>
           <a:prstGeom prst="roundRect">
             <a:avLst>
@@ -13397,8 +13397,8 @@
         </p:nvSpPr>
         <p:spPr>
           <a:xfrm>
-            <a:off x="14420088" y="3694176"/>
-            <a:ext cx="1353312" cy="548640"/>
+            <a:off x="14100048" y="3694176"/>
+            <a:ext cx="987552" cy="548640"/>
           </a:xfrm>
           <a:prstGeom prst="rect">
             <a:avLst/>
@@ -13417,14 +13417,14 @@
               </a:lnSpc>
             </a:pPr>
             <a:r>
-              <a:rPr sz="1800" b="0">
+              <a:rPr sz="1800" b="1">
                 <a:solidFill>
                   <a:srgbClr val="555555"/>
                 </a:solidFill>
                 <a:latin typeface="Arial"/>
                 <a:ea typeface="Arial"/>
               </a:rPr>
-              <a:t/>
+              <a:t>없음</a:t>
             </a:r>
           </a:p>
         </p:txBody>
@@ -13437,8 +13437,8 @@
         </p:nvSpPr>
         <p:spPr>
           <a:xfrm>
-            <a:off x="15919704" y="3694176"/>
-            <a:ext cx="1463040" cy="548640"/>
+            <a:off x="15233904" y="3694176"/>
+            <a:ext cx="2331720" cy="548640"/>
           </a:xfrm>
           <a:prstGeom prst="roundRect">
             <a:avLst>
@@ -13483,8 +13483,48 @@
         </p:nvSpPr>
         <p:spPr>
           <a:xfrm>
+            <a:off x="15288767" y="3694176"/>
+            <a:ext cx="2221991" cy="548640"/>
+          </a:xfrm>
+          <a:prstGeom prst="rect">
+            <a:avLst/>
+          </a:prstGeom>
+          <a:noFill/>
+        </p:spPr>
+        <p:txBody>
+          <a:bodyPr wrap="square" anchor="ctr" lIns="0" rIns="0" tIns="0" bIns="0">
+            <a:spAutoFit/>
+          </a:bodyPr>
+          <a:lstStyle/>
+          <a:p>
+            <a:pPr algn="ctr">
+              <a:lnSpc>
+                <a:spcPct val="110000"/>
+              </a:lnSpc>
+            </a:pPr>
+            <a:r>
+              <a:rPr sz="1700" b="1">
+                <a:solidFill>
+                  <a:srgbClr val="FFFFFF"/>
+                </a:solidFill>
+                <a:latin typeface="Arial"/>
+                <a:ea typeface="Arial"/>
+              </a:rPr>
+              <a:t>TCO 모델 · 추론 SLO</a:t>
+            </a:r>
+          </a:p>
+        </p:txBody>
+      </p:sp>
+      <p:sp>
+        <p:nvSpPr>
+          <p:cNvPr id="85" name="TextBox 84"/>
+          <p:cNvSpPr txBox="1"/>
+          <p:nvPr/>
+        </p:nvSpPr>
+        <p:spPr>
+          <a:xfrm>
             <a:off x="12490704" y="4334256"/>
-            <a:ext cx="1783079" cy="548640"/>
+            <a:ext cx="1481328" cy="548640"/>
           </a:xfrm>
           <a:prstGeom prst="rect">
             <a:avLst/>
@@ -13517,14 +13557,14 @@
       </p:sp>
       <p:sp>
         <p:nvSpPr>
-          <p:cNvPr id="85" name="Rounded Rectangle 84"/>
+          <p:cNvPr id="86" name="Rounded Rectangle 85"/>
           <p:cNvSpPr/>
           <p:nvPr/>
         </p:nvSpPr>
         <p:spPr>
           <a:xfrm>
-            <a:off x="14365224" y="4334256"/>
-            <a:ext cx="1463040" cy="548640"/>
+            <a:off x="14045184" y="4334256"/>
+            <a:ext cx="1097280" cy="548640"/>
           </a:xfrm>
           <a:prstGeom prst="roundRect">
             <a:avLst>
@@ -13566,14 +13606,14 @@
       </p:sp>
       <p:sp>
         <p:nvSpPr>
-          <p:cNvPr id="86" name="TextBox 85"/>
+          <p:cNvPr id="87" name="TextBox 86"/>
           <p:cNvSpPr txBox="1"/>
           <p:nvPr/>
         </p:nvSpPr>
         <p:spPr>
           <a:xfrm>
-            <a:off x="14420088" y="4334256"/>
-            <a:ext cx="1353312" cy="548640"/>
+            <a:off x="14100048" y="4334256"/>
+            <a:ext cx="987552" cy="548640"/>
           </a:xfrm>
           <a:prstGeom prst="rect">
             <a:avLst/>
@@ -13606,14 +13646,14 @@
       </p:sp>
       <p:sp>
         <p:nvSpPr>
-          <p:cNvPr id="87" name="Rounded Rectangle 86"/>
+          <p:cNvPr id="88" name="Rounded Rectangle 87"/>
           <p:cNvSpPr/>
           <p:nvPr/>
         </p:nvSpPr>
         <p:spPr>
           <a:xfrm>
-            <a:off x="15919704" y="4334256"/>
-            <a:ext cx="1463040" cy="548640"/>
+            <a:off x="15233904" y="4334256"/>
+            <a:ext cx="2331720" cy="548640"/>
           </a:xfrm>
           <a:prstGeom prst="roundRect">
             <a:avLst>
@@ -13652,14 +13692,54 @@
       </p:sp>
       <p:sp>
         <p:nvSpPr>
-          <p:cNvPr id="88" name="TextBox 87"/>
+          <p:cNvPr id="89" name="TextBox 88"/>
           <p:cNvSpPr txBox="1"/>
           <p:nvPr/>
         </p:nvSpPr>
         <p:spPr>
           <a:xfrm>
+            <a:off x="15288767" y="4334256"/>
+            <a:ext cx="2221991" cy="548640"/>
+          </a:xfrm>
+          <a:prstGeom prst="rect">
+            <a:avLst/>
+          </a:prstGeom>
+          <a:noFill/>
+        </p:spPr>
+        <p:txBody>
+          <a:bodyPr wrap="square" anchor="ctr" lIns="0" rIns="0" tIns="0" bIns="0">
+            <a:spAutoFit/>
+          </a:bodyPr>
+          <a:lstStyle/>
+          <a:p>
+            <a:pPr algn="ctr">
+              <a:lnSpc>
+                <a:spcPct val="110000"/>
+              </a:lnSpc>
+            </a:pPr>
+            <a:r>
+              <a:rPr sz="1700" b="1">
+                <a:solidFill>
+                  <a:srgbClr val="FFFFFF"/>
+                </a:solidFill>
+                <a:latin typeface="Arial"/>
+                <a:ea typeface="Arial"/>
+              </a:rPr>
+              <a:t>LMCache · Mooncake</a:t>
+            </a:r>
+          </a:p>
+        </p:txBody>
+      </p:sp>
+      <p:sp>
+        <p:nvSpPr>
+          <p:cNvPr id="90" name="TextBox 89"/>
+          <p:cNvSpPr txBox="1"/>
+          <p:nvPr/>
+        </p:nvSpPr>
+        <p:spPr>
+          <a:xfrm>
             <a:off x="12490704" y="4974336"/>
-            <a:ext cx="1783079" cy="548640"/>
+            <a:ext cx="1481328" cy="548640"/>
           </a:xfrm>
           <a:prstGeom prst="rect">
             <a:avLst/>
@@ -13680,7 +13760,7 @@
             <a:r>
               <a:rPr sz="1800" b="1">
                 <a:solidFill>
-                  <a:srgbClr val="555555"/>
+                  <a:srgbClr val="1428A0"/>
                 </a:solidFill>
                 <a:latin typeface="Arial"/>
                 <a:ea typeface="Arial"/>
@@ -13692,14 +13772,14 @@
       </p:sp>
       <p:sp>
         <p:nvSpPr>
-          <p:cNvPr id="89" name="Rounded Rectangle 88"/>
+          <p:cNvPr id="91" name="Rounded Rectangle 90"/>
           <p:cNvSpPr/>
           <p:nvPr/>
         </p:nvSpPr>
         <p:spPr>
           <a:xfrm>
-            <a:off x="14365224" y="4974336"/>
-            <a:ext cx="1463040" cy="548640"/>
+            <a:off x="14045184" y="4974336"/>
+            <a:ext cx="1097280" cy="548640"/>
           </a:xfrm>
           <a:prstGeom prst="roundRect">
             <a:avLst>
@@ -13738,14 +13818,14 @@
       </p:sp>
       <p:sp>
         <p:nvSpPr>
-          <p:cNvPr id="90" name="TextBox 89"/>
+          <p:cNvPr id="92" name="TextBox 91"/>
           <p:cNvSpPr txBox="1"/>
           <p:nvPr/>
         </p:nvSpPr>
         <p:spPr>
           <a:xfrm>
-            <a:off x="14420088" y="4974336"/>
-            <a:ext cx="1353312" cy="548640"/>
+            <a:off x="14100048" y="4974336"/>
+            <a:ext cx="987552" cy="548640"/>
           </a:xfrm>
           <a:prstGeom prst="rect">
             <a:avLst/>
@@ -13778,14 +13858,226 @@
       </p:sp>
       <p:sp>
         <p:nvSpPr>
-          <p:cNvPr id="91" name="Rounded Rectangle 90"/>
+          <p:cNvPr id="93" name="Rounded Rectangle 92"/>
           <p:cNvSpPr/>
           <p:nvPr/>
         </p:nvSpPr>
         <p:spPr>
           <a:xfrm>
-            <a:off x="15919704" y="4974336"/>
-            <a:ext cx="1463040" cy="548640"/>
+            <a:off x="15233904" y="4974336"/>
+            <a:ext cx="2331720" cy="548640"/>
+          </a:xfrm>
+          <a:prstGeom prst="roundRect">
+            <a:avLst>
+              <a:gd name="adj" fmla="val 13333"/>
+            </a:avLst>
+          </a:prstGeom>
+          <a:solidFill>
+            <a:srgbClr val="1428A0"/>
+          </a:solidFill>
+          <a:ln>
+            <a:noFill/>
+          </a:ln>
+          <a:effectLst/>
+        </p:spPr>
+        <p:style>
+          <a:lnRef idx="1">
+            <a:schemeClr val="accent1"/>
+          </a:lnRef>
+          <a:fillRef idx="3">
+            <a:schemeClr val="accent1"/>
+          </a:fillRef>
+          <a:effectRef idx="2">
+            <a:schemeClr val="accent1"/>
+          </a:effectRef>
+          <a:fontRef idx="minor">
+            <a:schemeClr val="lt1"/>
+          </a:fontRef>
+        </p:style>
+        <p:txBody>
+          <a:bodyPr rtlCol="0" anchor="ctr"/>
+          <a:lstStyle/>
+          <a:p>
+            <a:pPr algn="ctr"/>
+          </a:p>
+        </p:txBody>
+      </p:sp>
+      <p:sp>
+        <p:nvSpPr>
+          <p:cNvPr id="94" name="TextBox 93"/>
+          <p:cNvSpPr txBox="1"/>
+          <p:nvPr/>
+        </p:nvSpPr>
+        <p:spPr>
+          <a:xfrm>
+            <a:off x="15288767" y="4974336"/>
+            <a:ext cx="2221991" cy="548640"/>
+          </a:xfrm>
+          <a:prstGeom prst="rect">
+            <a:avLst/>
+          </a:prstGeom>
+          <a:noFill/>
+        </p:spPr>
+        <p:txBody>
+          <a:bodyPr wrap="square" anchor="ctr" lIns="0" rIns="0" tIns="0" bIns="0">
+            <a:spAutoFit/>
+          </a:bodyPr>
+          <a:lstStyle/>
+          <a:p>
+            <a:pPr algn="ctr">
+              <a:lnSpc>
+                <a:spcPct val="110000"/>
+              </a:lnSpc>
+            </a:pPr>
+            <a:r>
+              <a:rPr sz="1700" b="1">
+                <a:solidFill>
+                  <a:srgbClr val="FFFFFF"/>
+                </a:solidFill>
+                <a:latin typeface="Arial"/>
+                <a:ea typeface="Arial"/>
+              </a:rPr>
+              <a:t>io_uring · GDS · NIXL</a:t>
+            </a:r>
+          </a:p>
+        </p:txBody>
+      </p:sp>
+      <p:sp>
+        <p:nvSpPr>
+          <p:cNvPr id="95" name="TextBox 94"/>
+          <p:cNvSpPr txBox="1"/>
+          <p:nvPr/>
+        </p:nvSpPr>
+        <p:spPr>
+          <a:xfrm>
+            <a:off x="12490704" y="5614416"/>
+            <a:ext cx="1481328" cy="548640"/>
+          </a:xfrm>
+          <a:prstGeom prst="rect">
+            <a:avLst/>
+          </a:prstGeom>
+          <a:noFill/>
+        </p:spPr>
+        <p:txBody>
+          <a:bodyPr wrap="square" anchor="ctr" lIns="0" rIns="0" tIns="0" bIns="0">
+            <a:spAutoFit/>
+          </a:bodyPr>
+          <a:lstStyle/>
+          <a:p>
+            <a:pPr algn="l">
+              <a:lnSpc>
+                <a:spcPct val="110000"/>
+              </a:lnSpc>
+            </a:pPr>
+            <a:r>
+              <a:rPr sz="1800" b="1">
+                <a:solidFill>
+                  <a:srgbClr val="555555"/>
+                </a:solidFill>
+                <a:latin typeface="Arial"/>
+                <a:ea typeface="Arial"/>
+              </a:rPr>
+              <a:t>SSD FW</a:t>
+            </a:r>
+          </a:p>
+        </p:txBody>
+      </p:sp>
+      <p:sp>
+        <p:nvSpPr>
+          <p:cNvPr id="96" name="Rounded Rectangle 95"/>
+          <p:cNvSpPr/>
+          <p:nvPr/>
+        </p:nvSpPr>
+        <p:spPr>
+          <a:xfrm>
+            <a:off x="14045184" y="5614416"/>
+            <a:ext cx="1097280" cy="548640"/>
+          </a:xfrm>
+          <a:prstGeom prst="roundRect">
+            <a:avLst>
+              <a:gd name="adj" fmla="val 13333"/>
+            </a:avLst>
+          </a:prstGeom>
+          <a:solidFill>
+            <a:srgbClr val="8A8A8A"/>
+          </a:solidFill>
+          <a:ln>
+            <a:noFill/>
+          </a:ln>
+          <a:effectLst/>
+        </p:spPr>
+        <p:style>
+          <a:lnRef idx="1">
+            <a:schemeClr val="accent1"/>
+          </a:lnRef>
+          <a:fillRef idx="3">
+            <a:schemeClr val="accent1"/>
+          </a:fillRef>
+          <a:effectRef idx="2">
+            <a:schemeClr val="accent1"/>
+          </a:effectRef>
+          <a:fontRef idx="minor">
+            <a:schemeClr val="lt1"/>
+          </a:fontRef>
+        </p:style>
+        <p:txBody>
+          <a:bodyPr rtlCol="0" anchor="ctr"/>
+          <a:lstStyle/>
+          <a:p>
+            <a:pPr algn="ctr"/>
+          </a:p>
+        </p:txBody>
+      </p:sp>
+      <p:sp>
+        <p:nvSpPr>
+          <p:cNvPr id="97" name="TextBox 96"/>
+          <p:cNvSpPr txBox="1"/>
+          <p:nvPr/>
+        </p:nvSpPr>
+        <p:spPr>
+          <a:xfrm>
+            <a:off x="14100048" y="5614416"/>
+            <a:ext cx="987552" cy="548640"/>
+          </a:xfrm>
+          <a:prstGeom prst="rect">
+            <a:avLst/>
+          </a:prstGeom>
+          <a:noFill/>
+        </p:spPr>
+        <p:txBody>
+          <a:bodyPr wrap="square" anchor="ctr" lIns="0" rIns="0" tIns="0" bIns="0">
+            <a:spAutoFit/>
+          </a:bodyPr>
+          <a:lstStyle/>
+          <a:p>
+            <a:pPr algn="ctr">
+              <a:lnSpc>
+                <a:spcPct val="110000"/>
+              </a:lnSpc>
+            </a:pPr>
+            <a:r>
+              <a:rPr sz="1800" b="1">
+                <a:solidFill>
+                  <a:srgbClr val="FFFFFF"/>
+                </a:solidFill>
+                <a:latin typeface="Arial"/>
+                <a:ea typeface="Arial"/>
+              </a:rPr>
+              <a:t>강점</a:t>
+            </a:r>
+          </a:p>
+        </p:txBody>
+      </p:sp>
+      <p:sp>
+        <p:nvSpPr>
+          <p:cNvPr id="98" name="Rounded Rectangle 97"/>
+          <p:cNvSpPr/>
+          <p:nvPr/>
+        </p:nvSpPr>
+        <p:spPr>
+          <a:xfrm>
+            <a:off x="15233904" y="5614416"/>
+            <a:ext cx="2331720" cy="548640"/>
           </a:xfrm>
           <a:prstGeom prst="roundRect">
             <a:avLst>
@@ -13824,14 +14116,54 @@
       </p:sp>
       <p:sp>
         <p:nvSpPr>
-          <p:cNvPr id="92" name="TextBox 91"/>
+          <p:cNvPr id="99" name="TextBox 98"/>
           <p:cNvSpPr txBox="1"/>
           <p:nvPr/>
         </p:nvSpPr>
         <p:spPr>
           <a:xfrm>
-            <a:off x="12490704" y="5614416"/>
-            <a:ext cx="1783079" cy="548640"/>
+            <a:off x="15288767" y="5614416"/>
+            <a:ext cx="2221991" cy="548640"/>
+          </a:xfrm>
+          <a:prstGeom prst="rect">
+            <a:avLst/>
+          </a:prstGeom>
+          <a:noFill/>
+        </p:spPr>
+        <p:txBody>
+          <a:bodyPr wrap="square" anchor="ctr" lIns="0" rIns="0" tIns="0" bIns="0">
+            <a:spAutoFit/>
+          </a:bodyPr>
+          <a:lstStyle/>
+          <a:p>
+            <a:pPr algn="ctr">
+              <a:lnSpc>
+                <a:spcPct val="110000"/>
+              </a:lnSpc>
+            </a:pPr>
+            <a:r>
+              <a:rPr sz="1700" b="1">
+                <a:solidFill>
+                  <a:srgbClr val="FFFFFF"/>
+                </a:solidFill>
+                <a:latin typeface="Arial"/>
+                <a:ea typeface="Arial"/>
+              </a:rPr>
+              <a:t>FDP · WAF 텔레메트리</a:t>
+            </a:r>
+          </a:p>
+        </p:txBody>
+      </p:sp>
+      <p:sp>
+        <p:nvSpPr>
+          <p:cNvPr id="100" name="TextBox 99"/>
+          <p:cNvSpPr txBox="1"/>
+          <p:nvPr/>
+        </p:nvSpPr>
+        <p:spPr>
+          <a:xfrm>
+            <a:off x="12490704" y="6254496"/>
+            <a:ext cx="1481328" cy="548640"/>
           </a:xfrm>
           <a:prstGeom prst="rect">
             <a:avLst/>
@@ -13857,21 +14189,21 @@
                 <a:latin typeface="Arial"/>
                 <a:ea typeface="Arial"/>
               </a:rPr>
-              <a:t>SSD FW</a:t>
-            </a:r>
-          </a:p>
-        </p:txBody>
-      </p:sp>
-      <p:sp>
-        <p:nvSpPr>
-          <p:cNvPr id="93" name="Rounded Rectangle 92"/>
+              <a:t>NAND</a:t>
+            </a:r>
+          </a:p>
+        </p:txBody>
+      </p:sp>
+      <p:sp>
+        <p:nvSpPr>
+          <p:cNvPr id="101" name="Rounded Rectangle 100"/>
           <p:cNvSpPr/>
           <p:nvPr/>
         </p:nvSpPr>
         <p:spPr>
           <a:xfrm>
-            <a:off x="14365224" y="5614416"/>
-            <a:ext cx="1463040" cy="548640"/>
+            <a:off x="14045184" y="6254496"/>
+            <a:ext cx="1097280" cy="548640"/>
           </a:xfrm>
           <a:prstGeom prst="roundRect">
             <a:avLst>
@@ -13910,14 +14242,14 @@
       </p:sp>
       <p:sp>
         <p:nvSpPr>
-          <p:cNvPr id="94" name="TextBox 93"/>
+          <p:cNvPr id="102" name="TextBox 101"/>
           <p:cNvSpPr txBox="1"/>
           <p:nvPr/>
         </p:nvSpPr>
         <p:spPr>
           <a:xfrm>
-            <a:off x="14420088" y="5614416"/>
-            <a:ext cx="1353312" cy="548640"/>
+            <a:off x="14100048" y="6254496"/>
+            <a:ext cx="987552" cy="548640"/>
           </a:xfrm>
           <a:prstGeom prst="rect">
             <a:avLst/>
@@ -13950,14 +14282,14 @@
       </p:sp>
       <p:sp>
         <p:nvSpPr>
-          <p:cNvPr id="95" name="Rounded Rectangle 94"/>
+          <p:cNvPr id="103" name="Rounded Rectangle 102"/>
           <p:cNvSpPr/>
           <p:nvPr/>
         </p:nvSpPr>
         <p:spPr>
           <a:xfrm>
-            <a:off x="15919704" y="5614416"/>
-            <a:ext cx="1463040" cy="548640"/>
+            <a:off x="15233904" y="6254496"/>
+            <a:ext cx="2331720" cy="548640"/>
           </a:xfrm>
           <a:prstGeom prst="roundRect">
             <a:avLst>
@@ -13965,7 +14297,7 @@
             </a:avLst>
           </a:prstGeom>
           <a:solidFill>
-            <a:srgbClr val="3C5AC8"/>
+            <a:srgbClr val="AAB8E8"/>
           </a:solidFill>
           <a:ln>
             <a:noFill/>
@@ -13996,14 +14328,81 @@
       </p:sp>
       <p:sp>
         <p:nvSpPr>
-          <p:cNvPr id="96" name="TextBox 95"/>
+          <p:cNvPr id="104" name="TextBox 103"/>
           <p:cNvSpPr txBox="1"/>
           <p:nvPr/>
         </p:nvSpPr>
         <p:spPr>
           <a:xfrm>
-            <a:off x="12490704" y="6254496"/>
-            <a:ext cx="1783079" cy="548640"/>
+            <a:off x="12490704" y="6986016"/>
+            <a:ext cx="5074920" cy="1005840"/>
+          </a:xfrm>
+          <a:prstGeom prst="rect">
+            <a:avLst/>
+          </a:prstGeom>
+          <a:noFill/>
+        </p:spPr>
+        <p:txBody>
+          <a:bodyPr wrap="square" anchor="t" lIns="0" rIns="0" tIns="0" bIns="0">
+            <a:spAutoFit/>
+          </a:bodyPr>
+          <a:lstStyle/>
+          <a:p>
+            <a:pPr algn="l">
+              <a:lnSpc>
+                <a:spcPct val="105000"/>
+              </a:lnSpc>
+            </a:pPr>
+            <a:r>
+              <a:rPr sz="1800" b="0">
+                <a:solidFill>
+                  <a:srgbClr val="555555"/>
+                </a:solidFill>
+                <a:latin typeface="Arial"/>
+                <a:ea typeface="Arial"/>
+              </a:rPr>
+              <a:t>KV 캐시 관리자 4종에 </a:t>
+            </a:r>
+            <a:r>
+              <a:rPr sz="1800" b="1">
+                <a:solidFill>
+                  <a:srgbClr val="1A1A1A"/>
+                </a:solidFill>
+                <a:latin typeface="Arial"/>
+                <a:ea typeface="Arial"/>
+              </a:rPr>
+              <a:t>삼성 기여 0</a:t>
+            </a:r>
+          </a:p>
+          <a:p>
+            <a:pPr algn="l">
+              <a:lnSpc>
+                <a:spcPct val="105000"/>
+              </a:lnSpc>
+            </a:pPr>
+            <a:r>
+              <a:rPr sz="1800" b="0">
+                <a:solidFill>
+                  <a:srgbClr val="555555"/>
+                </a:solidFill>
+                <a:latin typeface="Arial"/>
+                <a:ea typeface="Arial"/>
+              </a:rPr>
+              <a:t>LMCache · Mooncake · FlexKV · Dynamo</a:t>
+            </a:r>
+          </a:p>
+        </p:txBody>
+      </p:sp>
+      <p:sp>
+        <p:nvSpPr>
+          <p:cNvPr id="105" name="TextBox 104"/>
+          <p:cNvSpPr txBox="1"/>
+          <p:nvPr/>
+        </p:nvSpPr>
+        <p:spPr>
+          <a:xfrm>
+            <a:off x="12490704" y="8101583"/>
+            <a:ext cx="5074920" cy="457200"/>
           </a:xfrm>
           <a:prstGeom prst="rect">
             <a:avLst/>
@@ -14022,245 +14421,6 @@
               </a:lnSpc>
             </a:pPr>
             <a:r>
-              <a:rPr sz="1800" b="1">
-                <a:solidFill>
-                  <a:srgbClr val="555555"/>
-                </a:solidFill>
-                <a:latin typeface="Arial"/>
-                <a:ea typeface="Arial"/>
-              </a:rPr>
-              <a:t>NAND</a:t>
-            </a:r>
-          </a:p>
-        </p:txBody>
-      </p:sp>
-      <p:sp>
-        <p:nvSpPr>
-          <p:cNvPr id="97" name="Rounded Rectangle 96"/>
-          <p:cNvSpPr/>
-          <p:nvPr/>
-        </p:nvSpPr>
-        <p:spPr>
-          <a:xfrm>
-            <a:off x="14365224" y="6254496"/>
-            <a:ext cx="1463040" cy="548640"/>
-          </a:xfrm>
-          <a:prstGeom prst="roundRect">
-            <a:avLst>
-              <a:gd name="adj" fmla="val 13333"/>
-            </a:avLst>
-          </a:prstGeom>
-          <a:solidFill>
-            <a:srgbClr val="8A8A8A"/>
-          </a:solidFill>
-          <a:ln>
-            <a:noFill/>
-          </a:ln>
-          <a:effectLst/>
-        </p:spPr>
-        <p:style>
-          <a:lnRef idx="1">
-            <a:schemeClr val="accent1"/>
-          </a:lnRef>
-          <a:fillRef idx="3">
-            <a:schemeClr val="accent1"/>
-          </a:fillRef>
-          <a:effectRef idx="2">
-            <a:schemeClr val="accent1"/>
-          </a:effectRef>
-          <a:fontRef idx="minor">
-            <a:schemeClr val="lt1"/>
-          </a:fontRef>
-        </p:style>
-        <p:txBody>
-          <a:bodyPr rtlCol="0" anchor="ctr"/>
-          <a:lstStyle/>
-          <a:p>
-            <a:pPr algn="ctr"/>
-          </a:p>
-        </p:txBody>
-      </p:sp>
-      <p:sp>
-        <p:nvSpPr>
-          <p:cNvPr id="98" name="TextBox 97"/>
-          <p:cNvSpPr txBox="1"/>
-          <p:nvPr/>
-        </p:nvSpPr>
-        <p:spPr>
-          <a:xfrm>
-            <a:off x="14420088" y="6254496"/>
-            <a:ext cx="1353312" cy="548640"/>
-          </a:xfrm>
-          <a:prstGeom prst="rect">
-            <a:avLst/>
-          </a:prstGeom>
-          <a:noFill/>
-        </p:spPr>
-        <p:txBody>
-          <a:bodyPr wrap="square" anchor="ctr" lIns="0" rIns="0" tIns="0" bIns="0">
-            <a:spAutoFit/>
-          </a:bodyPr>
-          <a:lstStyle/>
-          <a:p>
-            <a:pPr algn="ctr">
-              <a:lnSpc>
-                <a:spcPct val="110000"/>
-              </a:lnSpc>
-            </a:pPr>
-            <a:r>
-              <a:rPr sz="1800" b="1">
-                <a:solidFill>
-                  <a:srgbClr val="FFFFFF"/>
-                </a:solidFill>
-                <a:latin typeface="Arial"/>
-                <a:ea typeface="Arial"/>
-              </a:rPr>
-              <a:t>강점</a:t>
-            </a:r>
-          </a:p>
-        </p:txBody>
-      </p:sp>
-      <p:sp>
-        <p:nvSpPr>
-          <p:cNvPr id="99" name="Rounded Rectangle 98"/>
-          <p:cNvSpPr/>
-          <p:nvPr/>
-        </p:nvSpPr>
-        <p:spPr>
-          <a:xfrm>
-            <a:off x="15919704" y="6254496"/>
-            <a:ext cx="1463040" cy="548640"/>
-          </a:xfrm>
-          <a:prstGeom prst="roundRect">
-            <a:avLst>
-              <a:gd name="adj" fmla="val 13333"/>
-            </a:avLst>
-          </a:prstGeom>
-          <a:solidFill>
-            <a:srgbClr val="3C5AC8"/>
-          </a:solidFill>
-          <a:ln>
-            <a:noFill/>
-          </a:ln>
-          <a:effectLst/>
-        </p:spPr>
-        <p:style>
-          <a:lnRef idx="1">
-            <a:schemeClr val="accent1"/>
-          </a:lnRef>
-          <a:fillRef idx="3">
-            <a:schemeClr val="accent1"/>
-          </a:fillRef>
-          <a:effectRef idx="2">
-            <a:schemeClr val="accent1"/>
-          </a:effectRef>
-          <a:fontRef idx="minor">
-            <a:schemeClr val="lt1"/>
-          </a:fontRef>
-        </p:style>
-        <p:txBody>
-          <a:bodyPr rtlCol="0" anchor="ctr"/>
-          <a:lstStyle/>
-          <a:p>
-            <a:pPr algn="ctr"/>
-          </a:p>
-        </p:txBody>
-      </p:sp>
-      <p:sp>
-        <p:nvSpPr>
-          <p:cNvPr id="100" name="TextBox 99"/>
-          <p:cNvSpPr txBox="1"/>
-          <p:nvPr/>
-        </p:nvSpPr>
-        <p:spPr>
-          <a:xfrm>
-            <a:off x="12490704" y="6986016"/>
-            <a:ext cx="5074920" cy="1005840"/>
-          </a:xfrm>
-          <a:prstGeom prst="rect">
-            <a:avLst/>
-          </a:prstGeom>
-          <a:noFill/>
-        </p:spPr>
-        <p:txBody>
-          <a:bodyPr wrap="square" anchor="t" lIns="0" rIns="0" tIns="0" bIns="0">
-            <a:spAutoFit/>
-          </a:bodyPr>
-          <a:lstStyle/>
-          <a:p>
-            <a:pPr algn="l">
-              <a:lnSpc>
-                <a:spcPct val="105000"/>
-              </a:lnSpc>
-            </a:pPr>
-            <a:r>
-              <a:rPr sz="1800" b="0">
-                <a:solidFill>
-                  <a:srgbClr val="555555"/>
-                </a:solidFill>
-                <a:latin typeface="Arial"/>
-                <a:ea typeface="Arial"/>
-              </a:rPr>
-              <a:t>KV 캐시 관리자 4종에 </a:t>
-            </a:r>
-            <a:r>
-              <a:rPr sz="1800" b="1">
-                <a:solidFill>
-                  <a:srgbClr val="1A1A1A"/>
-                </a:solidFill>
-                <a:latin typeface="Arial"/>
-                <a:ea typeface="Arial"/>
-              </a:rPr>
-              <a:t>삼성 기여 0</a:t>
-            </a:r>
-          </a:p>
-          <a:p>
-            <a:pPr algn="l">
-              <a:lnSpc>
-                <a:spcPct val="105000"/>
-              </a:lnSpc>
-            </a:pPr>
-            <a:r>
-              <a:rPr sz="1800" b="0">
-                <a:solidFill>
-                  <a:srgbClr val="555555"/>
-                </a:solidFill>
-                <a:latin typeface="Arial"/>
-                <a:ea typeface="Arial"/>
-              </a:rPr>
-              <a:t>LMCache · Mooncake · FlexKV · Dynamo</a:t>
-            </a:r>
-          </a:p>
-        </p:txBody>
-      </p:sp>
-      <p:sp>
-        <p:nvSpPr>
-          <p:cNvPr id="101" name="TextBox 100"/>
-          <p:cNvSpPr txBox="1"/>
-          <p:nvPr/>
-        </p:nvSpPr>
-        <p:spPr>
-          <a:xfrm>
-            <a:off x="12490704" y="8101583"/>
-            <a:ext cx="5074920" cy="457200"/>
-          </a:xfrm>
-          <a:prstGeom prst="rect">
-            <a:avLst/>
-          </a:prstGeom>
-          <a:noFill/>
-        </p:spPr>
-        <p:txBody>
-          <a:bodyPr wrap="square" anchor="ctr" lIns="0" rIns="0" tIns="0" bIns="0">
-            <a:spAutoFit/>
-          </a:bodyPr>
-          <a:lstStyle/>
-          <a:p>
-            <a:pPr algn="l">
-              <a:lnSpc>
-                <a:spcPct val="110000"/>
-              </a:lnSpc>
-            </a:pPr>
-            <a:r>
               <a:rPr sz="2000" b="1">
                 <a:solidFill>
                   <a:srgbClr val="1428A0"/>
@@ -14275,7 +14435,7 @@
       </p:sp>
       <p:sp>
         <p:nvSpPr>
-          <p:cNvPr id="102" name="Rectangle 101"/>
+          <p:cNvPr id="106" name="Rectangle 105"/>
           <p:cNvSpPr/>
           <p:nvPr/>
         </p:nvSpPr>
@@ -14319,7 +14479,7 @@
       </p:sp>
       <p:sp>
         <p:nvSpPr>
-          <p:cNvPr id="103" name="TextBox 102"/>
+          <p:cNvPr id="107" name="TextBox 106"/>
           <p:cNvSpPr txBox="1"/>
           <p:nvPr/>
         </p:nvSpPr>
@@ -14359,7 +14519,7 @@
       </p:sp>
       <p:sp>
         <p:nvSpPr>
-          <p:cNvPr id="104" name="TextBox 103"/>
+          <p:cNvPr id="108" name="TextBox 107"/>
           <p:cNvSpPr txBox="1"/>
           <p:nvPr/>
         </p:nvSpPr>
@@ -14392,14 +14552,14 @@
                 <a:latin typeface="Arial"/>
                 <a:ea typeface="Arial"/>
               </a:rPr>
-              <a:t>등대 고객 1~2사와 기술 협력 계약 · Co-Design Pod 상주 · 시스템 SW 전문가 채용</a:t>
-            </a:r>
-          </a:p>
-        </p:txBody>
-      </p:sp>
-      <p:sp>
-        <p:nvSpPr>
-          <p:cNvPr id="105" name="TextBox 104"/>
+              <a:t>선도 고객 1~2사와 기술 협력 계약 · Co-Design Pod 상주 · 시스템 SW 전문가 채용</a:t>
+            </a:r>
+          </a:p>
+        </p:txBody>
+      </p:sp>
+      <p:sp>
+        <p:nvSpPr>
+          <p:cNvPr id="109" name="TextBox 108"/>
           <p:cNvSpPr txBox="1"/>
           <p:nvPr/>
         </p:nvSpPr>
@@ -14439,7 +14599,7 @@
       </p:sp>
       <p:sp>
         <p:nvSpPr>
-          <p:cNvPr id="106" name="TextBox 105"/>
+          <p:cNvPr id="110" name="TextBox 109"/>
           <p:cNvSpPr txBox="1"/>
           <p:nvPr/>
         </p:nvSpPr>

--- a/outputs/presentation/ssd-survival-strategy.pptx
+++ b/outputs/presentation/ssd-survival-strategy.pptx
@@ -644,7 +644,7 @@
           <a:lstStyle/>
           <a:p>
             <a:r>
-              <a:t>3장 실행 전략입니다. HBM의 교훈은 고객과 함께 수요를 만드는 기업이 이긴다는 것이었습니다. 그렇게 하려면 세 가지가 바뀌어야 합니다. 첫째, 계약입니다. 지금 고객과의 계약은 장기 물량 계약, 즉 수량과 가격의 약속입니다. Micron은 2026년 6월 Anthropic과 맺은 전략적 계약에서 다년 공급 위에 HBM·DRAM·데이터센터 SSD를 Claude의 학습·추론 워크로드에 맞춰 함께 설계하고 최적화하는 공동 작업, 그리고 Micron 엔지니어링·제조 운영에 Claude를 들이는 운영 통합을 한 계약으로 묶었습니다. Anthropic Series H 전략 투자도 함께였지만 이는 선택지로 둡니다. 우리도 물량 위에 기술 협력을 쌓아야 합니다. 둘째, 사람입니다. 지금은 스펙 문서와 간헐적 미팅으로 협력하기 때문에 고객이 명시한 요구만 우리에게 옵니다. Palantir가 창안한 FDE는 엔지니어가 고객 환경 안에 상주하며 실제 운영 제약 아래서 시스템을 함께 만들고, 명시된 요구와 실제 요구 사이의 간극을 현장에서 메웁니다. 현장에서 만든 해법이 제품의 표준 기능이 되는 순환이 생기고, 그 순환이 곧 수요를 함께 만드는 과정입니다. Anthropic과 OpenAI도 같은 방식으로 자기 고객에게 들어가고 있습니다. 우리의 Co-Design Pod가 그 역할입니다. 셋째, 역량입니다. 데이터의 수명 정보는 SSD가 아니라 고객의 KV 캐시 소프트웨어 안에 있습니다. 그런데 LMCache, Mooncake, FlexKV, Dynamo 같은 KV 캐시 관리자 네 곳의 공개 저장소에 삼성의 기여는 없습니다. 우리가 강한 곳은 NAND와 SSD 펌웨어이고, 커널과 I/O는 일부입니다. 필요한 것은 그 위, 즉 시스템 소프트웨어와 AI 데이터센터를 직접 운영하는 고객의 눈입니다. 고객은 토큰당 비용, 전력, GPU 가동률로 말합니다. 그 수준의 전문성을 갖춘 사람을 뽑고 길러야 합니다. 시작은 선도 고객 한두 곳과 기술 협력을 포함한 계약, Co-Design Pod 상주, 시스템 소프트웨어 전문가 채용입니다.</a:t>
+              <a:t>3장 실행 전략입니다. HBM의 교훈은 고객과 함께 수요를 만드는 기업이 이긴다는 것이었습니다. 그렇게 하려면 세 가지가 바뀌어야 합니다. 첫째, 계약입니다. 지금 고객과의 계약은 장기 물량 계약, 즉 수량과 가격의 약속입니다. Micron은 2026년 6월 Anthropic과 맺은 전략적 계약에서 다년 공급 위에 HBM·DRAM·데이터센터 SSD를 Claude의 학습·추론 워크로드에 맞춰 함께 설계하고 최적화하는 공동 작업, 그리고 Micron 엔지니어링·제조 운영에 Claude를 들이는 운영 통합을 한 계약으로 묶었습니다. Anthropic Series H 전략 투자도 함께였지만 이는 선택지로 둡니다. 우리도 물량 위에 기술 협력을 쌓아야 합니다. 둘째, 사람입니다. 지금은 스펙 문서와 간헐적 미팅으로 협력하기 때문에 고객이 명시한 요구만 우리에게 옵니다. Palantir가 창안한 FDE는 엔지니어가 고객 환경 안에 상주하며 실제 운영 제약 아래서 시스템을 함께 만들고, 명시된 요구와 실제 요구 사이의 간극을 현장에서 메웁니다. 현장에서 만든 해법이 제품의 표준 기능이 되는 순환이 생기고, 그 순환이 곧 수요를 함께 만드는 과정입니다. Anthropic과 OpenAI도 같은 방식으로 자기 고객에게 들어가고 있습니다. 우리의 Co-Design Pod가 그 역할입니다. 셋째, 역량입니다. 데이터의 수명 정보는 SSD가 아니라 고객의 KV 캐시 소프트웨어 안에 있습니다. 그런데 LMCache, Mooncake, FlexKV, Dynamo 같은 KV 캐시 관리자 네 곳의 공개 저장소에 삼성의 기여는 없습니다. 우리가 강한 곳은 NAND와 SSD 펌웨어이고, 커널과 I/O는 일부입니다. 필요한 것은 그 위, 즉 시스템 소프트웨어와 AI 데이터센터를 직접 운영하는 고객의 눈입니다. 고객은 토큰당 비용, 전력, GPU 가동률로 말합니다. 그 수준의 전문성을 갖춘 사람을 뽑고 길러야 합니다. 시작은 전략 고객 한두 곳과 기술 협력을 포함한 계약, Co-Design Pod 상주, 시스템 소프트웨어 전문가 채용입니다.</a:t>
             </a:r>
           </a:p>
         </p:txBody>
@@ -14552,7 +14552,7 @@
                 <a:latin typeface="Arial"/>
                 <a:ea typeface="Arial"/>
               </a:rPr>
-              <a:t>선도 고객 1~2사와 기술 협력 계약 · Co-Design Pod 상주 · 시스템 SW 전문가 채용</a:t>
+              <a:t>전략 고객 1~2사와 기술 협력 계약 · Co-Design Pod 상주 · 시스템 SW 전문가 채용</a:t>
             </a:r>
           </a:p>
         </p:txBody>

--- a/outputs/presentation/ssd-survival-strategy.pptx
+++ b/outputs/presentation/ssd-survival-strategy.pptx
@@ -644,7 +644,7 @@
           <a:lstStyle/>
           <a:p>
             <a:r>
-              <a:t>3장 실행 전략입니다. HBM의 교훈은 고객과 함께 수요를 만드는 기업이 이긴다는 것이었습니다. 그렇게 하려면 세 가지가 바뀌어야 합니다. 첫째, 계약입니다. 지금 고객과의 계약은 장기 물량 계약, 즉 수량과 가격의 약속입니다. Micron은 2026년 6월 Anthropic과 맺은 전략적 계약에서 다년 공급 위에 HBM·DRAM·데이터센터 SSD를 Claude의 학습·추론 워크로드에 맞춰 함께 설계하고 최적화하는 공동 작업, 그리고 Micron 엔지니어링·제조 운영에 Claude를 들이는 운영 통합을 한 계약으로 묶었습니다. Anthropic Series H 전략 투자도 함께였지만 이는 선택지로 둡니다. 우리도 물량 위에 기술 협력을 쌓아야 합니다. 둘째, 사람입니다. 지금은 스펙 문서와 간헐적 미팅으로 협력하기 때문에 고객이 명시한 요구만 우리에게 옵니다. Palantir가 창안한 FDE는 엔지니어가 고객 환경 안에 상주하며 실제 운영 제약 아래서 시스템을 함께 만들고, 명시된 요구와 실제 요구 사이의 간극을 현장에서 메웁니다. 현장에서 만든 해법이 제품의 표준 기능이 되는 순환이 생기고, 그 순환이 곧 수요를 함께 만드는 과정입니다. Anthropic과 OpenAI도 같은 방식으로 자기 고객에게 들어가고 있습니다. 우리의 Co-Design Pod가 그 역할입니다. 셋째, 역량입니다. 데이터의 수명 정보는 SSD가 아니라 고객의 KV 캐시 소프트웨어 안에 있습니다. 그런데 LMCache, Mooncake, FlexKV, Dynamo 같은 KV 캐시 관리자 네 곳의 공개 저장소에 삼성의 기여는 없습니다. 우리가 강한 곳은 NAND와 SSD 펌웨어이고, 커널과 I/O는 일부입니다. 필요한 것은 그 위, 즉 시스템 소프트웨어와 AI 데이터센터를 직접 운영하는 고객의 눈입니다. 고객은 토큰당 비용, 전력, GPU 가동률로 말합니다. 그 수준의 전문성을 갖춘 사람을 뽑고 길러야 합니다. 시작은 전략 고객 한두 곳과 기술 협력을 포함한 계약, Co-Design Pod 상주, 시스템 소프트웨어 전문가 채용입니다.</a:t>
+              <a:t>3장 실행 전략입니다. HBM의 교훈은 고객과 함께 수요를 만드는 기업이 이긴다는 것이었습니다. 그렇게 하려면 세 가지가 바뀌어야 합니다. 첫째, 계약입니다. 지금 고객과의 계약은 장기 물량 계약, 즉 수량과 가격의 약속입니다. Micron은 2026년 6월 Anthropic과 맺은 전략적 계약에서 다년 공급 위에 HBM·DRAM·데이터센터 SSD를 Claude의 학습·추론 워크로드에 맞춰 함께 설계하고 최적화하는 공동 작업, 그리고 Micron 엔지니어링·제조 운영에 Claude를 들이는 운영 통합을 한 계약으로 묶었습니다. Anthropic Series H 전략 투자도 함께였지만 이는 선택지로 둡니다. 우리도 물량 위에 기술 협력을 쌓아야 합니다. 둘째, 사람입니다. 지금은 스펙 문서와 간헐적 미팅으로 협력하기 때문에 고객이 명시한 요구만 우리에게 옵니다. Palantir가 창안한 FDE는 엔지니어가 고객 환경 안에 상주하며 실제 운영 제약 아래서 시스템을 함께 만들고, 명시된 요구와 실제 요구 사이의 간극을 현장에서 메웁니다. 현장에서 만든 해법이 제품의 표준 기능이 되는 순환이 생기고, 그 순환이 곧 수요를 함께 만드는 과정입니다. Anthropic과 OpenAI도 같은 방식으로 자기 고객에게 들어가고 있습니다. 우리의 Co-Design Pod가 그 역할입니다. 셋째, 역량입니다. 데이터의 수명 정보는 SSD가 아니라 고객의 KV 캐시 소프트웨어 안에 있습니다. 시작은 했습니다. LMCache에는 삼성 엔지니어가 Committer로 이름을 올렸고, NVMe raw block 계층과 FDP 배치 기능을 2026년 8월에 머지했습니다. 조사한 KV 캐시 관리자 가운데 FDP 코드가 들어간 곳은 LMCache뿐입니다. 하지만 NVIDIA Dynamo, Mooncake, FlexKV에는 삼성의 기여가 없습니다. 한 곳의 성공을 고객이 실제로 쓰는 여러 스택으로 넓혀야 합니다. 우리가 강한 곳은 NAND와 SSD 펌웨어이고, 커널과 I/O는 일부입니다. 필요한 것은 그 위, 즉 시스템 소프트웨어와 AI 데이터센터를 직접 운영하는 고객의 눈입니다. 고객은 토큰당 비용, 전력, GPU 가동률로 말합니다. 그 수준의 전문성을 갖춘 사람을 뽑고 길러야 합니다. 시작은 전략 고객 한두 곳과 기술 협력을 포함한 계약, Co-Design Pod 상주, 시스템 소프트웨어 전문가 채용입니다.</a:t>
             </a:r>
           </a:p>
         </p:txBody>
@@ -13572,13 +13572,10 @@
             </a:avLst>
           </a:prstGeom>
           <a:solidFill>
-            <a:srgbClr val="FFFFFF"/>
+            <a:srgbClr val="F5F5F5"/>
           </a:solidFill>
-          <a:ln w="12700">
-            <a:solidFill>
-              <a:srgbClr val="8A8A8A"/>
-            </a:solidFill>
-            <a:prstDash val="dash"/>
+          <a:ln>
+            <a:noFill/>
           </a:ln>
           <a:effectLst/>
         </p:spPr>
@@ -13639,7 +13636,7 @@
                 <a:latin typeface="Arial"/>
                 <a:ea typeface="Arial"/>
               </a:rPr>
-              <a:t>기여 0</a:t>
+              <a:t>LMCache</a:t>
             </a:r>
           </a:p>
         </p:txBody>
@@ -13725,7 +13722,7 @@
                 <a:latin typeface="Arial"/>
                 <a:ea typeface="Arial"/>
               </a:rPr>
-              <a:t>LMCache · Mooncake</a:t>
+              <a:t>Dynamo · Mooncake</a:t>
             </a:r>
           </a:p>
         </p:txBody>
@@ -14361,7 +14358,7 @@
                 <a:latin typeface="Arial"/>
                 <a:ea typeface="Arial"/>
               </a:rPr>
-              <a:t>KV 캐시 관리자 4종에 </a:t>
+              <a:t>LMCache: </a:t>
             </a:r>
             <a:r>
               <a:rPr sz="1800" b="1">
@@ -14371,7 +14368,7 @@
                 <a:latin typeface="Arial"/>
                 <a:ea typeface="Arial"/>
               </a:rPr>
-              <a:t>삼성 기여 0</a:t>
+              <a:t>삼성 Committer · FDP 배치 머지</a:t>
             </a:r>
           </a:p>
           <a:p>
@@ -14388,7 +14385,7 @@
                 <a:latin typeface="Arial"/>
                 <a:ea typeface="Arial"/>
               </a:rPr>
-              <a:t>LMCache · Mooncake · FlexKV · Dynamo</a:t>
+              <a:t>Mooncake · FlexKV · Dynamo: 기여 0</a:t>
             </a:r>
           </a:p>
         </p:txBody>
@@ -14592,7 +14589,7 @@
                 <a:latin typeface="Arial"/>
                 <a:ea typeface="Arial"/>
               </a:rPr>
-              <a:t>벤치마크: Micron ↔ Anthropic 전략적 계약(2026-06-22: 공동 최적화 · 다년 공급 · 운영 통합 · 전략 투자, 재무 조건 비공개) · Palantir FDE(고객 상주, 한 고객에 많은 능력, 성과로 평가) · KV 캐시 관리자 기여는 공개 저장소 기준(2026-09) · 인터뷰: 신문섭(Bain), 송용호 · 로고는 식별 표시</a:t>
+              <a:t>벤치마크: Micron ↔ Anthropic 전략적 계약(2026-06-22: 공동 최적화 · 다년 공급 · 운영 통합 · 전략 투자, 재무 조건 비공개) · Palantir FDE(고객 상주, 한 고객에 많은 능력, 성과로 평가) · KV 캐시 관리자 기여는 공개 저장소 커밋 기준(2026-09-28, LMCache PR #4016) · 인터뷰: 신문섭(Bain), 송용호 · 로고는 식별 표시</a:t>
             </a:r>
           </a:p>
         </p:txBody>
